--- a/docs/pitch/WIN-Reto03-Pitch-3min.pptx
+++ b/docs/pitch/WIN-Reto03-Pitch-3min.pptx
@@ -13,6 +13,7 @@
     <p:sldId id="261" r:id="rId13"/>
     <p:sldId id="262" r:id="rId14"/>
     <p:sldId id="263" r:id="rId15"/>
+    <p:sldId id="264" r:id="rId16"/>
   </p:sldIdLst>
   <p:sldSz cx="12191695" cy="6858000" type="screen4x3"/>
   <p:notesSz cx="6858000" cy="9144000"/>
@@ -793,28 +794,13 @@
           <a:lstStyle/>
           <a:p>
             <a:r>
-              <a:t>1:35–2:05 · DIFERENCIA (nombra la alternativa sin miedo)</a:t>
+              <a:t>1:35–1:50 · IMPACTO</a:t>
             </a:r>
           </a:p>
           <a:p/>
           <a:p>
             <a:r>
-              <a:t>A diferencia de una auditoría muestral, esto corre en cada venta y antes de instalar.</a:t>
-            </a:r>
-          </a:p>
-          <a:p>
-            <a:r>
-              <a:t>A diferencia de un score de riesgo, no hay caja negra: la decisión es costo esperado del defecto contra costo de revisar, en soles, y se explica campo por campo.</a:t>
-            </a:r>
-          </a:p>
-          <a:p>
-            <a:r>
-              <a:t>Y no necesita histórico etiquetado: corre el día uno con el tarifario público.</a:t>
-            </a:r>
-          </a:p>
-          <a:p>
-            <a:r>
-              <a:t>La IA extrae, mapea y redacta. Nunca decide.</a:t>
+              <a:t>Hoy una venta mala se descubre cuando ya costó: S/80 la instalación fallida, S/45 el reclamo, S/58 la reversión, S/95 la baja. Con el sistema se revisa antes de instalar, solo si el defecto esperado cuesta más que los 12 minutos de revisión. Las ventas buenas pasan sin tocarse y el cliente confirma en 20 segundos.</a:t>
             </a:r>
           </a:p>
         </p:txBody>
@@ -884,23 +870,28 @@
           <a:lstStyle/>
           <a:p>
             <a:r>
-              <a:t>2:05–2:30 · TRACCIÓN (números, no promesas; señala el QR)</a:t>
+              <a:t>1:35–2:05 · DIFERENCIA (nombra la alternativa sin miedo)</a:t>
             </a:r>
           </a:p>
           <a:p/>
           <a:p>
             <a:r>
-              <a:t>Esto no es una maqueta. Corre ahora, en esa URL, sin instalar nada.</a:t>
-            </a:r>
-          </a:p>
-          <a:p>
-            <a:r>
-              <a:t>39 reglas con fuente declarada. 24 casos adversarios y 25 casos demo en el repo. Un contrato de datos de 30 campos donde 21 ya existen en WIN. 97 pruebas en verde.</a:t>
-            </a:r>
-          </a:p>
-          <a:p>
-            <a:r>
-              <a:t>Escaneen el código y prueben con su propio lote mientras seguimos.</a:t>
+              <a:t>A diferencia de una auditoría muestral, esto corre en cada venta y antes de instalar.</a:t>
+            </a:r>
+          </a:p>
+          <a:p>
+            <a:r>
+              <a:t>A diferencia de un score de riesgo, no hay caja negra: la decisión es costo esperado del defecto contra costo de revisar, en soles, y se explica campo por campo.</a:t>
+            </a:r>
+          </a:p>
+          <a:p>
+            <a:r>
+              <a:t>Y no necesita histórico etiquetado: corre el día uno con el tarifario público.</a:t>
+            </a:r>
+          </a:p>
+          <a:p>
+            <a:r>
+              <a:t>La IA extrae, mapea y redacta. Nunca decide.</a:t>
             </a:r>
           </a:p>
         </p:txBody>
@@ -970,19 +961,23 @@
           <a:lstStyle/>
           <a:p>
             <a:r>
-              <a:t>2:30–2:40 · EQUIPO (una línea por persona; ahora sí, el nombre)</a:t>
+              <a:t>2:05–2:30 · TRACCIÓN (números, no promesas; señala el QR)</a:t>
             </a:r>
           </a:p>
           <a:p/>
           <a:p>
             <a:r>
-              <a:t>Somos tres: Roger construyó el motor que decide, Abraham la pantalla que lo explica en un teléfono, y Jonatan el circuito que lo cierra con el cliente.</a:t>
-            </a:r>
-          </a:p>
-          <a:p/>
-          <a:p>
-            <a:r>
-              <a:t>(Si quieren, reemplacen cada línea por la que conecta a cada uno con el problema: experiencia en ventas, en atención, en datos.)</a:t>
+              <a:t>Esto no es una maqueta. Corre ahora, en esa URL, sin instalar nada.</a:t>
+            </a:r>
+          </a:p>
+          <a:p>
+            <a:r>
+              <a:t>39 reglas con fuente declarada. 24 casos adversarios y 25 casos demo en el repo. Un contrato de datos de 30 campos donde 21 ya existen en WIN. 97 pruebas en verde.</a:t>
+            </a:r>
+          </a:p>
+          <a:p>
+            <a:r>
+              <a:t>Escaneen el código y prueben con su propio lote mientras seguimos.</a:t>
             </a:r>
           </a:p>
         </p:txBody>
@@ -1052,23 +1047,19 @@
           <a:lstStyle/>
           <a:p>
             <a:r>
-              <a:t>2:40–3:00 · CIERRE Y PEDIDO (memorizar palabra por palabra; termina en el pedido, no en gracias)</a:t>
+              <a:t>2:30–2:40 · EQUIPO (una línea por persona; ahora sí, el nombre)</a:t>
             </a:r>
           </a:p>
           <a:p/>
           <a:p>
             <a:r>
-              <a:t>Que lo prometido sea lo entregado: antes de la instalación, no después del reclamo.</a:t>
-            </a:r>
-          </a:p>
-          <a:p>
-            <a:r>
-              <a:t>Pedimos un piloto de 30 días con Calidad de Venta: acceso al registro de ventas por API, tres cifras que hoy no tenemos, y los cinco campos que faltan del contrato. [pausa]</a:t>
-            </a:r>
-          </a:p>
-          <a:p>
-            <a:r>
-              <a:t>Escaneen el código. Está corriendo.</a:t>
+              <a:t>Somos tres: Roger construyó el motor que decide, Abraham la pantalla que lo explica en un teléfono, y Jonatan el circuito que lo cierra con el cliente.</a:t>
+            </a:r>
+          </a:p>
+          <a:p/>
+          <a:p>
+            <a:r>
+              <a:t>(Si quieren, reemplacen cada línea por la que conecta a cada uno con el problema: experiencia en ventas, en atención, en datos.)</a:t>
             </a:r>
           </a:p>
         </p:txBody>
@@ -1094,6 +1085,92 @@
 </file>
 
 <file path=ppt/notesSlides/notesSlide8.xml><?xml version="1.0" encoding="utf-8"?>
+<p:notes xmlns:a="http://schemas.openxmlformats.org/drawingml/2006/main" xmlns:p="http://schemas.openxmlformats.org/presentationml/2006/main" xmlns:r="http://schemas.openxmlformats.org/officeDocument/2006/relationships">
+  <p:cSld>
+    <p:spTree>
+      <p:nvGrpSpPr>
+        <p:cNvPr id="1" name=""/>
+        <p:cNvGrpSpPr/>
+        <p:nvPr/>
+      </p:nvGrpSpPr>
+      <p:grpSpPr>
+        <a:xfrm>
+          <a:off x="0" y="0"/>
+          <a:ext cx="0" cy="0"/>
+          <a:chOff x="0" y="0"/>
+          <a:chExt cx="0" cy="0"/>
+        </a:xfrm>
+      </p:grpSpPr>
+      <p:sp>
+        <p:nvSpPr>
+          <p:cNvPr id="2" name="Slide Image Placeholder 1"/>
+          <p:cNvSpPr>
+            <a:spLocks noGrp="1"/>
+          </p:cNvSpPr>
+          <p:nvPr>
+            <p:ph type="sldImg" idx="2"/>
+          </p:nvPr>
+        </p:nvSpPr>
+        <p:spPr/>
+      </p:sp>
+      <p:sp>
+        <p:nvSpPr>
+          <p:cNvPr id="3" name="Notes Placeholder 2"/>
+          <p:cNvSpPr>
+            <a:spLocks noGrp="1"/>
+          </p:cNvSpPr>
+          <p:nvPr>
+            <p:ph type="body" idx="3" sz="quarter"/>
+          </p:nvPr>
+        </p:nvSpPr>
+        <p:spPr/>
+        <p:txBody>
+          <a:bodyPr/>
+          <a:lstStyle/>
+          <a:p>
+            <a:r>
+              <a:t>2:40–3:00 · CIERRE Y PEDIDO (memorizar palabra por palabra; termina en el pedido, no en gracias)</a:t>
+            </a:r>
+          </a:p>
+          <a:p/>
+          <a:p>
+            <a:r>
+              <a:t>Que lo prometido sea lo entregado: antes de la instalación, no después del reclamo.</a:t>
+            </a:r>
+          </a:p>
+          <a:p>
+            <a:r>
+              <a:t>Pedimos un piloto de 30 días con Calidad de Venta: acceso al registro de ventas por API, tres cifras que hoy no tenemos, y los cinco campos que faltan del contrato. [pausa]</a:t>
+            </a:r>
+          </a:p>
+          <a:p>
+            <a:r>
+              <a:t>Escaneen el código. Está corriendo.</a:t>
+            </a:r>
+          </a:p>
+        </p:txBody>
+      </p:sp>
+      <p:sp>
+        <p:nvSpPr>
+          <p:cNvPr id="4" name="Slide Number Placeholder 3"/>
+          <p:cNvSpPr>
+            <a:spLocks noGrp="1"/>
+          </p:cNvSpPr>
+          <p:nvPr>
+            <p:ph type="sldNum" idx="5" sz="quarter"/>
+          </p:nvPr>
+        </p:nvSpPr>
+        <p:spPr/>
+      </p:sp>
+    </p:spTree>
+  </p:cSld>
+  <p:clrMapOvr>
+    <a:masterClrMapping/>
+  </p:clrMapOvr>
+</p:notes>
+</file>
+
+<file path=ppt/notesSlides/notesSlide9.xml><?xml version="1.0" encoding="utf-8"?>
 <p:notes xmlns:a="http://schemas.openxmlformats.org/drawingml/2006/main" xmlns:p="http://schemas.openxmlformats.org/presentationml/2006/main" xmlns:r="http://schemas.openxmlformats.org/officeDocument/2006/relationships">
   <p:cSld>
     <p:spTree>
@@ -4228,45 +4305,6 @@
         </p:nvSpPr>
         <p:spPr>
           <a:xfrm>
-            <a:off x="1005840" y="274320"/>
-            <a:ext cx="5486400" cy="411480"/>
-          </a:xfrm>
-          <a:prstGeom prst="rect">
-            <a:avLst/>
-          </a:prstGeom>
-          <a:noFill/>
-        </p:spPr>
-        <p:txBody>
-          <a:bodyPr wrap="square" anchor="ctr" lIns="45720" rIns="45720" tIns="27432" bIns="27432">
-            <a:spAutoFit/>
-          </a:bodyPr>
-          <a:lstStyle/>
-          <a:p>
-            <a:pPr algn="l">
-              <a:lnSpc>
-                <a:spcPct val="105000"/>
-              </a:lnSpc>
-            </a:pPr>
-            <a:r>
-              <a:rPr sz="1200" b="0">
-                <a:solidFill>
-                  <a:srgbClr val="FFFFFF"/>
-                </a:solidFill>
-                <a:latin typeface="Helvetica Neue"/>
-              </a:rPr>
-              <a:t>Reto 03 · Que lo prometido sea lo entregado</a:t>
-            </a:r>
-          </a:p>
-        </p:txBody>
-      </p:sp>
-      <p:sp>
-        <p:nvSpPr>
-          <p:cNvPr id="5" name="TextBox 4"/>
-          <p:cNvSpPr txBox="1"/>
-          <p:nvPr/>
-        </p:nvSpPr>
-        <p:spPr>
-          <a:xfrm>
             <a:off x="8503920" y="274320"/>
             <a:ext cx="3291840" cy="411480"/>
           </a:xfrm>
@@ -4276,7 +4314,7 @@
           <a:noFill/>
         </p:spPr>
         <p:txBody>
-          <a:bodyPr wrap="square" anchor="ctr" lIns="45720" rIns="45720" tIns="27432" bIns="27432">
+          <a:bodyPr wrap="square" anchor="ctr">
             <a:spAutoFit/>
           </a:bodyPr>
           <a:lstStyle/>
@@ -4300,14 +4338,14 @@
       </p:sp>
       <p:sp>
         <p:nvSpPr>
-          <p:cNvPr id="6" name="TextBox 5"/>
+          <p:cNvPr id="5" name="TextBox 4"/>
           <p:cNvSpPr txBox="1"/>
           <p:nvPr/>
         </p:nvSpPr>
         <p:spPr>
           <a:xfrm>
-            <a:off x="822960" y="1371600"/>
-            <a:ext cx="10515600" cy="1097280"/>
+            <a:off x="822960" y="1554480"/>
+            <a:ext cx="10515600" cy="1280160"/>
           </a:xfrm>
           <a:prstGeom prst="rect">
             <a:avLst/>
@@ -4315,7 +4353,7 @@
           <a:noFill/>
         </p:spPr>
         <p:txBody>
-          <a:bodyPr wrap="square" anchor="t" lIns="45720" rIns="45720" tIns="27432" bIns="27432">
+          <a:bodyPr wrap="square" anchor="t">
             <a:spAutoFit/>
           </a:bodyPr>
           <a:lstStyle/>
@@ -4326,7 +4364,7 @@
               </a:lnSpc>
             </a:pPr>
             <a:r>
-              <a:rPr sz="5400" b="1">
+              <a:rPr sz="6000" b="1">
                 <a:solidFill>
                   <a:srgbClr val="FFFFFF"/>
                 </a:solidFill>
@@ -4339,14 +4377,14 @@
       </p:sp>
       <p:sp>
         <p:nvSpPr>
-          <p:cNvPr id="7" name="TextBox 6"/>
+          <p:cNvPr id="6" name="TextBox 5"/>
           <p:cNvSpPr txBox="1"/>
           <p:nvPr/>
         </p:nvSpPr>
         <p:spPr>
           <a:xfrm>
-            <a:off x="822960" y="2514600"/>
-            <a:ext cx="10515600" cy="1188720"/>
+            <a:off x="822960" y="3017520"/>
+            <a:ext cx="10515600" cy="1280160"/>
           </a:xfrm>
           <a:prstGeom prst="rect">
             <a:avLst/>
@@ -4354,7 +4392,7 @@
           <a:noFill/>
         </p:spPr>
         <p:txBody>
-          <a:bodyPr wrap="square" anchor="t" lIns="45720" rIns="45720" tIns="27432" bIns="27432">
+          <a:bodyPr wrap="square" anchor="t">
             <a:spAutoFit/>
           </a:bodyPr>
           <a:lstStyle/>
@@ -4365,27 +4403,27 @@
               </a:lnSpc>
             </a:pPr>
             <a:r>
-              <a:rPr sz="5400" b="1">
+              <a:rPr sz="6000" b="1">
                 <a:solidFill>
                   <a:srgbClr val="FF5A0A"/>
                 </a:solidFill>
                 <a:latin typeface="Helvetica Neue"/>
               </a:rPr>
-              <a:t>La primera factura llegó en S/109.</a:t>
-            </a:r>
-          </a:p>
-        </p:txBody>
-      </p:sp>
-      <p:sp>
-        <p:nvSpPr>
-          <p:cNvPr id="8" name="TextBox 7"/>
+              <a:t>La factura llegó en S/109.</a:t>
+            </a:r>
+          </a:p>
+        </p:txBody>
+      </p:sp>
+      <p:sp>
+        <p:nvSpPr>
+          <p:cNvPr id="7" name="TextBox 6"/>
           <p:cNvSpPr txBox="1"/>
           <p:nvPr/>
         </p:nvSpPr>
         <p:spPr>
           <a:xfrm>
-            <a:off x="822960" y="4114800"/>
-            <a:ext cx="10515600" cy="1463040"/>
+            <a:off x="822960" y="4846320"/>
+            <a:ext cx="10515600" cy="731520"/>
           </a:xfrm>
           <a:prstGeom prst="rect">
             <a:avLst/>
@@ -4393,7 +4431,7 @@
           <a:noFill/>
         </p:spPr>
         <p:txBody>
-          <a:bodyPr wrap="square" anchor="t" lIns="45720" rIns="45720" tIns="27432" bIns="27432">
+          <a:bodyPr wrap="square" anchor="t">
             <a:spAutoFit/>
           </a:bodyPr>
           <a:lstStyle/>
@@ -4404,68 +4442,13 @@
               </a:lnSpc>
             </a:pPr>
             <a:r>
-              <a:rPr sz="2200" b="0">
+              <a:rPr sz="2000" b="0">
                 <a:solidFill>
                   <a:srgbClr val="F6F6F6"/>
                 </a:solidFill>
                 <a:latin typeface="Helvetica Neue"/>
               </a:rPr>
-              <a:t>S/79 del plan + S/20 de la cuota 1 de 6 de instalación + S/10 del recibo físico.</a:t>
-            </a:r>
-          </a:p>
-          <a:p>
-            <a:pPr algn="l">
-              <a:lnSpc>
-                <a:spcPct val="105000"/>
-              </a:lnSpc>
-            </a:pPr>
-            <a:r>
-              <a:rPr sz="2200" b="1">
-                <a:solidFill>
-                  <a:srgbClr val="FFFFFF"/>
-                </a:solidFill>
-                <a:latin typeface="Helvetica Neue"/>
-              </a:rPr>
-              <a:t>Todo estaba en el contrato. Nada estaba en la promesa.</a:t>
-            </a:r>
-          </a:p>
-        </p:txBody>
-      </p:sp>
-      <p:sp>
-        <p:nvSpPr>
-          <p:cNvPr id="9" name="TextBox 8"/>
-          <p:cNvSpPr txBox="1"/>
-          <p:nvPr/>
-        </p:nvSpPr>
-        <p:spPr>
-          <a:xfrm>
-            <a:off x="822960" y="5943600"/>
-            <a:ext cx="10515600" cy="457200"/>
-          </a:xfrm>
-          <a:prstGeom prst="rect">
-            <a:avLst/>
-          </a:prstGeom>
-          <a:noFill/>
-        </p:spPr>
-        <p:txBody>
-          <a:bodyPr wrap="square" anchor="t" lIns="45720" rIns="45720" tIns="27432" bIns="27432">
-            <a:spAutoFit/>
-          </a:bodyPr>
-          <a:lstStyle/>
-          <a:p>
-            <a:pPr algn="l">
-              <a:lnSpc>
-                <a:spcPct val="105000"/>
-              </a:lnSpc>
-            </a:pPr>
-            <a:r>
-              <a:rPr sz="1100" b="0">
-                <a:solidFill>
-                  <a:srgbClr val="DEDBD9"/>
-                </a:solidFill>
-                <a:latin typeface="Helvetica Neue"/>
-              </a:rPr>
-              <a:t>Fuente: cartilla informativa WIN §2.2 y Anexo 1 del contrato (documentos públicos). Caso sintético.</a:t>
+              <a:t>Plan S/79 + instalación S/20 + recibo físico S/10. Todo en el contrato. Nada en la promesa.</a:t>
             </a:r>
           </a:p>
         </p:txBody>
@@ -4572,45 +4555,6 @@
         </p:nvSpPr>
         <p:spPr>
           <a:xfrm>
-            <a:off x="1005840" y="274320"/>
-            <a:ext cx="5486400" cy="411480"/>
-          </a:xfrm>
-          <a:prstGeom prst="rect">
-            <a:avLst/>
-          </a:prstGeom>
-          <a:noFill/>
-        </p:spPr>
-        <p:txBody>
-          <a:bodyPr wrap="square" anchor="ctr" lIns="45720" rIns="45720" tIns="27432" bIns="27432">
-            <a:spAutoFit/>
-          </a:bodyPr>
-          <a:lstStyle/>
-          <a:p>
-            <a:pPr algn="l">
-              <a:lnSpc>
-                <a:spcPct val="105000"/>
-              </a:lnSpc>
-            </a:pPr>
-            <a:r>
-              <a:rPr sz="1200" b="0">
-                <a:solidFill>
-                  <a:srgbClr val="4B4B4B"/>
-                </a:solidFill>
-                <a:latin typeface="Helvetica Neue"/>
-              </a:rPr>
-              <a:t>Reto 03 · Que lo prometido sea lo entregado</a:t>
-            </a:r>
-          </a:p>
-        </p:txBody>
-      </p:sp>
-      <p:sp>
-        <p:nvSpPr>
-          <p:cNvPr id="5" name="TextBox 4"/>
-          <p:cNvSpPr txBox="1"/>
-          <p:nvPr/>
-        </p:nvSpPr>
-        <p:spPr>
-          <a:xfrm>
             <a:off x="8503920" y="274320"/>
             <a:ext cx="3291840" cy="411480"/>
           </a:xfrm>
@@ -4620,7 +4564,7 @@
           <a:noFill/>
         </p:spPr>
         <p:txBody>
-          <a:bodyPr wrap="square" anchor="ctr" lIns="45720" rIns="45720" tIns="27432" bIns="27432">
+          <a:bodyPr wrap="square" anchor="ctr">
             <a:spAutoFit/>
           </a:bodyPr>
           <a:lstStyle/>
@@ -4644,14 +4588,14 @@
       </p:sp>
       <p:sp>
         <p:nvSpPr>
-          <p:cNvPr id="6" name="TextBox 5"/>
+          <p:cNvPr id="5" name="TextBox 4"/>
           <p:cNvSpPr txBox="1"/>
           <p:nvPr/>
         </p:nvSpPr>
         <p:spPr>
           <a:xfrm>
             <a:off x="822960" y="914400"/>
-            <a:ext cx="10515600" cy="822960"/>
+            <a:ext cx="10515600" cy="914400"/>
           </a:xfrm>
           <a:prstGeom prst="rect">
             <a:avLst/>
@@ -4659,7 +4603,7 @@
           <a:noFill/>
         </p:spPr>
         <p:txBody>
-          <a:bodyPr wrap="square" anchor="t" lIns="45720" rIns="45720" tIns="27432" bIns="27432">
+          <a:bodyPr wrap="square" anchor="t">
             <a:spAutoFit/>
           </a:bodyPr>
           <a:lstStyle/>
@@ -4670,27 +4614,27 @@
               </a:lnSpc>
             </a:pPr>
             <a:r>
-              <a:rPr sz="2800" b="1">
+              <a:rPr sz="3400" b="1">
                 <a:solidFill>
                   <a:srgbClr val="301D19"/>
                 </a:solidFill>
                 <a:latin typeface="Helvetica Neue"/>
               </a:rPr>
-              <a:t>Una venta que no fue lo que parecía no se paga en la venta. Se paga después.</a:t>
-            </a:r>
-          </a:p>
-        </p:txBody>
-      </p:sp>
-      <p:sp>
-        <p:nvSpPr>
-          <p:cNvPr id="7" name="Rectangle 6"/>
+              <a:t>Se paga después de la venta, nunca en la venta.</a:t>
+            </a:r>
+          </a:p>
+        </p:txBody>
+      </p:sp>
+      <p:sp>
+        <p:nvSpPr>
+          <p:cNvPr id="6" name="Rectangle 5"/>
           <p:cNvSpPr/>
           <p:nvPr/>
         </p:nvSpPr>
         <p:spPr>
           <a:xfrm>
-            <a:off x="822960" y="2011680"/>
-            <a:ext cx="3337560" cy="3566160"/>
+            <a:off x="822960" y="2103120"/>
+            <a:ext cx="3337560" cy="3291840"/>
           </a:xfrm>
           <a:prstGeom prst="rect">
             <a:avLst/>
@@ -4698,7 +4642,7 @@
           <a:solidFill>
             <a:srgbClr val="FFFFFF"/>
           </a:solidFill>
-          <a:ln w="12700">
+          <a:ln w="19050">
             <a:solidFill>
               <a:srgbClr val="DEDBD9"/>
             </a:solidFill>
@@ -4729,14 +4673,14 @@
       </p:sp>
       <p:sp>
         <p:nvSpPr>
-          <p:cNvPr id="8" name="Rectangle 7"/>
+          <p:cNvPr id="7" name="Rectangle 6"/>
           <p:cNvSpPr/>
           <p:nvPr/>
         </p:nvSpPr>
         <p:spPr>
           <a:xfrm>
-            <a:off x="822960" y="2011680"/>
-            <a:ext cx="3337560" cy="73152"/>
+            <a:off x="822960" y="2103120"/>
+            <a:ext cx="3337560" cy="91440"/>
           </a:xfrm>
           <a:prstGeom prst="rect">
             <a:avLst/>
@@ -4773,14 +4717,14 @@
       </p:sp>
       <p:sp>
         <p:nvSpPr>
-          <p:cNvPr id="9" name="TextBox 8"/>
+          <p:cNvPr id="8" name="TextBox 7"/>
           <p:cNvSpPr txBox="1"/>
           <p:nvPr/>
         </p:nvSpPr>
         <p:spPr>
           <a:xfrm>
-            <a:off x="1005840" y="2240280"/>
-            <a:ext cx="3017520" cy="1005840"/>
+            <a:off x="1005840" y="2423160"/>
+            <a:ext cx="3017520" cy="1371600"/>
           </a:xfrm>
           <a:prstGeom prst="rect">
             <a:avLst/>
@@ -4788,18 +4732,18 @@
           <a:noFill/>
         </p:spPr>
         <p:txBody>
-          <a:bodyPr wrap="square" anchor="t" lIns="45720" rIns="45720" tIns="27432" bIns="27432">
+          <a:bodyPr wrap="square" anchor="ctr">
             <a:spAutoFit/>
           </a:bodyPr>
           <a:lstStyle/>
           <a:p>
-            <a:pPr algn="l">
+            <a:pPr algn="ctr">
               <a:lnSpc>
                 <a:spcPct val="105000"/>
               </a:lnSpc>
             </a:pPr>
             <a:r>
-              <a:rPr sz="4400" b="1">
+              <a:rPr sz="5400" b="1">
                 <a:solidFill>
                   <a:srgbClr val="C83D08"/>
                 </a:solidFill>
@@ -4812,14 +4756,14 @@
       </p:sp>
       <p:sp>
         <p:nvSpPr>
-          <p:cNvPr id="10" name="TextBox 9"/>
+          <p:cNvPr id="9" name="TextBox 8"/>
           <p:cNvSpPr txBox="1"/>
           <p:nvPr/>
         </p:nvSpPr>
         <p:spPr>
           <a:xfrm>
-            <a:off x="1005840" y="3291840"/>
-            <a:ext cx="3017520" cy="1463040"/>
+            <a:off x="1005840" y="3886200"/>
+            <a:ext cx="3017520" cy="1371600"/>
           </a:xfrm>
           <a:prstGeom prst="rect">
             <a:avLst/>
@@ -4827,77 +4771,38 @@
           <a:noFill/>
         </p:spPr>
         <p:txBody>
-          <a:bodyPr wrap="square" anchor="t" lIns="45720" rIns="45720" tIns="27432" bIns="27432">
+          <a:bodyPr wrap="square" anchor="t">
             <a:spAutoFit/>
           </a:bodyPr>
           <a:lstStyle/>
           <a:p>
-            <a:pPr algn="l">
+            <a:pPr algn="ctr">
               <a:lnSpc>
                 <a:spcPct val="105000"/>
               </a:lnSpc>
             </a:pPr>
             <a:r>
-              <a:rPr sz="1700" b="0">
+              <a:rPr sz="2000" b="0">
                 <a:solidFill>
                   <a:srgbClr val="301D19"/>
                 </a:solidFill>
                 <a:latin typeface="Helvetica Neue"/>
               </a:rPr>
-              <a:t>de los reclamos de telecomunicaciones en el Perú, 2025, son por facturación y cobro.</a:t>
-            </a:r>
-          </a:p>
-        </p:txBody>
-      </p:sp>
-      <p:sp>
-        <p:nvSpPr>
-          <p:cNvPr id="11" name="TextBox 10"/>
-          <p:cNvSpPr txBox="1"/>
-          <p:nvPr/>
-        </p:nvSpPr>
-        <p:spPr>
-          <a:xfrm>
-            <a:off x="1005840" y="4846320"/>
-            <a:ext cx="3017520" cy="640080"/>
-          </a:xfrm>
-          <a:prstGeom prst="rect">
-            <a:avLst/>
-          </a:prstGeom>
-          <a:noFill/>
-        </p:spPr>
-        <p:txBody>
-          <a:bodyPr wrap="square" anchor="t" lIns="45720" rIns="45720" tIns="27432" bIns="27432">
-            <a:spAutoFit/>
-          </a:bodyPr>
-          <a:lstStyle/>
-          <a:p>
-            <a:pPr algn="l">
-              <a:lnSpc>
-                <a:spcPct val="105000"/>
-              </a:lnSpc>
-            </a:pPr>
-            <a:r>
-              <a:rPr sz="1000" b="0">
-                <a:solidFill>
-                  <a:srgbClr val="4B4B4B"/>
-                </a:solidFill>
-                <a:latin typeface="Helvetica Neue"/>
-              </a:rPr>
-              <a:t>502 944 de 1 257 286 · OSIPTEL, Informe 000069-2025-DAPU</a:t>
-            </a:r>
-          </a:p>
-        </p:txBody>
-      </p:sp>
-      <p:sp>
-        <p:nvSpPr>
-          <p:cNvPr id="12" name="Rectangle 11"/>
+              <a:t>de los reclamos de telecom en el Perú son por facturación y cobro.</a:t>
+            </a:r>
+          </a:p>
+        </p:txBody>
+      </p:sp>
+      <p:sp>
+        <p:nvSpPr>
+          <p:cNvPr id="10" name="Rectangle 9"/>
           <p:cNvSpPr/>
           <p:nvPr/>
         </p:nvSpPr>
         <p:spPr>
           <a:xfrm>
-            <a:off x="4434840" y="2011680"/>
-            <a:ext cx="3337560" cy="3566160"/>
+            <a:off x="4434840" y="2103120"/>
+            <a:ext cx="3337560" cy="3291840"/>
           </a:xfrm>
           <a:prstGeom prst="rect">
             <a:avLst/>
@@ -4905,7 +4810,7 @@
           <a:solidFill>
             <a:srgbClr val="FFFFFF"/>
           </a:solidFill>
-          <a:ln w="12700">
+          <a:ln w="19050">
             <a:solidFill>
               <a:srgbClr val="DEDBD9"/>
             </a:solidFill>
@@ -4936,14 +4841,14 @@
       </p:sp>
       <p:sp>
         <p:nvSpPr>
-          <p:cNvPr id="13" name="Rectangle 12"/>
+          <p:cNvPr id="11" name="Rectangle 10"/>
           <p:cNvSpPr/>
           <p:nvPr/>
         </p:nvSpPr>
         <p:spPr>
           <a:xfrm>
-            <a:off x="4434840" y="2011680"/>
-            <a:ext cx="3337560" cy="73152"/>
+            <a:off x="4434840" y="2103120"/>
+            <a:ext cx="3337560" cy="91440"/>
           </a:xfrm>
           <a:prstGeom prst="rect">
             <a:avLst/>
@@ -4980,14 +4885,14 @@
       </p:sp>
       <p:sp>
         <p:nvSpPr>
-          <p:cNvPr id="14" name="TextBox 13"/>
+          <p:cNvPr id="12" name="TextBox 11"/>
           <p:cNvSpPr txBox="1"/>
           <p:nvPr/>
         </p:nvSpPr>
         <p:spPr>
           <a:xfrm>
-            <a:off x="4617720" y="2240280"/>
-            <a:ext cx="3017520" cy="1005840"/>
+            <a:off x="4617720" y="2423160"/>
+            <a:ext cx="3017520" cy="1371600"/>
           </a:xfrm>
           <a:prstGeom prst="rect">
             <a:avLst/>
@@ -4995,38 +4900,38 @@
           <a:noFill/>
         </p:spPr>
         <p:txBody>
-          <a:bodyPr wrap="square" anchor="t" lIns="45720" rIns="45720" tIns="27432" bIns="27432">
+          <a:bodyPr wrap="square" anchor="ctr">
             <a:spAutoFit/>
           </a:bodyPr>
           <a:lstStyle/>
           <a:p>
-            <a:pPr algn="l">
+            <a:pPr algn="ctr">
               <a:lnSpc>
                 <a:spcPct val="105000"/>
               </a:lnSpc>
             </a:pPr>
             <a:r>
-              <a:rPr sz="4400" b="1">
+              <a:rPr sz="5400" b="1">
                 <a:solidFill>
                   <a:srgbClr val="C83D08"/>
                 </a:solidFill>
                 <a:latin typeface="Helvetica Neue"/>
               </a:rPr>
-              <a:t>3 tarifarios</a:t>
-            </a:r>
-          </a:p>
-        </p:txBody>
-      </p:sp>
-      <p:sp>
-        <p:nvSpPr>
-          <p:cNvPr id="15" name="TextBox 14"/>
+              <a:t>3</a:t>
+            </a:r>
+          </a:p>
+        </p:txBody>
+      </p:sp>
+      <p:sp>
+        <p:nvSpPr>
+          <p:cNvPr id="13" name="TextBox 12"/>
           <p:cNvSpPr txBox="1"/>
           <p:nvPr/>
         </p:nvSpPr>
         <p:spPr>
           <a:xfrm>
-            <a:off x="4617720" y="3291840"/>
-            <a:ext cx="3017520" cy="1463040"/>
+            <a:off x="4617720" y="3886200"/>
+            <a:ext cx="3017520" cy="1371600"/>
           </a:xfrm>
           <a:prstGeom prst="rect">
             <a:avLst/>
@@ -5034,77 +4939,38 @@
           <a:noFill/>
         </p:spPr>
         <p:txBody>
-          <a:bodyPr wrap="square" anchor="t" lIns="45720" rIns="45720" tIns="27432" bIns="27432">
+          <a:bodyPr wrap="square" anchor="t">
             <a:spAutoFit/>
           </a:bodyPr>
           <a:lstStyle/>
           <a:p>
-            <a:pPr algn="l">
+            <a:pPr algn="ctr">
               <a:lnSpc>
                 <a:spcPct val="105000"/>
               </a:lnSpc>
             </a:pPr>
             <a:r>
-              <a:rPr sz="1700" b="0">
+              <a:rPr sz="2000" b="0">
                 <a:solidFill>
                   <a:srgbClr val="301D19"/>
                 </a:solidFill>
                 <a:latin typeface="Helvetica Neue"/>
               </a:rPr>
-              <a:t>publica WIN hoy, y no coinciden entre sí: mismo plan, distinto precio, distinta promoción.</a:t>
-            </a:r>
-          </a:p>
-        </p:txBody>
-      </p:sp>
-      <p:sp>
-        <p:nvSpPr>
-          <p:cNvPr id="16" name="TextBox 15"/>
-          <p:cNvSpPr txBox="1"/>
-          <p:nvPr/>
-        </p:nvSpPr>
-        <p:spPr>
-          <a:xfrm>
-            <a:off x="4617720" y="4846320"/>
-            <a:ext cx="3017520" cy="640080"/>
-          </a:xfrm>
-          <a:prstGeom prst="rect">
-            <a:avLst/>
-          </a:prstGeom>
-          <a:noFill/>
-        </p:spPr>
-        <p:txBody>
-          <a:bodyPr wrap="square" anchor="t" lIns="45720" rIns="45720" tIns="27432" bIns="27432">
-            <a:spAutoFit/>
-          </a:bodyPr>
-          <a:lstStyle/>
-          <a:p>
-            <a:pPr algn="l">
-              <a:lnSpc>
-                <a:spcPct val="105000"/>
-              </a:lnSpc>
-            </a:pPr>
-            <a:r>
-              <a:rPr sz="1000" b="0">
-                <a:solidFill>
-                  <a:srgbClr val="4B4B4B"/>
-                </a:solidFill>
-                <a:latin typeface="Helvetica Neue"/>
-              </a:rPr>
-              <a:t>Cartilla feb-2024 · win.pe/hogar · win.pe/chiclayo</a:t>
-            </a:r>
-          </a:p>
-        </p:txBody>
-      </p:sp>
-      <p:sp>
-        <p:nvSpPr>
-          <p:cNvPr id="17" name="Rectangle 16"/>
+              <a:t>tarifarios publica WIN hoy. No coinciden entre sí.</a:t>
+            </a:r>
+          </a:p>
+        </p:txBody>
+      </p:sp>
+      <p:sp>
+        <p:nvSpPr>
+          <p:cNvPr id="14" name="Rectangle 13"/>
           <p:cNvSpPr/>
           <p:nvPr/>
         </p:nvSpPr>
         <p:spPr>
           <a:xfrm>
-            <a:off x="8046720" y="2011680"/>
-            <a:ext cx="3337560" cy="3566160"/>
+            <a:off x="8046720" y="2103120"/>
+            <a:ext cx="3337560" cy="3291840"/>
           </a:xfrm>
           <a:prstGeom prst="rect">
             <a:avLst/>
@@ -5112,7 +4978,7 @@
           <a:solidFill>
             <a:srgbClr val="FFFFFF"/>
           </a:solidFill>
-          <a:ln w="12700">
+          <a:ln w="19050">
             <a:solidFill>
               <a:srgbClr val="DEDBD9"/>
             </a:solidFill>
@@ -5143,14 +5009,14 @@
       </p:sp>
       <p:sp>
         <p:nvSpPr>
-          <p:cNvPr id="18" name="Rectangle 17"/>
+          <p:cNvPr id="15" name="Rectangle 14"/>
           <p:cNvSpPr/>
           <p:nvPr/>
         </p:nvSpPr>
         <p:spPr>
           <a:xfrm>
-            <a:off x="8046720" y="2011680"/>
-            <a:ext cx="3337560" cy="73152"/>
+            <a:off x="8046720" y="2103120"/>
+            <a:ext cx="3337560" cy="91440"/>
           </a:xfrm>
           <a:prstGeom prst="rect">
             <a:avLst/>
@@ -5187,14 +5053,14 @@
       </p:sp>
       <p:sp>
         <p:nvSpPr>
-          <p:cNvPr id="19" name="TextBox 18"/>
+          <p:cNvPr id="16" name="TextBox 15"/>
           <p:cNvSpPr txBox="1"/>
           <p:nvPr/>
         </p:nvSpPr>
         <p:spPr>
           <a:xfrm>
-            <a:off x="8229600" y="2240280"/>
-            <a:ext cx="3017520" cy="1005840"/>
+            <a:off x="8229600" y="2423160"/>
+            <a:ext cx="3017520" cy="1371600"/>
           </a:xfrm>
           <a:prstGeom prst="rect">
             <a:avLst/>
@@ -5202,18 +5068,18 @@
           <a:noFill/>
         </p:spPr>
         <p:txBody>
-          <a:bodyPr wrap="square" anchor="t" lIns="45720" rIns="45720" tIns="27432" bIns="27432">
+          <a:bodyPr wrap="square" anchor="ctr">
             <a:spAutoFit/>
           </a:bodyPr>
           <a:lstStyle/>
           <a:p>
-            <a:pPr algn="l">
+            <a:pPr algn="ctr">
               <a:lnSpc>
                 <a:spcPct val="105000"/>
               </a:lnSpc>
             </a:pPr>
             <a:r>
-              <a:rPr sz="4400" b="1">
+              <a:rPr sz="5400" b="1">
                 <a:solidFill>
                   <a:srgbClr val="C83D08"/>
                 </a:solidFill>
@@ -5226,14 +5092,14 @@
       </p:sp>
       <p:sp>
         <p:nvSpPr>
-          <p:cNvPr id="20" name="TextBox 19"/>
+          <p:cNvPr id="17" name="TextBox 16"/>
           <p:cNvSpPr txBox="1"/>
           <p:nvPr/>
         </p:nvSpPr>
         <p:spPr>
           <a:xfrm>
-            <a:off x="8229600" y="3291840"/>
-            <a:ext cx="3017520" cy="1463040"/>
+            <a:off x="8229600" y="3886200"/>
+            <a:ext cx="3017520" cy="1371600"/>
           </a:xfrm>
           <a:prstGeom prst="rect">
             <a:avLst/>
@@ -5241,7 +5107,46 @@
           <a:noFill/>
         </p:spPr>
         <p:txBody>
-          <a:bodyPr wrap="square" anchor="t" lIns="45720" rIns="45720" tIns="27432" bIns="27432">
+          <a:bodyPr wrap="square" anchor="t">
+            <a:spAutoFit/>
+          </a:bodyPr>
+          <a:lstStyle/>
+          <a:p>
+            <a:pPr algn="ctr">
+              <a:lnSpc>
+                <a:spcPct val="105000"/>
+              </a:lnSpc>
+            </a:pPr>
+            <a:r>
+              <a:rPr sz="2000" b="0">
+                <a:solidFill>
+                  <a:srgbClr val="301D19"/>
+                </a:solidFill>
+                <a:latin typeface="Helvetica Neue"/>
+              </a:rPr>
+              <a:t>cuesta una sola baja temprana. Y ya no se recupera.</a:t>
+            </a:r>
+          </a:p>
+        </p:txBody>
+      </p:sp>
+      <p:sp>
+        <p:nvSpPr>
+          <p:cNvPr id="18" name="TextBox 17"/>
+          <p:cNvSpPr txBox="1"/>
+          <p:nvPr/>
+        </p:nvSpPr>
+        <p:spPr>
+          <a:xfrm>
+            <a:off x="822960" y="5760720"/>
+            <a:ext cx="10515600" cy="457200"/>
+          </a:xfrm>
+          <a:prstGeom prst="rect">
+            <a:avLst/>
+          </a:prstGeom>
+          <a:noFill/>
+        </p:spPr>
+        <p:txBody>
+          <a:bodyPr wrap="square" anchor="t">
             <a:spAutoFit/>
           </a:bodyPr>
           <a:lstStyle/>
@@ -5252,91 +5157,13 @@
               </a:lnSpc>
             </a:pPr>
             <a:r>
-              <a:rPr sz="1700" b="0">
-                <a:solidFill>
-                  <a:srgbClr val="301D19"/>
-                </a:solidFill>
-                <a:latin typeface="Helvetica Neue"/>
-              </a:rPr>
-              <a:t>cuesta una sola baja temprana. Antes de eso: instalación fallida, reclamo, reversión de factura.</a:t>
-            </a:r>
-          </a:p>
-        </p:txBody>
-      </p:sp>
-      <p:sp>
-        <p:nvSpPr>
-          <p:cNvPr id="21" name="TextBox 20"/>
-          <p:cNvSpPr txBox="1"/>
-          <p:nvPr/>
-        </p:nvSpPr>
-        <p:spPr>
-          <a:xfrm>
-            <a:off x="8229600" y="4846320"/>
-            <a:ext cx="3017520" cy="640080"/>
-          </a:xfrm>
-          <a:prstGeom prst="rect">
-            <a:avLst/>
-          </a:prstGeom>
-          <a:noFill/>
-        </p:spPr>
-        <p:txBody>
-          <a:bodyPr wrap="square" anchor="t" lIns="45720" rIns="45720" tIns="27432" bIns="27432">
-            <a:spAutoFit/>
-          </a:bodyPr>
-          <a:lstStyle/>
-          <a:p>
-            <a:pPr algn="l">
-              <a:lnSpc>
-                <a:spcPct val="105000"/>
-              </a:lnSpc>
-            </a:pPr>
-            <a:r>
-              <a:rPr sz="1000" b="0">
+              <a:rPr sz="1100" b="0">
                 <a:solidFill>
                   <a:srgbClr val="4B4B4B"/>
                 </a:solidFill>
                 <a:latin typeface="Helvetica Neue"/>
               </a:rPr>
-              <a:t>Modelo de costo del equipo, P-08 a P-15, valores marcados como supuesto</a:t>
-            </a:r>
-          </a:p>
-        </p:txBody>
-      </p:sp>
-      <p:sp>
-        <p:nvSpPr>
-          <p:cNvPr id="22" name="TextBox 21"/>
-          <p:cNvSpPr txBox="1"/>
-          <p:nvPr/>
-        </p:nvSpPr>
-        <p:spPr>
-          <a:xfrm>
-            <a:off x="822960" y="5806440"/>
-            <a:ext cx="10515600" cy="640080"/>
-          </a:xfrm>
-          <a:prstGeom prst="rect">
-            <a:avLst/>
-          </a:prstGeom>
-          <a:noFill/>
-        </p:spPr>
-        <p:txBody>
-          <a:bodyPr wrap="square" anchor="t" lIns="45720" rIns="45720" tIns="27432" bIns="27432">
-            <a:spAutoFit/>
-          </a:bodyPr>
-          <a:lstStyle/>
-          <a:p>
-            <a:pPr algn="l">
-              <a:lnSpc>
-                <a:spcPct val="105000"/>
-              </a:lnSpc>
-            </a:pPr>
-            <a:r>
-              <a:rPr sz="1500" b="0">
-                <a:solidFill>
-                  <a:srgbClr val="4B4B4B"/>
-                </a:solidFill>
-                <a:latin typeface="Helvetica Neue"/>
-              </a:rPr>
-              <a:t>Quien lo sufre: Ana firmó por S/79 y el técnico llega en 30 días con otra cosa. Y el vendedor honesto carga con el costo del que no lo es.</a:t>
+              <a:t>OSIPTEL 2025 · win.pe, cartilla informativa · modelo de costo del equipo</a:t>
             </a:r>
           </a:p>
         </p:txBody>
@@ -5443,45 +5270,6 @@
         </p:nvSpPr>
         <p:spPr>
           <a:xfrm>
-            <a:off x="1005840" y="274320"/>
-            <a:ext cx="5486400" cy="411480"/>
-          </a:xfrm>
-          <a:prstGeom prst="rect">
-            <a:avLst/>
-          </a:prstGeom>
-          <a:noFill/>
-        </p:spPr>
-        <p:txBody>
-          <a:bodyPr wrap="square" anchor="ctr" lIns="45720" rIns="45720" tIns="27432" bIns="27432">
-            <a:spAutoFit/>
-          </a:bodyPr>
-          <a:lstStyle/>
-          <a:p>
-            <a:pPr algn="l">
-              <a:lnSpc>
-                <a:spcPct val="105000"/>
-              </a:lnSpc>
-            </a:pPr>
-            <a:r>
-              <a:rPr sz="1200" b="0">
-                <a:solidFill>
-                  <a:srgbClr val="4B4B4B"/>
-                </a:solidFill>
-                <a:latin typeface="Helvetica Neue"/>
-              </a:rPr>
-              <a:t>Reto 03 · Que lo prometido sea lo entregado</a:t>
-            </a:r>
-          </a:p>
-        </p:txBody>
-      </p:sp>
-      <p:sp>
-        <p:nvSpPr>
-          <p:cNvPr id="5" name="TextBox 4"/>
-          <p:cNvSpPr txBox="1"/>
-          <p:nvPr/>
-        </p:nvSpPr>
-        <p:spPr>
-          <a:xfrm>
             <a:off x="8503920" y="274320"/>
             <a:ext cx="3291840" cy="411480"/>
           </a:xfrm>
@@ -5491,7 +5279,7 @@
           <a:noFill/>
         </p:spPr>
         <p:txBody>
-          <a:bodyPr wrap="square" anchor="ctr" lIns="45720" rIns="45720" tIns="27432" bIns="27432">
+          <a:bodyPr wrap="square" anchor="ctr">
             <a:spAutoFit/>
           </a:bodyPr>
           <a:lstStyle/>
@@ -5515,14 +5303,14 @@
       </p:sp>
       <p:sp>
         <p:nvSpPr>
-          <p:cNvPr id="6" name="TextBox 5"/>
+          <p:cNvPr id="5" name="TextBox 4"/>
           <p:cNvSpPr txBox="1"/>
           <p:nvPr/>
         </p:nvSpPr>
         <p:spPr>
           <a:xfrm>
             <a:off x="822960" y="914400"/>
-            <a:ext cx="10515600" cy="1371600"/>
+            <a:ext cx="10515600" cy="1188720"/>
           </a:xfrm>
           <a:prstGeom prst="rect">
             <a:avLst/>
@@ -5530,7 +5318,7 @@
           <a:noFill/>
         </p:spPr>
         <p:txBody>
-          <a:bodyPr wrap="square" anchor="t" lIns="45720" rIns="45720" tIns="27432" bIns="27432">
+          <a:bodyPr wrap="square" anchor="t">
             <a:spAutoFit/>
           </a:bodyPr>
           <a:lstStyle/>
@@ -5541,17 +5329,52 @@
               </a:lnSpc>
             </a:pPr>
             <a:r>
-              <a:rPr sz="3000" b="1">
+              <a:rPr sz="3200" b="1">
                 <a:solidFill>
                   <a:srgbClr val="301D19"/>
                 </a:solidFill>
                 <a:latin typeface="Helvetica Neue"/>
               </a:rPr>
-              <a:t>Comparamos cuatro versiones de la misma venta y cada desacuerdo es un defecto explicado en soles.</a:t>
-            </a:r>
-          </a:p>
-        </p:txBody>
-      </p:sp>
+              <a:t>Comparamos 4 versiones de la misma venta. Cada desacuerdo es un defecto, en soles.</a:t>
+            </a:r>
+          </a:p>
+        </p:txBody>
+      </p:sp>
+      <p:cxnSp>
+        <p:nvCxnSpPr>
+          <p:cNvPr id="6" name="Connector 5"/>
+          <p:cNvCxnSpPr/>
+          <p:nvPr/>
+        </p:nvCxnSpPr>
+        <p:spPr>
+          <a:xfrm>
+            <a:off x="2743200" y="3017520"/>
+            <a:ext cx="1554480" cy="1280160"/>
+          </a:xfrm>
+          <a:prstGeom prst="line">
+            <a:avLst/>
+          </a:prstGeom>
+          <a:ln w="31750">
+            <a:solidFill>
+              <a:srgbClr val="DEDBD9"/>
+            </a:solidFill>
+          </a:ln>
+        </p:spPr>
+        <p:style>
+          <a:lnRef idx="2">
+            <a:schemeClr val="accent1"/>
+          </a:lnRef>
+          <a:fillRef idx="0">
+            <a:schemeClr val="accent1"/>
+          </a:fillRef>
+          <a:effectRef idx="1">
+            <a:schemeClr val="accent1"/>
+          </a:effectRef>
+          <a:fontRef idx="minor">
+            <a:schemeClr val="tx1"/>
+          </a:fontRef>
+        </p:style>
+      </p:cxnSp>
       <p:cxnSp>
         <p:nvCxnSpPr>
           <p:cNvPr id="7" name="Connector 6"/>
@@ -5559,14 +5382,14 @@
           <p:nvPr/>
         </p:nvCxnSpPr>
         <p:spPr>
-          <a:xfrm>
-            <a:off x="2743200" y="2880360"/>
-            <a:ext cx="1463040" cy="1234440"/>
+          <a:xfrm flipH="1">
+            <a:off x="2743200" y="4297680"/>
+            <a:ext cx="1554480" cy="1280160"/>
           </a:xfrm>
           <a:prstGeom prst="line">
             <a:avLst/>
           </a:prstGeom>
-          <a:ln w="25400">
+          <a:ln w="31750">
             <a:solidFill>
               <a:srgbClr val="DEDBD9"/>
             </a:solidFill>
@@ -5594,14 +5417,14 @@
           <p:nvPr/>
         </p:nvCxnSpPr>
         <p:spPr>
-          <a:xfrm flipH="1">
-            <a:off x="2743200" y="4114800"/>
-            <a:ext cx="1463040" cy="1234440"/>
+          <a:xfrm flipH="1" flipV="1">
+            <a:off x="1188720" y="4297680"/>
+            <a:ext cx="1554480" cy="1280160"/>
           </a:xfrm>
           <a:prstGeom prst="line">
             <a:avLst/>
           </a:prstGeom>
-          <a:ln w="25400">
+          <a:ln w="31750">
             <a:solidFill>
               <a:srgbClr val="DEDBD9"/>
             </a:solidFill>
@@ -5629,14 +5452,14 @@
           <p:nvPr/>
         </p:nvCxnSpPr>
         <p:spPr>
-          <a:xfrm flipH="1" flipV="1">
-            <a:off x="1280160" y="4114800"/>
-            <a:ext cx="1463040" cy="1234440"/>
+          <a:xfrm flipV="1">
+            <a:off x="1188720" y="3017520"/>
+            <a:ext cx="1554480" cy="1280160"/>
           </a:xfrm>
           <a:prstGeom prst="line">
             <a:avLst/>
           </a:prstGeom>
-          <a:ln w="25400">
+          <a:ln w="31750">
             <a:solidFill>
               <a:srgbClr val="DEDBD9"/>
             </a:solidFill>
@@ -5664,14 +5487,14 @@
           <p:nvPr/>
         </p:nvCxnSpPr>
         <p:spPr>
-          <a:xfrm flipV="1">
-            <a:off x="1280160" y="2880360"/>
-            <a:ext cx="1463040" cy="1234440"/>
+          <a:xfrm>
+            <a:off x="2743200" y="3017520"/>
+            <a:ext cx="0" cy="2560320"/>
           </a:xfrm>
           <a:prstGeom prst="line">
             <a:avLst/>
           </a:prstGeom>
-          <a:ln w="25400">
+          <a:ln w="31750">
             <a:solidFill>
               <a:srgbClr val="DEDBD9"/>
             </a:solidFill>
@@ -5700,13 +5523,13 @@
         </p:nvCxnSpPr>
         <p:spPr>
           <a:xfrm>
-            <a:off x="2743200" y="2880360"/>
-            <a:ext cx="0" cy="2468880"/>
+            <a:off x="1188720" y="4297680"/>
+            <a:ext cx="3108960" cy="0"/>
           </a:xfrm>
           <a:prstGeom prst="line">
             <a:avLst/>
           </a:prstGeom>
-          <a:ln w="25400">
+          <a:ln w="31750">
             <a:solidFill>
               <a:srgbClr val="DEDBD9"/>
             </a:solidFill>
@@ -5727,51 +5550,16 @@
           </a:fontRef>
         </p:style>
       </p:cxnSp>
-      <p:cxnSp>
-        <p:nvCxnSpPr>
-          <p:cNvPr id="12" name="Connector 11"/>
-          <p:cNvCxnSpPr/>
-          <p:nvPr/>
-        </p:nvCxnSpPr>
-        <p:spPr>
-          <a:xfrm>
-            <a:off x="1280160" y="4114800"/>
-            <a:ext cx="2926080" cy="0"/>
-          </a:xfrm>
-          <a:prstGeom prst="line">
-            <a:avLst/>
-          </a:prstGeom>
-          <a:ln w="25400">
-            <a:solidFill>
-              <a:srgbClr val="DEDBD9"/>
-            </a:solidFill>
-          </a:ln>
-        </p:spPr>
-        <p:style>
-          <a:lnRef idx="2">
-            <a:schemeClr val="accent1"/>
-          </a:lnRef>
-          <a:fillRef idx="0">
-            <a:schemeClr val="accent1"/>
-          </a:fillRef>
-          <a:effectRef idx="1">
-            <a:schemeClr val="accent1"/>
-          </a:effectRef>
-          <a:fontRef idx="minor">
-            <a:schemeClr val="tx1"/>
-          </a:fontRef>
-        </p:style>
-      </p:cxnSp>
-      <p:sp>
-        <p:nvSpPr>
-          <p:cNvPr id="13" name="Rounded Rectangle 12"/>
+      <p:sp>
+        <p:nvSpPr>
+          <p:cNvPr id="12" name="Rounded Rectangle 11"/>
           <p:cNvSpPr/>
           <p:nvPr/>
         </p:nvSpPr>
         <p:spPr>
           <a:xfrm>
-            <a:off x="2176272" y="2606040"/>
-            <a:ext cx="1133856" cy="548640"/>
+            <a:off x="2103120" y="2715768"/>
+            <a:ext cx="1280160" cy="603504"/>
           </a:xfrm>
           <a:prstGeom prst="roundRect">
             <a:avLst/>
@@ -5804,7 +5592,7 @@
           <a:p>
             <a:pPr algn="ctr"/>
             <a:r>
-              <a:rPr sz="1400" b="1">
+              <a:rPr sz="1600" b="1">
                 <a:solidFill>
                   <a:srgbClr val="FFFFFF"/>
                 </a:solidFill>
@@ -5816,14 +5604,14 @@
       </p:sp>
       <p:sp>
         <p:nvSpPr>
-          <p:cNvPr id="14" name="Rounded Rectangle 13"/>
+          <p:cNvPr id="13" name="Rounded Rectangle 12"/>
           <p:cNvSpPr/>
           <p:nvPr/>
         </p:nvSpPr>
         <p:spPr>
           <a:xfrm>
-            <a:off x="3639311" y="3840480"/>
-            <a:ext cx="1133856" cy="548640"/>
+            <a:off x="3657600" y="3995928"/>
+            <a:ext cx="1280160" cy="603504"/>
           </a:xfrm>
           <a:prstGeom prst="roundRect">
             <a:avLst/>
@@ -5831,7 +5619,7 @@
           <a:solidFill>
             <a:srgbClr val="FFF3ED"/>
           </a:solidFill>
-          <a:ln w="12700">
+          <a:ln w="19050">
             <a:solidFill>
               <a:srgbClr val="FF5A0A"/>
             </a:solidFill>
@@ -5858,7 +5646,7 @@
           <a:p>
             <a:pPr algn="ctr"/>
             <a:r>
-              <a:rPr sz="1400" b="1">
+              <a:rPr sz="1600" b="1">
                 <a:solidFill>
                   <a:srgbClr val="C83D08"/>
                 </a:solidFill>
@@ -5870,14 +5658,14 @@
       </p:sp>
       <p:sp>
         <p:nvSpPr>
-          <p:cNvPr id="15" name="Rounded Rectangle 14"/>
+          <p:cNvPr id="14" name="Rounded Rectangle 13"/>
           <p:cNvSpPr/>
           <p:nvPr/>
         </p:nvSpPr>
         <p:spPr>
           <a:xfrm>
-            <a:off x="2176272" y="5074920"/>
-            <a:ext cx="1133856" cy="548640"/>
+            <a:off x="2103120" y="5276088"/>
+            <a:ext cx="1280160" cy="603504"/>
           </a:xfrm>
           <a:prstGeom prst="roundRect">
             <a:avLst/>
@@ -5885,7 +5673,7 @@
           <a:solidFill>
             <a:srgbClr val="FFF3ED"/>
           </a:solidFill>
-          <a:ln w="12700">
+          <a:ln w="19050">
             <a:solidFill>
               <a:srgbClr val="FF5A0A"/>
             </a:solidFill>
@@ -5912,7 +5700,7 @@
           <a:p>
             <a:pPr algn="ctr"/>
             <a:r>
-              <a:rPr sz="1400" b="1">
+              <a:rPr sz="1600" b="1">
                 <a:solidFill>
                   <a:srgbClr val="C83D08"/>
                 </a:solidFill>
@@ -5924,14 +5712,14 @@
       </p:sp>
       <p:sp>
         <p:nvSpPr>
-          <p:cNvPr id="16" name="Rounded Rectangle 15"/>
+          <p:cNvPr id="15" name="Rounded Rectangle 14"/>
           <p:cNvSpPr/>
           <p:nvPr/>
         </p:nvSpPr>
         <p:spPr>
           <a:xfrm>
-            <a:off x="713231" y="3840480"/>
-            <a:ext cx="1133856" cy="548640"/>
+            <a:off x="548640" y="3995928"/>
+            <a:ext cx="1280160" cy="603504"/>
           </a:xfrm>
           <a:prstGeom prst="roundRect">
             <a:avLst/>
@@ -5939,7 +5727,7 @@
           <a:solidFill>
             <a:srgbClr val="FFF3ED"/>
           </a:solidFill>
-          <a:ln w="12700">
+          <a:ln w="19050">
             <a:solidFill>
               <a:srgbClr val="FF5A0A"/>
             </a:solidFill>
@@ -5966,7 +5754,7 @@
           <a:p>
             <a:pPr algn="ctr"/>
             <a:r>
-              <a:rPr sz="1400" b="1">
+              <a:rPr sz="1600" b="1">
                 <a:solidFill>
                   <a:srgbClr val="C83D08"/>
                 </a:solidFill>
@@ -5978,53 +5766,14 @@
       </p:sp>
       <p:sp>
         <p:nvSpPr>
-          <p:cNvPr id="17" name="TextBox 16"/>
-          <p:cNvSpPr txBox="1"/>
-          <p:nvPr/>
-        </p:nvSpPr>
-        <p:spPr>
-          <a:xfrm>
-            <a:off x="914400" y="5760720"/>
-            <a:ext cx="3840480" cy="731520"/>
-          </a:xfrm>
-          <a:prstGeom prst="rect">
-            <a:avLst/>
-          </a:prstGeom>
-          <a:noFill/>
-        </p:spPr>
-        <p:txBody>
-          <a:bodyPr wrap="square" anchor="t" lIns="45720" rIns="45720" tIns="27432" bIns="27432">
-            <a:spAutoFit/>
-          </a:bodyPr>
-          <a:lstStyle/>
-          <a:p>
-            <a:pPr algn="ctr">
-              <a:lnSpc>
-                <a:spcPct val="105000"/>
-              </a:lnSpc>
-            </a:pPr>
-            <a:r>
-              <a:rPr sz="1100" b="0">
-                <a:solidFill>
-                  <a:srgbClr val="4B4B4B"/>
-                </a:solidFill>
-                <a:latin typeface="Helvetica Neue"/>
-              </a:rPr>
-              <a:t>La unidad de análisis es la promesa, no la venta registrada. Seis aristas, 39 reglas, cada una con su fuente.</a:t>
-            </a:r>
-          </a:p>
-        </p:txBody>
-      </p:sp>
-      <p:sp>
-        <p:nvSpPr>
-          <p:cNvPr id="18" name="Rectangle 17"/>
+          <p:cNvPr id="16" name="Rectangle 15"/>
           <p:cNvSpPr/>
           <p:nvPr/>
         </p:nvSpPr>
         <p:spPr>
           <a:xfrm>
-            <a:off x="5486400" y="2514600"/>
-            <a:ext cx="82296" cy="1005840"/>
+            <a:off x="5669280" y="2468880"/>
+            <a:ext cx="91440" cy="960120"/>
           </a:xfrm>
           <a:prstGeom prst="rect">
             <a:avLst/>
@@ -6061,14 +5810,14 @@
       </p:sp>
       <p:sp>
         <p:nvSpPr>
-          <p:cNvPr id="19" name="TextBox 18"/>
+          <p:cNvPr id="17" name="TextBox 16"/>
           <p:cNvSpPr txBox="1"/>
           <p:nvPr/>
         </p:nvSpPr>
         <p:spPr>
           <a:xfrm>
-            <a:off x="5715000" y="2468880"/>
-            <a:ext cx="5852160" cy="411480"/>
+            <a:off x="5897880" y="2423160"/>
+            <a:ext cx="5760720" cy="457200"/>
           </a:xfrm>
           <a:prstGeom prst="rect">
             <a:avLst/>
@@ -6076,7 +5825,7 @@
           <a:noFill/>
         </p:spPr>
         <p:txBody>
-          <a:bodyPr wrap="square" anchor="t" lIns="45720" rIns="45720" tIns="27432" bIns="27432">
+          <a:bodyPr wrap="square" anchor="t">
             <a:spAutoFit/>
           </a:bodyPr>
           <a:lstStyle/>
@@ -6087,27 +5836,27 @@
               </a:lnSpc>
             </a:pPr>
             <a:r>
-              <a:rPr sz="1700" b="1">
+              <a:rPr sz="2200" b="1">
                 <a:solidFill>
                   <a:srgbClr val="C83D08"/>
                 </a:solidFill>
                 <a:latin typeface="Helvetica Neue"/>
               </a:rPr>
-              <a:t>1 · Veredicto con costo esperado</a:t>
-            </a:r>
-          </a:p>
-        </p:txBody>
-      </p:sp>
-      <p:sp>
-        <p:nvSpPr>
-          <p:cNvPr id="20" name="TextBox 19"/>
+              <a:t>Veredicto en soles</a:t>
+            </a:r>
+          </a:p>
+        </p:txBody>
+      </p:sp>
+      <p:sp>
+        <p:nvSpPr>
+          <p:cNvPr id="18" name="TextBox 17"/>
           <p:cNvSpPr txBox="1"/>
           <p:nvPr/>
         </p:nvSpPr>
         <p:spPr>
           <a:xfrm>
-            <a:off x="5715000" y="2862072"/>
-            <a:ext cx="5852160" cy="731520"/>
+            <a:off x="5897880" y="2880360"/>
+            <a:ext cx="5760720" cy="548640"/>
           </a:xfrm>
           <a:prstGeom prst="rect">
             <a:avLst/>
@@ -6115,7 +5864,7 @@
           <a:noFill/>
         </p:spPr>
         <p:txBody>
-          <a:bodyPr wrap="square" anchor="t" lIns="45720" rIns="45720" tIns="27432" bIns="27432">
+          <a:bodyPr wrap="square" anchor="t">
             <a:spAutoFit/>
           </a:bodyPr>
           <a:lstStyle/>
@@ -6126,27 +5875,27 @@
               </a:lnSpc>
             </a:pPr>
             <a:r>
-              <a:rPr sz="1300" b="0">
+              <a:rPr sz="1500" b="0">
                 <a:solidFill>
                   <a:srgbClr val="301D19"/>
                 </a:solidFill>
                 <a:latin typeface="Helvetica Neue"/>
               </a:rPr>
-              <a:t>APROBAR, REVISAR o RETENER. Cadena de evidencia con la regla, los valores y su fuente. Contrafáctico: «si el precio fuera S/99, esta venta pasaría».</a:t>
-            </a:r>
-          </a:p>
-        </p:txBody>
-      </p:sp>
-      <p:sp>
-        <p:nvSpPr>
-          <p:cNvPr id="21" name="Rectangle 20"/>
+              <a:t>Aprobar · Revisar · Retener. Y qué lo arreglaría.</a:t>
+            </a:r>
+          </a:p>
+        </p:txBody>
+      </p:sp>
+      <p:sp>
+        <p:nvSpPr>
+          <p:cNvPr id="19" name="Rectangle 18"/>
           <p:cNvSpPr/>
           <p:nvPr/>
         </p:nvSpPr>
         <p:spPr>
           <a:xfrm>
-            <a:off x="5486400" y="3703320"/>
-            <a:ext cx="82296" cy="1005840"/>
+            <a:off x="5669280" y="3657600"/>
+            <a:ext cx="91440" cy="960120"/>
           </a:xfrm>
           <a:prstGeom prst="rect">
             <a:avLst/>
@@ -6183,14 +5932,14 @@
       </p:sp>
       <p:sp>
         <p:nvSpPr>
-          <p:cNvPr id="22" name="TextBox 21"/>
+          <p:cNvPr id="20" name="TextBox 19"/>
           <p:cNvSpPr txBox="1"/>
           <p:nvPr/>
         </p:nvSpPr>
         <p:spPr>
           <a:xfrm>
-            <a:off x="5715000" y="3657600"/>
-            <a:ext cx="5852160" cy="411480"/>
+            <a:off x="5897880" y="3611880"/>
+            <a:ext cx="5760720" cy="457200"/>
           </a:xfrm>
           <a:prstGeom prst="rect">
             <a:avLst/>
@@ -6198,7 +5947,7 @@
           <a:noFill/>
         </p:spPr>
         <p:txBody>
-          <a:bodyPr wrap="square" anchor="t" lIns="45720" rIns="45720" tIns="27432" bIns="27432">
+          <a:bodyPr wrap="square" anchor="t">
             <a:spAutoFit/>
           </a:bodyPr>
           <a:lstStyle/>
@@ -6209,27 +5958,27 @@
               </a:lnSpc>
             </a:pPr>
             <a:r>
-              <a:rPr sz="1700" b="1">
+              <a:rPr sz="2200" b="1">
                 <a:solidFill>
                   <a:srgbClr val="C83D08"/>
                 </a:solidFill>
                 <a:latin typeface="Helvetica Neue"/>
               </a:rPr>
-              <a:t>2 · El lote del jurado, con cualquier esquema</a:t>
-            </a:r>
-          </a:p>
-        </p:txBody>
-      </p:sp>
-      <p:sp>
-        <p:nvSpPr>
-          <p:cNvPr id="23" name="TextBox 22"/>
+              <a:t>Cualquier lote</a:t>
+            </a:r>
+          </a:p>
+        </p:txBody>
+      </p:sp>
+      <p:sp>
+        <p:nvSpPr>
+          <p:cNvPr id="21" name="TextBox 20"/>
           <p:cNvSpPr txBox="1"/>
           <p:nvPr/>
         </p:nvSpPr>
         <p:spPr>
           <a:xfrm>
-            <a:off x="5715000" y="4050791"/>
-            <a:ext cx="5852160" cy="731520"/>
+            <a:off x="5897880" y="4069080"/>
+            <a:ext cx="5760720" cy="548640"/>
           </a:xfrm>
           <a:prstGeom prst="rect">
             <a:avLst/>
@@ -6237,7 +5986,7 @@
           <a:noFill/>
         </p:spPr>
         <p:txBody>
-          <a:bodyPr wrap="square" anchor="t" lIns="45720" rIns="45720" tIns="27432" bIns="27432">
+          <a:bodyPr wrap="square" anchor="t">
             <a:spAutoFit/>
           </a:bodyPr>
           <a:lstStyle/>
@@ -6248,27 +5997,27 @@
               </a:lnSpc>
             </a:pPr>
             <a:r>
-              <a:rPr sz="1300" b="0">
+              <a:rPr sz="1500" b="0">
                 <a:solidFill>
                   <a:srgbClr val="301D19"/>
                 </a:solidFill>
                 <a:latin typeface="Helvetica Neue"/>
               </a:rPr>
-              <a:t>JSON o CSV con columnas ajenas: la IA las mapea, las filas corruptas se reportan y el lote sigue. Matriz de confusión contra sus etiquetas.</a:t>
-            </a:r>
-          </a:p>
-        </p:txBody>
-      </p:sp>
-      <p:sp>
-        <p:nvSpPr>
-          <p:cNvPr id="24" name="Rectangle 23"/>
+              <a:t>Pegas tus columnas. Lo mapea, lo separa, lo explica.</a:t>
+            </a:r>
+          </a:p>
+        </p:txBody>
+      </p:sp>
+      <p:sp>
+        <p:nvSpPr>
+          <p:cNvPr id="22" name="Rectangle 21"/>
           <p:cNvSpPr/>
           <p:nvPr/>
         </p:nvSpPr>
         <p:spPr>
           <a:xfrm>
-            <a:off x="5486400" y="4892040"/>
-            <a:ext cx="82296" cy="1005840"/>
+            <a:off x="5669280" y="4846320"/>
+            <a:ext cx="91440" cy="960120"/>
           </a:xfrm>
           <a:prstGeom prst="rect">
             <a:avLst/>
@@ -6305,14 +6054,14 @@
       </p:sp>
       <p:sp>
         <p:nvSpPr>
-          <p:cNvPr id="25" name="TextBox 24"/>
+          <p:cNvPr id="23" name="TextBox 22"/>
           <p:cNvSpPr txBox="1"/>
           <p:nvPr/>
         </p:nvSpPr>
         <p:spPr>
           <a:xfrm>
-            <a:off x="5715000" y="4846320"/>
-            <a:ext cx="5852160" cy="411480"/>
+            <a:off x="5897880" y="4800600"/>
+            <a:ext cx="5760720" cy="457200"/>
           </a:xfrm>
           <a:prstGeom prst="rect">
             <a:avLst/>
@@ -6320,7 +6069,7 @@
           <a:noFill/>
         </p:spPr>
         <p:txBody>
-          <a:bodyPr wrap="square" anchor="t" lIns="45720" rIns="45720" tIns="27432" bIns="27432">
+          <a:bodyPr wrap="square" anchor="t">
             <a:spAutoFit/>
           </a:bodyPr>
           <a:lstStyle/>
@@ -6331,27 +6080,27 @@
               </a:lnSpc>
             </a:pPr>
             <a:r>
-              <a:rPr sz="1700" b="1">
+              <a:rPr sz="2200" b="1">
                 <a:solidFill>
                   <a:srgbClr val="C83D08"/>
                 </a:solidFill>
                 <a:latin typeface="Helvetica Neue"/>
               </a:rPr>
-              <a:t>3 · El cliente confirma en 20 segundos</a:t>
-            </a:r>
-          </a:p>
-        </p:txBody>
-      </p:sp>
-      <p:sp>
-        <p:nvSpPr>
-          <p:cNvPr id="26" name="TextBox 25"/>
+              <a:t>El cliente confirma en 20 s</a:t>
+            </a:r>
+          </a:p>
+        </p:txBody>
+      </p:sp>
+      <p:sp>
+        <p:nvSpPr>
+          <p:cNvPr id="24" name="TextBox 23"/>
           <p:cNvSpPr txBox="1"/>
           <p:nvPr/>
         </p:nvSpPr>
         <p:spPr>
           <a:xfrm>
-            <a:off x="5715000" y="5239512"/>
-            <a:ext cx="5852160" cy="731520"/>
+            <a:off x="5897880" y="5257800"/>
+            <a:ext cx="5760720" cy="548640"/>
           </a:xfrm>
           <a:prstGeom prst="rect">
             <a:avLst/>
@@ -6359,7 +6108,7 @@
           <a:noFill/>
         </p:spPr>
         <p:txBody>
-          <a:bodyPr wrap="square" anchor="t" lIns="45720" rIns="45720" tIns="27432" bIns="27432">
+          <a:bodyPr wrap="square" anchor="t">
             <a:spAutoFit/>
           </a:bodyPr>
           <a:lstStyle/>
@@ -6370,13 +6119,13 @@
               </a:lnSpc>
             </a:pPr>
             <a:r>
-              <a:rPr sz="1300" b="0">
+              <a:rPr sz="1500" b="0">
                 <a:solidFill>
                   <a:srgbClr val="301D19"/>
                 </a:solidFill>
                 <a:latin typeface="Helvetica Neue"/>
               </a:rPr>
-              <a:t>Un enlace antes de instalar: «¿Es esto lo que acordaste?». Su respuesta cambia el veredicto. Su silencio es la señal más fuerte.</a:t>
+              <a:t>Un enlace antes de instalar. Su silencio también cuenta.</a:t>
             </a:r>
           </a:p>
         </p:txBody>
@@ -6483,45 +6232,6 @@
         </p:nvSpPr>
         <p:spPr>
           <a:xfrm>
-            <a:off x="1005840" y="274320"/>
-            <a:ext cx="5486400" cy="411480"/>
-          </a:xfrm>
-          <a:prstGeom prst="rect">
-            <a:avLst/>
-          </a:prstGeom>
-          <a:noFill/>
-        </p:spPr>
-        <p:txBody>
-          <a:bodyPr wrap="square" anchor="ctr" lIns="45720" rIns="45720" tIns="27432" bIns="27432">
-            <a:spAutoFit/>
-          </a:bodyPr>
-          <a:lstStyle/>
-          <a:p>
-            <a:pPr algn="l">
-              <a:lnSpc>
-                <a:spcPct val="105000"/>
-              </a:lnSpc>
-            </a:pPr>
-            <a:r>
-              <a:rPr sz="1200" b="0">
-                <a:solidFill>
-                  <a:srgbClr val="4B4B4B"/>
-                </a:solidFill>
-                <a:latin typeface="Helvetica Neue"/>
-              </a:rPr>
-              <a:t>Reto 03 · Que lo prometido sea lo entregado</a:t>
-            </a:r>
-          </a:p>
-        </p:txBody>
-      </p:sp>
-      <p:sp>
-        <p:nvSpPr>
-          <p:cNvPr id="5" name="TextBox 4"/>
-          <p:cNvSpPr txBox="1"/>
-          <p:nvPr/>
-        </p:nvSpPr>
-        <p:spPr>
-          <a:xfrm>
             <a:off x="8503920" y="274320"/>
             <a:ext cx="3291840" cy="411480"/>
           </a:xfrm>
@@ -6531,7 +6241,7 @@
           <a:noFill/>
         </p:spPr>
         <p:txBody>
-          <a:bodyPr wrap="square" anchor="ctr" lIns="45720" rIns="45720" tIns="27432" bIns="27432">
+          <a:bodyPr wrap="square" anchor="ctr">
             <a:spAutoFit/>
           </a:bodyPr>
           <a:lstStyle/>
@@ -6548,21 +6258,21 @@
                 </a:solidFill>
                 <a:latin typeface="Helvetica Neue"/>
               </a:rPr>
-              <a:t>4 / 7 · Diferencia</a:t>
-            </a:r>
-          </a:p>
-        </p:txBody>
-      </p:sp>
-      <p:sp>
-        <p:nvSpPr>
-          <p:cNvPr id="6" name="TextBox 5"/>
+              <a:t>4 / 7 · Impacto</a:t>
+            </a:r>
+          </a:p>
+        </p:txBody>
+      </p:sp>
+      <p:sp>
+        <p:nvSpPr>
+          <p:cNvPr id="5" name="TextBox 4"/>
           <p:cNvSpPr txBox="1"/>
           <p:nvPr/>
         </p:nvSpPr>
         <p:spPr>
           <a:xfrm>
             <a:off x="822960" y="914400"/>
-            <a:ext cx="10515600" cy="731520"/>
+            <a:ext cx="10515600" cy="822960"/>
           </a:xfrm>
           <a:prstGeom prst="rect">
             <a:avLst/>
@@ -6570,7 +6280,7 @@
           <a:noFill/>
         </p:spPr>
         <p:txBody>
-          <a:bodyPr wrap="square" anchor="t" lIns="45720" rIns="45720" tIns="27432" bIns="27432">
+          <a:bodyPr wrap="square" anchor="t">
             <a:spAutoFit/>
           </a:bodyPr>
           <a:lstStyle/>
@@ -6581,585 +6291,107 @@
               </a:lnSpc>
             </a:pPr>
             <a:r>
-              <a:rPr sz="2800" b="1">
+              <a:rPr sz="3400" b="1">
                 <a:solidFill>
                   <a:srgbClr val="301D19"/>
                 </a:solidFill>
                 <a:latin typeface="Helvetica Neue"/>
               </a:rPr>
-              <a:t>Por qué esto y no una auditoría muestral ni un score de riesgo</a:t>
-            </a:r>
-          </a:p>
-        </p:txBody>
-      </p:sp>
-      <p:graphicFrame>
-        <p:nvGraphicFramePr>
-          <p:cNvPr id="7" name="Table 6"/>
-          <p:cNvGraphicFramePr>
-            <a:graphicFrameLocks noGrp="1"/>
-          </p:cNvGraphicFramePr>
-          <p:nvPr/>
-        </p:nvGraphicFramePr>
-        <p:xfrm>
-          <a:off x="822960" y="1828800"/>
-          <a:ext cx="10515600" cy="3657600"/>
-        </p:xfrm>
-        <a:graphic>
-          <a:graphicData uri="http://schemas.openxmlformats.org/drawingml/2006/table">
-            <a:tbl>
-              <a:tblPr firstRow="1" bandRow="1">
-                <a:tableStyleId>{5C22544A-7EE6-4342-B048-85BDC9FD1C3A}</a:tableStyleId>
-              </a:tblPr>
-              <a:tblGrid>
-                <a:gridCol w="2103120"/>
-                <a:gridCol w="2651760"/>
-                <a:gridCol w="2651760"/>
-                <a:gridCol w="3108960"/>
-              </a:tblGrid>
-              <a:tr h="609600">
-                <a:tc>
-                  <a:txBody>
-                    <a:bodyPr/>
-                    <a:lstStyle/>
-                    <a:p>
-                      <a:r>
-                        <a:rPr sz="1400" b="1">
-                          <a:solidFill>
-                            <a:srgbClr val="FFFFFF"/>
-                          </a:solidFill>
-                          <a:latin typeface="Helvetica Neue"/>
-                        </a:rPr>
-                        <a:t/>
-                      </a:r>
-                    </a:p>
-                  </a:txBody>
-                  <a:tcPr marL="91440" marR="91440" marT="54864" marB="54864" anchor="ctr">
-                    <a:solidFill>
-                      <a:srgbClr val="301D19"/>
-                    </a:solidFill>
-                  </a:tcPr>
-                </a:tc>
-                <a:tc>
-                  <a:txBody>
-                    <a:bodyPr/>
-                    <a:lstStyle/>
-                    <a:p>
-                      <a:r>
-                        <a:rPr sz="1400" b="1">
-                          <a:solidFill>
-                            <a:srgbClr val="FFFFFF"/>
-                          </a:solidFill>
-                          <a:latin typeface="Helvetica Neue"/>
-                        </a:rPr>
-                        <a:t>Auditoría muestral</a:t>
-                      </a:r>
-                    </a:p>
-                  </a:txBody>
-                  <a:tcPr marL="91440" marR="91440" marT="54864" marB="54864" anchor="ctr">
-                    <a:solidFill>
-                      <a:srgbClr val="301D19"/>
-                    </a:solidFill>
-                  </a:tcPr>
-                </a:tc>
-                <a:tc>
-                  <a:txBody>
-                    <a:bodyPr/>
-                    <a:lstStyle/>
-                    <a:p>
-                      <a:r>
-                        <a:rPr sz="1400" b="1">
-                          <a:solidFill>
-                            <a:srgbClr val="FFFFFF"/>
-                          </a:solidFill>
-                          <a:latin typeface="Helvetica Neue"/>
-                        </a:rPr>
-                        <a:t>Score de riesgo</a:t>
-                      </a:r>
-                    </a:p>
-                  </a:txBody>
-                  <a:tcPr marL="91440" marR="91440" marT="54864" marB="54864" anchor="ctr">
-                    <a:solidFill>
-                      <a:srgbClr val="301D19"/>
-                    </a:solidFill>
-                  </a:tcPr>
-                </a:tc>
-                <a:tc>
-                  <a:txBody>
-                    <a:bodyPr/>
-                    <a:lstStyle/>
-                    <a:p>
-                      <a:r>
-                        <a:rPr sz="1400" b="1">
-                          <a:solidFill>
-                            <a:srgbClr val="FFFFFF"/>
-                          </a:solidFill>
-                          <a:latin typeface="Helvetica Neue"/>
-                        </a:rPr>
-                        <a:t>Nuestra propuesta</a:t>
-                      </a:r>
-                    </a:p>
-                  </a:txBody>
-                  <a:tcPr marL="91440" marR="91440" marT="54864" marB="54864" anchor="ctr">
-                    <a:solidFill>
-                      <a:srgbClr val="FF5A0A"/>
-                    </a:solidFill>
-                  </a:tcPr>
-                </a:tc>
-              </a:tr>
-              <a:tr h="609600">
-                <a:tc>
-                  <a:txBody>
-                    <a:bodyPr/>
-                    <a:lstStyle/>
-                    <a:p>
-                      <a:r>
-                        <a:rPr sz="1300" b="1">
-                          <a:solidFill>
-                            <a:srgbClr val="301D19"/>
-                          </a:solidFill>
-                          <a:latin typeface="Helvetica Neue"/>
-                        </a:rPr>
-                        <a:t>Cuándo mira</a:t>
-                      </a:r>
-                    </a:p>
-                  </a:txBody>
-                  <a:tcPr marL="91440" marR="91440" marT="54864" marB="54864" anchor="ctr">
-                    <a:solidFill>
-                      <a:srgbClr val="FFFFFF"/>
-                    </a:solidFill>
-                  </a:tcPr>
-                </a:tc>
-                <a:tc>
-                  <a:txBody>
-                    <a:bodyPr/>
-                    <a:lstStyle/>
-                    <a:p>
-                      <a:r>
-                        <a:rPr sz="1300" b="0">
-                          <a:solidFill>
-                            <a:srgbClr val="301D19"/>
-                          </a:solidFill>
-                          <a:latin typeface="Helvetica Neue"/>
-                        </a:rPr>
-                        <a:t>Una muestra, después de instalar</a:t>
-                      </a:r>
-                    </a:p>
-                  </a:txBody>
-                  <a:tcPr marL="91440" marR="91440" marT="54864" marB="54864" anchor="ctr">
-                    <a:solidFill>
-                      <a:srgbClr val="FFFFFF"/>
-                    </a:solidFill>
-                  </a:tcPr>
-                </a:tc>
-                <a:tc>
-                  <a:txBody>
-                    <a:bodyPr/>
-                    <a:lstStyle/>
-                    <a:p>
-                      <a:r>
-                        <a:rPr sz="1300" b="0">
-                          <a:solidFill>
-                            <a:srgbClr val="301D19"/>
-                          </a:solidFill>
-                          <a:latin typeface="Helvetica Neue"/>
-                        </a:rPr>
-                        <a:t>Cada venta, al registrarla</a:t>
-                      </a:r>
-                    </a:p>
-                  </a:txBody>
-                  <a:tcPr marL="91440" marR="91440" marT="54864" marB="54864" anchor="ctr">
-                    <a:solidFill>
-                      <a:srgbClr val="FFFFFF"/>
-                    </a:solidFill>
-                  </a:tcPr>
-                </a:tc>
-                <a:tc>
-                  <a:txBody>
-                    <a:bodyPr/>
-                    <a:lstStyle/>
-                    <a:p>
-                      <a:r>
-                        <a:rPr sz="1300" b="1">
-                          <a:solidFill>
-                            <a:srgbClr val="C83D08"/>
-                          </a:solidFill>
-                          <a:latin typeface="Helvetica Neue"/>
-                        </a:rPr>
-                        <a:t>Cada venta, antes de instalar</a:t>
-                      </a:r>
-                    </a:p>
-                  </a:txBody>
-                  <a:tcPr marL="91440" marR="91440" marT="54864" marB="54864" anchor="ctr">
-                    <a:solidFill>
-                      <a:srgbClr val="FFF3ED"/>
-                    </a:solidFill>
-                  </a:tcPr>
-                </a:tc>
-              </a:tr>
-              <a:tr h="609600">
-                <a:tc>
-                  <a:txBody>
-                    <a:bodyPr/>
-                    <a:lstStyle/>
-                    <a:p>
-                      <a:r>
-                        <a:rPr sz="1300" b="1">
-                          <a:solidFill>
-                            <a:srgbClr val="301D19"/>
-                          </a:solidFill>
-                          <a:latin typeface="Helvetica Neue"/>
-                        </a:rPr>
-                        <a:t>Cómo decide</a:t>
-                      </a:r>
-                    </a:p>
-                  </a:txBody>
-                  <a:tcPr marL="91440" marR="91440" marT="54864" marB="54864" anchor="ctr">
-                    <a:solidFill>
-                      <a:srgbClr val="FFFFFF"/>
-                    </a:solidFill>
-                  </a:tcPr>
-                </a:tc>
-                <a:tc>
-                  <a:txBody>
-                    <a:bodyPr/>
-                    <a:lstStyle/>
-                    <a:p>
-                      <a:r>
-                        <a:rPr sz="1300" b="0">
-                          <a:solidFill>
-                            <a:srgbClr val="301D19"/>
-                          </a:solidFill>
-                          <a:latin typeface="Helvetica Neue"/>
-                        </a:rPr>
-                        <a:t>Criterio del analista</a:t>
-                      </a:r>
-                    </a:p>
-                  </a:txBody>
-                  <a:tcPr marL="91440" marR="91440" marT="54864" marB="54864" anchor="ctr">
-                    <a:solidFill>
-                      <a:srgbClr val="FFFFFF"/>
-                    </a:solidFill>
-                  </a:tcPr>
-                </a:tc>
-                <a:tc>
-                  <a:txBody>
-                    <a:bodyPr/>
-                    <a:lstStyle/>
-                    <a:p>
-                      <a:r>
-                        <a:rPr sz="1300" b="0">
-                          <a:solidFill>
-                            <a:srgbClr val="301D19"/>
-                          </a:solidFill>
-                          <a:latin typeface="Helvetica Neue"/>
-                        </a:rPr>
-                        <a:t>Umbral de score opaco</a:t>
-                      </a:r>
-                    </a:p>
-                  </a:txBody>
-                  <a:tcPr marL="91440" marR="91440" marT="54864" marB="54864" anchor="ctr">
-                    <a:solidFill>
-                      <a:srgbClr val="FFFFFF"/>
-                    </a:solidFill>
-                  </a:tcPr>
-                </a:tc>
-                <a:tc>
-                  <a:txBody>
-                    <a:bodyPr/>
-                    <a:lstStyle/>
-                    <a:p>
-                      <a:r>
-                        <a:rPr sz="1300" b="1">
-                          <a:solidFill>
-                            <a:srgbClr val="C83D08"/>
-                          </a:solidFill>
-                          <a:latin typeface="Helvetica Neue"/>
-                        </a:rPr>
-                        <a:t>Costo esperado del defecto vs. costo de revisar, en soles</a:t>
-                      </a:r>
-                    </a:p>
-                  </a:txBody>
-                  <a:tcPr marL="91440" marR="91440" marT="54864" marB="54864" anchor="ctr">
-                    <a:solidFill>
-                      <a:srgbClr val="FFF3ED"/>
-                    </a:solidFill>
-                  </a:tcPr>
-                </a:tc>
-              </a:tr>
-              <a:tr h="609600">
-                <a:tc>
-                  <a:txBody>
-                    <a:bodyPr/>
-                    <a:lstStyle/>
-                    <a:p>
-                      <a:r>
-                        <a:rPr sz="1300" b="1">
-                          <a:solidFill>
-                            <a:srgbClr val="301D19"/>
-                          </a:solidFill>
-                          <a:latin typeface="Helvetica Neue"/>
-                        </a:rPr>
-                        <a:t>Qué explica</a:t>
-                      </a:r>
-                    </a:p>
-                  </a:txBody>
-                  <a:tcPr marL="91440" marR="91440" marT="54864" marB="54864" anchor="ctr">
-                    <a:solidFill>
-                      <a:srgbClr val="FFFFFF"/>
-                    </a:solidFill>
-                  </a:tcPr>
-                </a:tc>
-                <a:tc>
-                  <a:txBody>
-                    <a:bodyPr/>
-                    <a:lstStyle/>
-                    <a:p>
-                      <a:r>
-                        <a:rPr sz="1300" b="0">
-                          <a:solidFill>
-                            <a:srgbClr val="301D19"/>
-                          </a:solidFill>
-                          <a:latin typeface="Helvetica Neue"/>
-                        </a:rPr>
-                        <a:t>Un informe mensual</a:t>
-                      </a:r>
-                    </a:p>
-                  </a:txBody>
-                  <a:tcPr marL="91440" marR="91440" marT="54864" marB="54864" anchor="ctr">
-                    <a:solidFill>
-                      <a:srgbClr val="FFFFFF"/>
-                    </a:solidFill>
-                  </a:tcPr>
-                </a:tc>
-                <a:tc>
-                  <a:txBody>
-                    <a:bodyPr/>
-                    <a:lstStyle/>
-                    <a:p>
-                      <a:r>
-                        <a:rPr sz="1300" b="0">
-                          <a:solidFill>
-                            <a:srgbClr val="301D19"/>
-                          </a:solidFill>
-                          <a:latin typeface="Helvetica Neue"/>
-                        </a:rPr>
-                        <a:t>Un número</a:t>
-                      </a:r>
-                    </a:p>
-                  </a:txBody>
-                  <a:tcPr marL="91440" marR="91440" marT="54864" marB="54864" anchor="ctr">
-                    <a:solidFill>
-                      <a:srgbClr val="FFFFFF"/>
-                    </a:solidFill>
-                  </a:tcPr>
-                </a:tc>
-                <a:tc>
-                  <a:txBody>
-                    <a:bodyPr/>
-                    <a:lstStyle/>
-                    <a:p>
-                      <a:r>
-                        <a:rPr sz="1300" b="1">
-                          <a:solidFill>
-                            <a:srgbClr val="C83D08"/>
-                          </a:solidFill>
-                          <a:latin typeface="Helvetica Neue"/>
-                        </a:rPr>
-                        <a:t>Qué campo no coincide con qué, y qué cambiaría el veredicto</a:t>
-                      </a:r>
-                    </a:p>
-                  </a:txBody>
-                  <a:tcPr marL="91440" marR="91440" marT="54864" marB="54864" anchor="ctr">
-                    <a:solidFill>
-                      <a:srgbClr val="FFF3ED"/>
-                    </a:solidFill>
-                  </a:tcPr>
-                </a:tc>
-              </a:tr>
-              <a:tr h="609600">
-                <a:tc>
-                  <a:txBody>
-                    <a:bodyPr/>
-                    <a:lstStyle/>
-                    <a:p>
-                      <a:r>
-                        <a:rPr sz="1300" b="1">
-                          <a:solidFill>
-                            <a:srgbClr val="301D19"/>
-                          </a:solidFill>
-                          <a:latin typeface="Helvetica Neue"/>
-                        </a:rPr>
-                        <a:t>Quién verifica al cliente</a:t>
-                      </a:r>
-                    </a:p>
-                  </a:txBody>
-                  <a:tcPr marL="91440" marR="91440" marT="54864" marB="54864" anchor="ctr">
-                    <a:solidFill>
-                      <a:srgbClr val="FFFFFF"/>
-                    </a:solidFill>
-                  </a:tcPr>
-                </a:tc>
-                <a:tc>
-                  <a:txBody>
-                    <a:bodyPr/>
-                    <a:lstStyle/>
-                    <a:p>
-                      <a:r>
-                        <a:rPr sz="1300" b="0">
-                          <a:solidFill>
-                            <a:srgbClr val="301D19"/>
-                          </a:solidFill>
-                          <a:latin typeface="Helvetica Neue"/>
-                        </a:rPr>
-                        <a:t>Nadie</a:t>
-                      </a:r>
-                    </a:p>
-                  </a:txBody>
-                  <a:tcPr marL="91440" marR="91440" marT="54864" marB="54864" anchor="ctr">
-                    <a:solidFill>
-                      <a:srgbClr val="FFFFFF"/>
-                    </a:solidFill>
-                  </a:tcPr>
-                </a:tc>
-                <a:tc>
-                  <a:txBody>
-                    <a:bodyPr/>
-                    <a:lstStyle/>
-                    <a:p>
-                      <a:r>
-                        <a:rPr sz="1300" b="0">
-                          <a:solidFill>
-                            <a:srgbClr val="301D19"/>
-                          </a:solidFill>
-                          <a:latin typeface="Helvetica Neue"/>
-                        </a:rPr>
-                        <a:t>Nadie</a:t>
-                      </a:r>
-                    </a:p>
-                  </a:txBody>
-                  <a:tcPr marL="91440" marR="91440" marT="54864" marB="54864" anchor="ctr">
-                    <a:solidFill>
-                      <a:srgbClr val="FFFFFF"/>
-                    </a:solidFill>
-                  </a:tcPr>
-                </a:tc>
-                <a:tc>
-                  <a:txBody>
-                    <a:bodyPr/>
-                    <a:lstStyle/>
-                    <a:p>
-                      <a:r>
-                        <a:rPr sz="1300" b="1">
-                          <a:solidFill>
-                            <a:srgbClr val="C83D08"/>
-                          </a:solidFill>
-                          <a:latin typeface="Helvetica Neue"/>
-                        </a:rPr>
-                        <a:t>El propio cliente, por enlace; el silencio cuenta</a:t>
-                      </a:r>
-                    </a:p>
-                  </a:txBody>
-                  <a:tcPr marL="91440" marR="91440" marT="54864" marB="54864" anchor="ctr">
-                    <a:solidFill>
-                      <a:srgbClr val="FFF3ED"/>
-                    </a:solidFill>
-                  </a:tcPr>
-                </a:tc>
-              </a:tr>
-              <a:tr h="609600">
-                <a:tc>
-                  <a:txBody>
-                    <a:bodyPr/>
-                    <a:lstStyle/>
-                    <a:p>
-                      <a:r>
-                        <a:rPr sz="1300" b="1">
-                          <a:solidFill>
-                            <a:srgbClr val="301D19"/>
-                          </a:solidFill>
-                          <a:latin typeface="Helvetica Neue"/>
-                        </a:rPr>
-                        <a:t>Qué necesita para arrancar</a:t>
-                      </a:r>
-                    </a:p>
-                  </a:txBody>
-                  <a:tcPr marL="91440" marR="91440" marT="54864" marB="54864" anchor="ctr">
-                    <a:solidFill>
-                      <a:srgbClr val="FFFFFF"/>
-                    </a:solidFill>
-                  </a:tcPr>
-                </a:tc>
-                <a:tc>
-                  <a:txBody>
-                    <a:bodyPr/>
-                    <a:lstStyle/>
-                    <a:p>
-                      <a:r>
-                        <a:rPr sz="1300" b="0">
-                          <a:solidFill>
-                            <a:srgbClr val="301D19"/>
-                          </a:solidFill>
-                          <a:latin typeface="Helvetica Neue"/>
-                        </a:rPr>
-                        <a:t>Analistas</a:t>
-                      </a:r>
-                    </a:p>
-                  </a:txBody>
-                  <a:tcPr marL="91440" marR="91440" marT="54864" marB="54864" anchor="ctr">
-                    <a:solidFill>
-                      <a:srgbClr val="FFFFFF"/>
-                    </a:solidFill>
-                  </a:tcPr>
-                </a:tc>
-                <a:tc>
-                  <a:txBody>
-                    <a:bodyPr/>
-                    <a:lstStyle/>
-                    <a:p>
-                      <a:r>
-                        <a:rPr sz="1300" b="0">
-                          <a:solidFill>
-                            <a:srgbClr val="301D19"/>
-                          </a:solidFill>
-                          <a:latin typeface="Helvetica Neue"/>
-                        </a:rPr>
-                        <a:t>Histórico etiquetado</a:t>
-                      </a:r>
-                    </a:p>
-                  </a:txBody>
-                  <a:tcPr marL="91440" marR="91440" marT="54864" marB="54864" anchor="ctr">
-                    <a:solidFill>
-                      <a:srgbClr val="FFFFFF"/>
-                    </a:solidFill>
-                  </a:tcPr>
-                </a:tc>
-                <a:tc>
-                  <a:txBody>
-                    <a:bodyPr/>
-                    <a:lstStyle/>
-                    <a:p>
-                      <a:r>
-                        <a:rPr sz="1300" b="1">
-                          <a:solidFill>
-                            <a:srgbClr val="C83D08"/>
-                          </a:solidFill>
-                          <a:latin typeface="Helvetica Neue"/>
-                        </a:rPr>
-                        <a:t>Solo el tarifario público: día uno</a:t>
-                      </a:r>
-                    </a:p>
-                  </a:txBody>
-                  <a:tcPr marL="91440" marR="91440" marT="54864" marB="54864" anchor="ctr">
-                    <a:solidFill>
-                      <a:srgbClr val="FFF3ED"/>
-                    </a:solidFill>
-                  </a:tcPr>
-                </a:tc>
-              </a:tr>
-            </a:tbl>
-          </a:graphicData>
-        </a:graphic>
-      </p:graphicFrame>
+              <a:t>Qué cambia para WIN</a:t>
+            </a:r>
+          </a:p>
+        </p:txBody>
+      </p:sp>
+      <p:sp>
+        <p:nvSpPr>
+          <p:cNvPr id="6" name="Rectangle 5"/>
+          <p:cNvSpPr/>
+          <p:nvPr/>
+        </p:nvSpPr>
+        <p:spPr>
+          <a:xfrm>
+            <a:off x="822960" y="1828800"/>
+            <a:ext cx="5120640" cy="3931920"/>
+          </a:xfrm>
+          <a:prstGeom prst="rect">
+            <a:avLst/>
+          </a:prstGeom>
+          <a:solidFill>
+            <a:srgbClr val="FFFFFF"/>
+          </a:solidFill>
+          <a:ln w="19050">
+            <a:solidFill>
+              <a:srgbClr val="DEDBD9"/>
+            </a:solidFill>
+          </a:ln>
+          <a:effectLst/>
+        </p:spPr>
+        <p:style>
+          <a:lnRef idx="1">
+            <a:schemeClr val="accent1"/>
+          </a:lnRef>
+          <a:fillRef idx="3">
+            <a:schemeClr val="accent1"/>
+          </a:fillRef>
+          <a:effectRef idx="2">
+            <a:schemeClr val="accent1"/>
+          </a:effectRef>
+          <a:fontRef idx="minor">
+            <a:schemeClr val="lt1"/>
+          </a:fontRef>
+        </p:style>
+        <p:txBody>
+          <a:bodyPr rtlCol="0" anchor="ctr"/>
+          <a:lstStyle/>
+          <a:p>
+            <a:pPr algn="ctr"/>
+          </a:p>
+        </p:txBody>
+      </p:sp>
+      <p:sp>
+        <p:nvSpPr>
+          <p:cNvPr id="7" name="Rectangle 6"/>
+          <p:cNvSpPr/>
+          <p:nvPr/>
+        </p:nvSpPr>
+        <p:spPr>
+          <a:xfrm>
+            <a:off x="822960" y="1828800"/>
+            <a:ext cx="5120640" cy="91440"/>
+          </a:xfrm>
+          <a:prstGeom prst="rect">
+            <a:avLst/>
+          </a:prstGeom>
+          <a:solidFill>
+            <a:srgbClr val="4B4B4B"/>
+          </a:solidFill>
+          <a:ln>
+            <a:noFill/>
+          </a:ln>
+          <a:effectLst/>
+        </p:spPr>
+        <p:style>
+          <a:lnRef idx="1">
+            <a:schemeClr val="accent1"/>
+          </a:lnRef>
+          <a:fillRef idx="3">
+            <a:schemeClr val="accent1"/>
+          </a:fillRef>
+          <a:effectRef idx="2">
+            <a:schemeClr val="accent1"/>
+          </a:effectRef>
+          <a:fontRef idx="minor">
+            <a:schemeClr val="lt1"/>
+          </a:fontRef>
+        </p:style>
+        <p:txBody>
+          <a:bodyPr rtlCol="0" anchor="ctr"/>
+          <a:lstStyle/>
+          <a:p>
+            <a:pPr algn="ctr"/>
+          </a:p>
+        </p:txBody>
+      </p:sp>
       <p:sp>
         <p:nvSpPr>
           <p:cNvPr id="8" name="TextBox 7"/>
@@ -7168,8 +6400,8 @@
         </p:nvSpPr>
         <p:spPr>
           <a:xfrm>
-            <a:off x="822960" y="5806440"/>
-            <a:ext cx="10515600" cy="640080"/>
+            <a:off x="1005840" y="2057400"/>
+            <a:ext cx="4754880" cy="457200"/>
           </a:xfrm>
           <a:prstGeom prst="rect">
             <a:avLst/>
@@ -7177,7 +6409,7 @@
           <a:noFill/>
         </p:spPr>
         <p:txBody>
-          <a:bodyPr wrap="square" anchor="t" lIns="45720" rIns="45720" tIns="27432" bIns="27432">
+          <a:bodyPr wrap="square" anchor="t">
             <a:spAutoFit/>
           </a:bodyPr>
           <a:lstStyle/>
@@ -7188,13 +6420,387 @@
               </a:lnSpc>
             </a:pPr>
             <a:r>
-              <a:rPr sz="1500" b="1">
+              <a:rPr sz="1400" b="1">
                 <a:solidFill>
                   <a:srgbClr val="4B4B4B"/>
                 </a:solidFill>
                 <a:latin typeface="Helvetica Neue"/>
               </a:rPr>
-              <a:t>La IA extrae, mapea y redacta. Nunca decide. Por eso la explicación no depende del modelo y la demo no depende de la red.</a:t>
+              <a:t>HOY: la venta mala se descubre después</a:t>
+            </a:r>
+          </a:p>
+        </p:txBody>
+      </p:sp>
+      <p:sp>
+        <p:nvSpPr>
+          <p:cNvPr id="9" name="TextBox 8"/>
+          <p:cNvSpPr txBox="1"/>
+          <p:nvPr/>
+        </p:nvSpPr>
+        <p:spPr>
+          <a:xfrm>
+            <a:off x="1005840" y="2560320"/>
+            <a:ext cx="4754880" cy="3017520"/>
+          </a:xfrm>
+          <a:prstGeom prst="rect">
+            <a:avLst/>
+          </a:prstGeom>
+          <a:noFill/>
+        </p:spPr>
+        <p:txBody>
+          <a:bodyPr wrap="square" anchor="t">
+            <a:spAutoFit/>
+          </a:bodyPr>
+          <a:lstStyle/>
+          <a:p>
+            <a:pPr algn="l">
+              <a:lnSpc>
+                <a:spcPct val="135000"/>
+              </a:lnSpc>
+            </a:pPr>
+            <a:r>
+              <a:rPr sz="2200" b="1">
+                <a:solidFill>
+                  <a:srgbClr val="301D19"/>
+                </a:solidFill>
+                <a:latin typeface="Helvetica Neue"/>
+              </a:rPr>
+              <a:t>Instalación fallida   S/80</a:t>
+            </a:r>
+          </a:p>
+          <a:p>
+            <a:pPr algn="l">
+              <a:lnSpc>
+                <a:spcPct val="135000"/>
+              </a:lnSpc>
+            </a:pPr>
+            <a:r>
+              <a:rPr sz="2200" b="1">
+                <a:solidFill>
+                  <a:srgbClr val="301D19"/>
+                </a:solidFill>
+                <a:latin typeface="Helvetica Neue"/>
+              </a:rPr>
+              <a:t>Reclamo   S/45</a:t>
+            </a:r>
+          </a:p>
+          <a:p>
+            <a:pPr algn="l">
+              <a:lnSpc>
+                <a:spcPct val="135000"/>
+              </a:lnSpc>
+            </a:pPr>
+            <a:r>
+              <a:rPr sz="2200" b="1">
+                <a:solidFill>
+                  <a:srgbClr val="301D19"/>
+                </a:solidFill>
+                <a:latin typeface="Helvetica Neue"/>
+              </a:rPr>
+              <a:t>Reversión de factura   S/58</a:t>
+            </a:r>
+          </a:p>
+          <a:p>
+            <a:pPr algn="l">
+              <a:lnSpc>
+                <a:spcPct val="135000"/>
+              </a:lnSpc>
+            </a:pPr>
+            <a:r>
+              <a:rPr sz="2200" b="1">
+                <a:solidFill>
+                  <a:srgbClr val="301D19"/>
+                </a:solidFill>
+                <a:latin typeface="Helvetica Neue"/>
+              </a:rPr>
+              <a:t>Baja temprana   S/95</a:t>
+            </a:r>
+          </a:p>
+          <a:p>
+            <a:pPr algn="l">
+              <a:lnSpc>
+                <a:spcPct val="135000"/>
+              </a:lnSpc>
+            </a:pPr>
+            <a:r>
+              <a:rPr sz="1600" b="0">
+                <a:solidFill>
+                  <a:srgbClr val="4B4B4B"/>
+                </a:solidFill>
+                <a:latin typeface="Helvetica Neue"/>
+              </a:rPr>
+              <a:t>Nadie preguntó al cliente.</a:t>
+            </a:r>
+          </a:p>
+        </p:txBody>
+      </p:sp>
+      <p:sp>
+        <p:nvSpPr>
+          <p:cNvPr id="10" name="Rectangle 9"/>
+          <p:cNvSpPr/>
+          <p:nvPr/>
+        </p:nvSpPr>
+        <p:spPr>
+          <a:xfrm>
+            <a:off x="6217920" y="1828800"/>
+            <a:ext cx="5120640" cy="3931920"/>
+          </a:xfrm>
+          <a:prstGeom prst="rect">
+            <a:avLst/>
+          </a:prstGeom>
+          <a:solidFill>
+            <a:srgbClr val="FFF3ED"/>
+          </a:solidFill>
+          <a:ln w="19050">
+            <a:solidFill>
+              <a:srgbClr val="FF5A0A"/>
+            </a:solidFill>
+          </a:ln>
+          <a:effectLst/>
+        </p:spPr>
+        <p:style>
+          <a:lnRef idx="1">
+            <a:schemeClr val="accent1"/>
+          </a:lnRef>
+          <a:fillRef idx="3">
+            <a:schemeClr val="accent1"/>
+          </a:fillRef>
+          <a:effectRef idx="2">
+            <a:schemeClr val="accent1"/>
+          </a:effectRef>
+          <a:fontRef idx="minor">
+            <a:schemeClr val="lt1"/>
+          </a:fontRef>
+        </p:style>
+        <p:txBody>
+          <a:bodyPr rtlCol="0" anchor="ctr"/>
+          <a:lstStyle/>
+          <a:p>
+            <a:pPr algn="ctr"/>
+          </a:p>
+        </p:txBody>
+      </p:sp>
+      <p:sp>
+        <p:nvSpPr>
+          <p:cNvPr id="11" name="Rectangle 10"/>
+          <p:cNvSpPr/>
+          <p:nvPr/>
+        </p:nvSpPr>
+        <p:spPr>
+          <a:xfrm>
+            <a:off x="6217920" y="1828800"/>
+            <a:ext cx="5120640" cy="91440"/>
+          </a:xfrm>
+          <a:prstGeom prst="rect">
+            <a:avLst/>
+          </a:prstGeom>
+          <a:solidFill>
+            <a:srgbClr val="FF5A0A"/>
+          </a:solidFill>
+          <a:ln>
+            <a:noFill/>
+          </a:ln>
+          <a:effectLst/>
+        </p:spPr>
+        <p:style>
+          <a:lnRef idx="1">
+            <a:schemeClr val="accent1"/>
+          </a:lnRef>
+          <a:fillRef idx="3">
+            <a:schemeClr val="accent1"/>
+          </a:fillRef>
+          <a:effectRef idx="2">
+            <a:schemeClr val="accent1"/>
+          </a:effectRef>
+          <a:fontRef idx="minor">
+            <a:schemeClr val="lt1"/>
+          </a:fontRef>
+        </p:style>
+        <p:txBody>
+          <a:bodyPr rtlCol="0" anchor="ctr"/>
+          <a:lstStyle/>
+          <a:p>
+            <a:pPr algn="ctr"/>
+          </a:p>
+        </p:txBody>
+      </p:sp>
+      <p:sp>
+        <p:nvSpPr>
+          <p:cNvPr id="12" name="TextBox 11"/>
+          <p:cNvSpPr txBox="1"/>
+          <p:nvPr/>
+        </p:nvSpPr>
+        <p:spPr>
+          <a:xfrm>
+            <a:off x="6400800" y="2057400"/>
+            <a:ext cx="4754880" cy="457200"/>
+          </a:xfrm>
+          <a:prstGeom prst="rect">
+            <a:avLst/>
+          </a:prstGeom>
+          <a:noFill/>
+        </p:spPr>
+        <p:txBody>
+          <a:bodyPr wrap="square" anchor="t">
+            <a:spAutoFit/>
+          </a:bodyPr>
+          <a:lstStyle/>
+          <a:p>
+            <a:pPr algn="l">
+              <a:lnSpc>
+                <a:spcPct val="105000"/>
+              </a:lnSpc>
+            </a:pPr>
+            <a:r>
+              <a:rPr sz="1400" b="1">
+                <a:solidFill>
+                  <a:srgbClr val="C83D08"/>
+                </a:solidFill>
+                <a:latin typeface="Helvetica Neue"/>
+              </a:rPr>
+              <a:t>CON EL SISTEMA: antes de instalar</a:t>
+            </a:r>
+          </a:p>
+        </p:txBody>
+      </p:sp>
+      <p:sp>
+        <p:nvSpPr>
+          <p:cNvPr id="13" name="TextBox 12"/>
+          <p:cNvSpPr txBox="1"/>
+          <p:nvPr/>
+        </p:nvSpPr>
+        <p:spPr>
+          <a:xfrm>
+            <a:off x="6400800" y="2560320"/>
+            <a:ext cx="4754880" cy="3017520"/>
+          </a:xfrm>
+          <a:prstGeom prst="rect">
+            <a:avLst/>
+          </a:prstGeom>
+          <a:noFill/>
+        </p:spPr>
+        <p:txBody>
+          <a:bodyPr wrap="square" anchor="t">
+            <a:spAutoFit/>
+          </a:bodyPr>
+          <a:lstStyle/>
+          <a:p>
+            <a:pPr algn="l">
+              <a:lnSpc>
+                <a:spcPct val="135000"/>
+              </a:lnSpc>
+            </a:pPr>
+            <a:r>
+              <a:rPr sz="2200" b="1">
+                <a:solidFill>
+                  <a:srgbClr val="C83D08"/>
+                </a:solidFill>
+                <a:latin typeface="Helvetica Neue"/>
+              </a:rPr>
+              <a:t>12 min de revisión   S/30</a:t>
+            </a:r>
+          </a:p>
+          <a:p>
+            <a:pPr algn="l">
+              <a:lnSpc>
+                <a:spcPct val="135000"/>
+              </a:lnSpc>
+            </a:pPr>
+            <a:r>
+              <a:rPr sz="1600" b="0">
+                <a:solidFill>
+                  <a:srgbClr val="301D19"/>
+                </a:solidFill>
+                <a:latin typeface="Helvetica Neue"/>
+              </a:rPr>
+              <a:t>Solo si el defecto esperado cuesta más que revisar.</a:t>
+            </a:r>
+          </a:p>
+          <a:p>
+            <a:pPr algn="l">
+              <a:lnSpc>
+                <a:spcPct val="135000"/>
+              </a:lnSpc>
+            </a:pPr>
+            <a:r>
+              <a:rPr sz="1600" b="0">
+                <a:solidFill>
+                  <a:srgbClr val="301D19"/>
+                </a:solidFill>
+                <a:latin typeface="Helvetica Neue"/>
+              </a:rPr>
+              <a:t>Las ventas buenas pasan sin tocarse.</a:t>
+            </a:r>
+          </a:p>
+          <a:p>
+            <a:pPr algn="l">
+              <a:lnSpc>
+                <a:spcPct val="135000"/>
+              </a:lnSpc>
+            </a:pPr>
+            <a:r>
+              <a:rPr sz="2200" b="1">
+                <a:solidFill>
+                  <a:srgbClr val="C83D08"/>
+                </a:solidFill>
+                <a:latin typeface="Helvetica Neue"/>
+              </a:rPr>
+              <a:t>El cliente confirma en 20 s.</a:t>
+            </a:r>
+          </a:p>
+          <a:p>
+            <a:pPr algn="l">
+              <a:lnSpc>
+                <a:spcPct val="135000"/>
+              </a:lnSpc>
+            </a:pPr>
+            <a:r>
+              <a:rPr sz="1600" b="0">
+                <a:solidFill>
+                  <a:srgbClr val="301D19"/>
+                </a:solidFill>
+                <a:latin typeface="Helvetica Neue"/>
+              </a:rPr>
+              <a:t>Cada decisión explicada, campo por campo.</a:t>
+            </a:r>
+          </a:p>
+        </p:txBody>
+      </p:sp>
+      <p:sp>
+        <p:nvSpPr>
+          <p:cNvPr id="14" name="TextBox 13"/>
+          <p:cNvSpPr txBox="1"/>
+          <p:nvPr/>
+        </p:nvSpPr>
+        <p:spPr>
+          <a:xfrm>
+            <a:off x="822960" y="5897880"/>
+            <a:ext cx="10515600" cy="548640"/>
+          </a:xfrm>
+          <a:prstGeom prst="rect">
+            <a:avLst/>
+          </a:prstGeom>
+          <a:noFill/>
+        </p:spPr>
+        <p:txBody>
+          <a:bodyPr wrap="square" anchor="t">
+            <a:spAutoFit/>
+          </a:bodyPr>
+          <a:lstStyle/>
+          <a:p>
+            <a:pPr algn="l">
+              <a:lnSpc>
+                <a:spcPct val="105000"/>
+              </a:lnSpc>
+            </a:pPr>
+            <a:r>
+              <a:rPr sz="1600" b="1">
+                <a:solidFill>
+                  <a:srgbClr val="4B4B4B"/>
+                </a:solidFill>
+                <a:latin typeface="Helvetica Neue"/>
+              </a:rPr>
+              <a:t>Protege la venta buena, al cliente y al vendedor honesto. No vigila al vendedor.</a:t>
             </a:r>
           </a:p>
         </p:txBody>
@@ -7301,45 +6907,6 @@
         </p:nvSpPr>
         <p:spPr>
           <a:xfrm>
-            <a:off x="1005840" y="274320"/>
-            <a:ext cx="5486400" cy="411480"/>
-          </a:xfrm>
-          <a:prstGeom prst="rect">
-            <a:avLst/>
-          </a:prstGeom>
-          <a:noFill/>
-        </p:spPr>
-        <p:txBody>
-          <a:bodyPr wrap="square" anchor="ctr" lIns="45720" rIns="45720" tIns="27432" bIns="27432">
-            <a:spAutoFit/>
-          </a:bodyPr>
-          <a:lstStyle/>
-          <a:p>
-            <a:pPr algn="l">
-              <a:lnSpc>
-                <a:spcPct val="105000"/>
-              </a:lnSpc>
-            </a:pPr>
-            <a:r>
-              <a:rPr sz="1200" b="0">
-                <a:solidFill>
-                  <a:srgbClr val="4B4B4B"/>
-                </a:solidFill>
-                <a:latin typeface="Helvetica Neue"/>
-              </a:rPr>
-              <a:t>Reto 03 · Que lo prometido sea lo entregado</a:t>
-            </a:r>
-          </a:p>
-        </p:txBody>
-      </p:sp>
-      <p:sp>
-        <p:nvSpPr>
-          <p:cNvPr id="5" name="TextBox 4"/>
-          <p:cNvSpPr txBox="1"/>
-          <p:nvPr/>
-        </p:nvSpPr>
-        <p:spPr>
-          <a:xfrm>
             <a:off x="8503920" y="274320"/>
             <a:ext cx="3291840" cy="411480"/>
           </a:xfrm>
@@ -7349,7 +6916,7 @@
           <a:noFill/>
         </p:spPr>
         <p:txBody>
-          <a:bodyPr wrap="square" anchor="ctr" lIns="45720" rIns="45720" tIns="27432" bIns="27432">
+          <a:bodyPr wrap="square" anchor="ctr">
             <a:spAutoFit/>
           </a:bodyPr>
           <a:lstStyle/>
@@ -7366,21 +6933,21 @@
                 </a:solidFill>
                 <a:latin typeface="Helvetica Neue"/>
               </a:rPr>
-              <a:t>5 / 7 · Tracción</a:t>
-            </a:r>
-          </a:p>
-        </p:txBody>
-      </p:sp>
-      <p:sp>
-        <p:nvSpPr>
-          <p:cNvPr id="6" name="TextBox 5"/>
+              <a:t>5 / 7 · Diferencia</a:t>
+            </a:r>
+          </a:p>
+        </p:txBody>
+      </p:sp>
+      <p:sp>
+        <p:nvSpPr>
+          <p:cNvPr id="5" name="TextBox 4"/>
           <p:cNvSpPr txBox="1"/>
           <p:nvPr/>
         </p:nvSpPr>
         <p:spPr>
           <a:xfrm>
             <a:off x="822960" y="914400"/>
-            <a:ext cx="6949440" cy="822960"/>
+            <a:ext cx="10515600" cy="822960"/>
           </a:xfrm>
           <a:prstGeom prst="rect">
             <a:avLst/>
@@ -7388,7 +6955,7 @@
           <a:noFill/>
         </p:spPr>
         <p:txBody>
-          <a:bodyPr wrap="square" anchor="t" lIns="45720" rIns="45720" tIns="27432" bIns="27432">
+          <a:bodyPr wrap="square" anchor="t">
             <a:spAutoFit/>
           </a:bodyPr>
           <a:lstStyle/>
@@ -7399,14 +6966,58 @@
               </a:lnSpc>
             </a:pPr>
             <a:r>
-              <a:rPr sz="2800" b="1">
+              <a:rPr sz="3400" b="1">
                 <a:solidFill>
                   <a:srgbClr val="301D19"/>
                 </a:solidFill>
                 <a:latin typeface="Helvetica Neue"/>
               </a:rPr>
-              <a:t>No es una maqueta. Corre ahora, desde su teléfono.</a:t>
-            </a:r>
+              <a:t>Por qué esto y no lo de siempre</a:t>
+            </a:r>
+          </a:p>
+        </p:txBody>
+      </p:sp>
+      <p:sp>
+        <p:nvSpPr>
+          <p:cNvPr id="6" name="Rectangle 5"/>
+          <p:cNvSpPr/>
+          <p:nvPr/>
+        </p:nvSpPr>
+        <p:spPr>
+          <a:xfrm>
+            <a:off x="822960" y="2011680"/>
+            <a:ext cx="109728" cy="1005840"/>
+          </a:xfrm>
+          <a:prstGeom prst="rect">
+            <a:avLst/>
+          </a:prstGeom>
+          <a:solidFill>
+            <a:srgbClr val="FF5A0A"/>
+          </a:solidFill>
+          <a:ln>
+            <a:noFill/>
+          </a:ln>
+          <a:effectLst/>
+        </p:spPr>
+        <p:style>
+          <a:lnRef idx="1">
+            <a:schemeClr val="accent1"/>
+          </a:lnRef>
+          <a:fillRef idx="3">
+            <a:schemeClr val="accent1"/>
+          </a:fillRef>
+          <a:effectRef idx="2">
+            <a:schemeClr val="accent1"/>
+          </a:effectRef>
+          <a:fontRef idx="minor">
+            <a:schemeClr val="lt1"/>
+          </a:fontRef>
+        </p:style>
+        <p:txBody>
+          <a:bodyPr rtlCol="0" anchor="ctr"/>
+          <a:lstStyle/>
+          <a:p>
+            <a:pPr algn="ctr"/>
           </a:p>
         </p:txBody>
       </p:sp>
@@ -7418,8 +7029,8 @@
         </p:nvSpPr>
         <p:spPr>
           <a:xfrm>
-            <a:off x="822960" y="1920240"/>
-            <a:ext cx="2743200" cy="822960"/>
+            <a:off x="1143000" y="1965960"/>
+            <a:ext cx="10058400" cy="548640"/>
           </a:xfrm>
           <a:prstGeom prst="rect">
             <a:avLst/>
@@ -7427,7 +7038,7 @@
           <a:noFill/>
         </p:spPr>
         <p:txBody>
-          <a:bodyPr wrap="square" anchor="ctr" lIns="45720" rIns="45720" tIns="27432" bIns="27432">
+          <a:bodyPr wrap="square" anchor="t">
             <a:spAutoFit/>
           </a:bodyPr>
           <a:lstStyle/>
@@ -7438,13 +7049,13 @@
               </a:lnSpc>
             </a:pPr>
             <a:r>
-              <a:rPr sz="2400" b="1">
+              <a:rPr sz="2600" b="1">
                 <a:solidFill>
                   <a:srgbClr val="C83D08"/>
                 </a:solidFill>
                 <a:latin typeface="Helvetica Neue"/>
               </a:rPr>
-              <a:t>39 reglas</a:t>
+              <a:t>No es una auditoría después.</a:t>
             </a:r>
           </a:p>
         </p:txBody>
@@ -7457,8 +7068,8 @@
         </p:nvSpPr>
         <p:spPr>
           <a:xfrm>
-            <a:off x="3566160" y="1920240"/>
-            <a:ext cx="4206240" cy="868680"/>
+            <a:off x="1143000" y="2514600"/>
+            <a:ext cx="10058400" cy="548640"/>
           </a:xfrm>
           <a:prstGeom prst="rect">
             <a:avLst/>
@@ -7466,7 +7077,7 @@
           <a:noFill/>
         </p:spPr>
         <p:txBody>
-          <a:bodyPr wrap="square" anchor="ctr" lIns="45720" rIns="45720" tIns="27432" bIns="27432">
+          <a:bodyPr wrap="square" anchor="t">
             <a:spAutoFit/>
           </a:bodyPr>
           <a:lstStyle/>
@@ -7477,27 +7088,71 @@
               </a:lnSpc>
             </a:pPr>
             <a:r>
-              <a:rPr sz="1300" b="0">
+              <a:rPr sz="1800" b="0">
                 <a:solidFill>
                   <a:srgbClr val="301D19"/>
                 </a:solidFill>
                 <a:latin typeface="Helvetica Neue"/>
               </a:rPr>
-              <a:t>sobre las seis aristas del rombo, cada una con fuente pública o supuesto declarado en pantalla.</a:t>
-            </a:r>
-          </a:p>
-        </p:txBody>
-      </p:sp>
-      <p:sp>
-        <p:nvSpPr>
-          <p:cNvPr id="9" name="TextBox 8"/>
+              <a:t>Corre en cada venta, antes de instalar.</a:t>
+            </a:r>
+          </a:p>
+        </p:txBody>
+      </p:sp>
+      <p:sp>
+        <p:nvSpPr>
+          <p:cNvPr id="9" name="Rectangle 8"/>
+          <p:cNvSpPr/>
+          <p:nvPr/>
+        </p:nvSpPr>
+        <p:spPr>
+          <a:xfrm>
+            <a:off x="822960" y="3337560"/>
+            <a:ext cx="109728" cy="1005840"/>
+          </a:xfrm>
+          <a:prstGeom prst="rect">
+            <a:avLst/>
+          </a:prstGeom>
+          <a:solidFill>
+            <a:srgbClr val="FF5A0A"/>
+          </a:solidFill>
+          <a:ln>
+            <a:noFill/>
+          </a:ln>
+          <a:effectLst/>
+        </p:spPr>
+        <p:style>
+          <a:lnRef idx="1">
+            <a:schemeClr val="accent1"/>
+          </a:lnRef>
+          <a:fillRef idx="3">
+            <a:schemeClr val="accent1"/>
+          </a:fillRef>
+          <a:effectRef idx="2">
+            <a:schemeClr val="accent1"/>
+          </a:effectRef>
+          <a:fontRef idx="minor">
+            <a:schemeClr val="lt1"/>
+          </a:fontRef>
+        </p:style>
+        <p:txBody>
+          <a:bodyPr rtlCol="0" anchor="ctr"/>
+          <a:lstStyle/>
+          <a:p>
+            <a:pPr algn="ctr"/>
+          </a:p>
+        </p:txBody>
+      </p:sp>
+      <p:sp>
+        <p:nvSpPr>
+          <p:cNvPr id="10" name="TextBox 9"/>
           <p:cNvSpPr txBox="1"/>
           <p:nvPr/>
         </p:nvSpPr>
         <p:spPr>
           <a:xfrm>
-            <a:off x="822960" y="2880360"/>
-            <a:ext cx="2743200" cy="822960"/>
+            <a:off x="1143000" y="3291840"/>
+            <a:ext cx="10058400" cy="548640"/>
           </a:xfrm>
           <a:prstGeom prst="rect">
             <a:avLst/>
@@ -7505,7 +7160,7 @@
           <a:noFill/>
         </p:spPr>
         <p:txBody>
-          <a:bodyPr wrap="square" anchor="ctr" lIns="45720" rIns="45720" tIns="27432" bIns="27432">
+          <a:bodyPr wrap="square" anchor="t">
             <a:spAutoFit/>
           </a:bodyPr>
           <a:lstStyle/>
@@ -7516,27 +7171,27 @@
               </a:lnSpc>
             </a:pPr>
             <a:r>
-              <a:rPr sz="2400" b="1">
+              <a:rPr sz="2600" b="1">
                 <a:solidFill>
                   <a:srgbClr val="C83D08"/>
                 </a:solidFill>
                 <a:latin typeface="Helvetica Neue"/>
               </a:rPr>
-              <a:t>24 + 25 casos</a:t>
-            </a:r>
-          </a:p>
-        </p:txBody>
-      </p:sp>
-      <p:sp>
-        <p:nvSpPr>
-          <p:cNvPr id="10" name="TextBox 9"/>
+              <a:t>No es un score opaco.</a:t>
+            </a:r>
+          </a:p>
+        </p:txBody>
+      </p:sp>
+      <p:sp>
+        <p:nvSpPr>
+          <p:cNvPr id="11" name="TextBox 10"/>
           <p:cNvSpPr txBox="1"/>
           <p:nvPr/>
         </p:nvSpPr>
         <p:spPr>
           <a:xfrm>
-            <a:off x="3566160" y="2880360"/>
-            <a:ext cx="4206240" cy="868680"/>
+            <a:off x="1143000" y="3840480"/>
+            <a:ext cx="10058400" cy="548640"/>
           </a:xfrm>
           <a:prstGeom prst="rect">
             <a:avLst/>
@@ -7544,7 +7199,7 @@
           <a:noFill/>
         </p:spPr>
         <p:txBody>
-          <a:bodyPr wrap="square" anchor="ctr" lIns="45720" rIns="45720" tIns="27432" bIns="27432">
+          <a:bodyPr wrap="square" anchor="t">
             <a:spAutoFit/>
           </a:bodyPr>
           <a:lstStyle/>
@@ -7555,27 +7210,71 @@
               </a:lnSpc>
             </a:pPr>
             <a:r>
-              <a:rPr sz="1300" b="0">
+              <a:rPr sz="1800" b="0">
                 <a:solidFill>
                   <a:srgbClr val="301D19"/>
                 </a:solidFill>
                 <a:latin typeface="Helvetica Neue"/>
               </a:rPr>
-              <a:t>24 casos adversarios del banco del equipo y 25 casos demo etiquetados, en el repo, corren sin red.</a:t>
-            </a:r>
-          </a:p>
-        </p:txBody>
-      </p:sp>
-      <p:sp>
-        <p:nvSpPr>
-          <p:cNvPr id="11" name="TextBox 10"/>
+              <a:t>Es costo en soles contra costo de revisar.</a:t>
+            </a:r>
+          </a:p>
+        </p:txBody>
+      </p:sp>
+      <p:sp>
+        <p:nvSpPr>
+          <p:cNvPr id="12" name="Rectangle 11"/>
+          <p:cNvSpPr/>
+          <p:nvPr/>
+        </p:nvSpPr>
+        <p:spPr>
+          <a:xfrm>
+            <a:off x="822960" y="4663440"/>
+            <a:ext cx="109728" cy="1005840"/>
+          </a:xfrm>
+          <a:prstGeom prst="rect">
+            <a:avLst/>
+          </a:prstGeom>
+          <a:solidFill>
+            <a:srgbClr val="FF5A0A"/>
+          </a:solidFill>
+          <a:ln>
+            <a:noFill/>
+          </a:ln>
+          <a:effectLst/>
+        </p:spPr>
+        <p:style>
+          <a:lnRef idx="1">
+            <a:schemeClr val="accent1"/>
+          </a:lnRef>
+          <a:fillRef idx="3">
+            <a:schemeClr val="accent1"/>
+          </a:fillRef>
+          <a:effectRef idx="2">
+            <a:schemeClr val="accent1"/>
+          </a:effectRef>
+          <a:fontRef idx="minor">
+            <a:schemeClr val="lt1"/>
+          </a:fontRef>
+        </p:style>
+        <p:txBody>
+          <a:bodyPr rtlCol="0" anchor="ctr"/>
+          <a:lstStyle/>
+          <a:p>
+            <a:pPr algn="ctr"/>
+          </a:p>
+        </p:txBody>
+      </p:sp>
+      <p:sp>
+        <p:nvSpPr>
+          <p:cNvPr id="13" name="TextBox 12"/>
           <p:cNvSpPr txBox="1"/>
           <p:nvPr/>
         </p:nvSpPr>
         <p:spPr>
           <a:xfrm>
-            <a:off x="822960" y="3840480"/>
-            <a:ext cx="2743200" cy="822960"/>
+            <a:off x="1143000" y="4617720"/>
+            <a:ext cx="10058400" cy="548640"/>
           </a:xfrm>
           <a:prstGeom prst="rect">
             <a:avLst/>
@@ -7583,7 +7282,7 @@
           <a:noFill/>
         </p:spPr>
         <p:txBody>
-          <a:bodyPr wrap="square" anchor="ctr" lIns="45720" rIns="45720" tIns="27432" bIns="27432">
+          <a:bodyPr wrap="square" anchor="t">
             <a:spAutoFit/>
           </a:bodyPr>
           <a:lstStyle/>
@@ -7594,27 +7293,27 @@
               </a:lnSpc>
             </a:pPr>
             <a:r>
-              <a:rPr sz="2400" b="1">
+              <a:rPr sz="2600" b="1">
                 <a:solidFill>
                   <a:srgbClr val="C83D08"/>
                 </a:solidFill>
                 <a:latin typeface="Helvetica Neue"/>
               </a:rPr>
-              <a:t>30 campos</a:t>
-            </a:r>
-          </a:p>
-        </p:txBody>
-      </p:sp>
-      <p:sp>
-        <p:nvSpPr>
-          <p:cNvPr id="12" name="TextBox 11"/>
+              <a:t>La IA no decide.</a:t>
+            </a:r>
+          </a:p>
+        </p:txBody>
+      </p:sp>
+      <p:sp>
+        <p:nvSpPr>
+          <p:cNvPr id="14" name="TextBox 13"/>
           <p:cNvSpPr txBox="1"/>
           <p:nvPr/>
         </p:nvSpPr>
         <p:spPr>
           <a:xfrm>
-            <a:off x="3566160" y="3840480"/>
-            <a:ext cx="4206240" cy="868680"/>
+            <a:off x="1143000" y="5166359"/>
+            <a:ext cx="10058400" cy="548640"/>
           </a:xfrm>
           <a:prstGeom prst="rect">
             <a:avLst/>
@@ -7622,7 +7321,7 @@
           <a:noFill/>
         </p:spPr>
         <p:txBody>
-          <a:bodyPr wrap="square" anchor="ctr" lIns="45720" rIns="45720" tIns="27432" bIns="27432">
+          <a:bodyPr wrap="square" anchor="t">
             <a:spAutoFit/>
           </a:bodyPr>
           <a:lstStyle/>
@@ -7633,27 +7332,27 @@
               </a:lnSpc>
             </a:pPr>
             <a:r>
-              <a:rPr sz="1300" b="0">
+              <a:rPr sz="1800" b="0">
                 <a:solidFill>
                   <a:srgbClr val="301D19"/>
                 </a:solidFill>
                 <a:latin typeface="Helvetica Neue"/>
               </a:rPr>
-              <a:t>en el contrato de datos: 21 ya existen en WIN, 4 por confirmar, 5 por capturar.</a:t>
-            </a:r>
-          </a:p>
-        </p:txBody>
-      </p:sp>
-      <p:sp>
-        <p:nvSpPr>
-          <p:cNvPr id="13" name="TextBox 12"/>
+              <a:t>Extrae, mapea y explica. Decide el motor, con reglas que se leen.</a:t>
+            </a:r>
+          </a:p>
+        </p:txBody>
+      </p:sp>
+      <p:sp>
+        <p:nvSpPr>
+          <p:cNvPr id="15" name="TextBox 14"/>
           <p:cNvSpPr txBox="1"/>
           <p:nvPr/>
         </p:nvSpPr>
         <p:spPr>
           <a:xfrm>
-            <a:off x="822960" y="4800600"/>
-            <a:ext cx="2743200" cy="822960"/>
+            <a:off x="822960" y="5943600"/>
+            <a:ext cx="10515600" cy="457200"/>
           </a:xfrm>
           <a:prstGeom prst="rect">
             <a:avLst/>
@@ -7661,7 +7360,7 @@
           <a:noFill/>
         </p:spPr>
         <p:txBody>
-          <a:bodyPr wrap="square" anchor="ctr" lIns="45720" rIns="45720" tIns="27432" bIns="27432">
+          <a:bodyPr wrap="square" anchor="t">
             <a:spAutoFit/>
           </a:bodyPr>
           <a:lstStyle/>
@@ -7672,278 +7371,13 @@
               </a:lnSpc>
             </a:pPr>
             <a:r>
-              <a:rPr sz="2400" b="1">
-                <a:solidFill>
-                  <a:srgbClr val="C83D08"/>
-                </a:solidFill>
-                <a:latin typeface="Helvetica Neue"/>
-              </a:rPr>
-              <a:t>97 pruebas en verde</a:t>
-            </a:r>
-          </a:p>
-        </p:txBody>
-      </p:sp>
-      <p:sp>
-        <p:nvSpPr>
-          <p:cNvPr id="14" name="TextBox 13"/>
-          <p:cNvSpPr txBox="1"/>
-          <p:nvPr/>
-        </p:nvSpPr>
-        <p:spPr>
-          <a:xfrm>
-            <a:off x="3566160" y="4800600"/>
-            <a:ext cx="4206240" cy="868680"/>
-          </a:xfrm>
-          <a:prstGeom prst="rect">
-            <a:avLst/>
-          </a:prstGeom>
-          <a:noFill/>
-        </p:spPr>
-        <p:txBody>
-          <a:bodyPr wrap="square" anchor="ctr" lIns="45720" rIns="45720" tIns="27432" bIns="27432">
-            <a:spAutoFit/>
-          </a:bodyPr>
-          <a:lstStyle/>
-          <a:p>
-            <a:pPr algn="l">
-              <a:lnSpc>
-                <a:spcPct val="105000"/>
-              </a:lnSpc>
-            </a:pPr>
-            <a:r>
-              <a:rPr sz="1300" b="0">
-                <a:solidFill>
-                  <a:srgbClr val="301D19"/>
-                </a:solidFill>
-                <a:latin typeface="Helvetica Neue"/>
-              </a:rPr>
-              <a:t>motor, ingesta, app y banco adversario. La IA corre en vivo con OpenCode Go y degrada sin red.</a:t>
-            </a:r>
-          </a:p>
-        </p:txBody>
-      </p:sp>
-      <p:sp>
-        <p:nvSpPr>
-          <p:cNvPr id="15" name="Rounded Rectangle 14"/>
-          <p:cNvSpPr/>
-          <p:nvPr/>
-        </p:nvSpPr>
-        <p:spPr>
-          <a:xfrm>
-            <a:off x="8138160" y="1005840"/>
-            <a:ext cx="3566160" cy="5212080"/>
-          </a:xfrm>
-          <a:prstGeom prst="roundRect">
-            <a:avLst/>
-          </a:prstGeom>
-          <a:solidFill>
-            <a:srgbClr val="FFF3ED"/>
-          </a:solidFill>
-          <a:ln w="12700">
-            <a:solidFill>
-              <a:srgbClr val="FF5A0A"/>
-            </a:solidFill>
-          </a:ln>
-          <a:effectLst/>
-        </p:spPr>
-        <p:style>
-          <a:lnRef idx="1">
-            <a:schemeClr val="accent1"/>
-          </a:lnRef>
-          <a:fillRef idx="3">
-            <a:schemeClr val="accent1"/>
-          </a:fillRef>
-          <a:effectRef idx="2">
-            <a:schemeClr val="accent1"/>
-          </a:effectRef>
-          <a:fontRef idx="minor">
-            <a:schemeClr val="lt1"/>
-          </a:fontRef>
-        </p:style>
-        <p:txBody>
-          <a:bodyPr rtlCol="0" anchor="ctr"/>
-          <a:lstStyle/>
-          <a:p>
-            <a:pPr algn="ctr"/>
-          </a:p>
-        </p:txBody>
-      </p:sp>
-      <p:pic>
-        <p:nvPicPr>
-          <p:cNvPr id="16" name="Picture 15" descr="WIN-Reto03-QR-demo.png"/>
-          <p:cNvPicPr>
-            <a:picLocks noChangeAspect="1"/>
-          </p:cNvPicPr>
-          <p:nvPr/>
-        </p:nvPicPr>
-        <p:blipFill>
-          <a:blip r:embed="rId3"/>
-          <a:stretch>
-            <a:fillRect/>
-          </a:stretch>
-        </p:blipFill>
-        <p:spPr>
-          <a:xfrm>
-            <a:off x="8458200" y="1234440"/>
-            <a:ext cx="2926080" cy="2926080"/>
-          </a:xfrm>
-          <a:prstGeom prst="rect">
-            <a:avLst/>
-          </a:prstGeom>
-        </p:spPr>
-      </p:pic>
-      <p:sp>
-        <p:nvSpPr>
-          <p:cNvPr id="17" name="TextBox 16"/>
-          <p:cNvSpPr txBox="1"/>
-          <p:nvPr/>
-        </p:nvSpPr>
-        <p:spPr>
-          <a:xfrm>
-            <a:off x="8183879" y="4251960"/>
-            <a:ext cx="3474720" cy="457200"/>
-          </a:xfrm>
-          <a:prstGeom prst="rect">
-            <a:avLst/>
-          </a:prstGeom>
-          <a:noFill/>
-        </p:spPr>
-        <p:txBody>
-          <a:bodyPr wrap="square" anchor="t" lIns="45720" rIns="45720" tIns="27432" bIns="27432">
-            <a:spAutoFit/>
-          </a:bodyPr>
-          <a:lstStyle/>
-          <a:p>
-            <a:pPr algn="ctr">
-              <a:lnSpc>
-                <a:spcPct val="105000"/>
-              </a:lnSpc>
-            </a:pPr>
-            <a:r>
-              <a:rPr sz="1800" b="1">
-                <a:solidFill>
-                  <a:srgbClr val="C83D08"/>
-                </a:solidFill>
-                <a:latin typeface="Helvetica Neue"/>
-              </a:rPr>
-              <a:t>Escanea y prueba</a:t>
-            </a:r>
-          </a:p>
-        </p:txBody>
-      </p:sp>
-      <p:sp>
-        <p:nvSpPr>
-          <p:cNvPr id="18" name="TextBox 17"/>
-          <p:cNvSpPr txBox="1"/>
-          <p:nvPr/>
-        </p:nvSpPr>
-        <p:spPr>
-          <a:xfrm>
-            <a:off x="8183879" y="4663440"/>
-            <a:ext cx="3474720" cy="822960"/>
-          </a:xfrm>
-          <a:prstGeom prst="rect">
-            <a:avLst/>
-          </a:prstGeom>
-          <a:noFill/>
-        </p:spPr>
-        <p:txBody>
-          <a:bodyPr wrap="square" anchor="t" lIns="45720" rIns="45720" tIns="27432" bIns="27432">
-            <a:spAutoFit/>
-          </a:bodyPr>
-          <a:lstStyle/>
-          <a:p>
-            <a:pPr algn="ctr">
-              <a:lnSpc>
-                <a:spcPct val="105000"/>
-              </a:lnSpc>
-            </a:pPr>
-            <a:r>
-              <a:rPr sz="1100" b="0">
-                <a:solidFill>
-                  <a:srgbClr val="301D19"/>
-                </a:solidFill>
-                <a:latin typeface="Helvetica Neue"/>
-              </a:rPr>
-              <a:t>idealistic-carmela-preneolithic.ngrok-free.dev</a:t>
-            </a:r>
-          </a:p>
-        </p:txBody>
-      </p:sp>
-      <p:sp>
-        <p:nvSpPr>
-          <p:cNvPr id="19" name="TextBox 18"/>
-          <p:cNvSpPr txBox="1"/>
-          <p:nvPr/>
-        </p:nvSpPr>
-        <p:spPr>
-          <a:xfrm>
-            <a:off x="8183879" y="5440680"/>
-            <a:ext cx="3474720" cy="731520"/>
-          </a:xfrm>
-          <a:prstGeom prst="rect">
-            <a:avLst/>
-          </a:prstGeom>
-          <a:noFill/>
-        </p:spPr>
-        <p:txBody>
-          <a:bodyPr wrap="square" anchor="t" lIns="45720" rIns="45720" tIns="27432" bIns="27432">
-            <a:spAutoFit/>
-          </a:bodyPr>
-          <a:lstStyle/>
-          <a:p>
-            <a:pPr algn="ctr">
-              <a:lnSpc>
-                <a:spcPct val="105000"/>
-              </a:lnSpc>
-            </a:pPr>
-            <a:r>
-              <a:rPr sz="1000" b="0">
+              <a:rPr sz="1600" b="1">
                 <a:solidFill>
                   <a:srgbClr val="4B4B4B"/>
                 </a:solidFill>
                 <a:latin typeface="Helvetica Neue"/>
               </a:rPr>
-              <a:t>Sin instalar nada. Si aparece la página de ngrok, toca «Visit Site». Luego: Lote → Cargar los 25 casos de demo.</a:t>
-            </a:r>
-          </a:p>
-        </p:txBody>
-      </p:sp>
-      <p:sp>
-        <p:nvSpPr>
-          <p:cNvPr id="20" name="TextBox 19"/>
-          <p:cNvSpPr txBox="1"/>
-          <p:nvPr/>
-        </p:nvSpPr>
-        <p:spPr>
-          <a:xfrm>
-            <a:off x="822960" y="5897880"/>
-            <a:ext cx="6949440" cy="548640"/>
-          </a:xfrm>
-          <a:prstGeom prst="rect">
-            <a:avLst/>
-          </a:prstGeom>
-          <a:noFill/>
-        </p:spPr>
-        <p:txBody>
-          <a:bodyPr wrap="square" anchor="t" lIns="45720" rIns="45720" tIns="27432" bIns="27432">
-            <a:spAutoFit/>
-          </a:bodyPr>
-          <a:lstStyle/>
-          <a:p>
-            <a:pPr algn="l">
-              <a:lnSpc>
-                <a:spcPct val="105000"/>
-              </a:lnSpc>
-            </a:pPr>
-            <a:r>
-              <a:rPr sz="1100" b="0">
-                <a:solidFill>
-                  <a:srgbClr val="4B4B4B"/>
-                </a:solidFill>
-                <a:latin typeface="Helvetica Neue"/>
-              </a:rPr>
-              <a:t>github.com/MccFlurry/win-reto03 · datos 100 % sintéticos · catálogo desde win.pe y la cartilla pública</a:t>
+              <a:t>Arranca el día uno con el tarifario público. Sin histórico etiquetado.</a:t>
             </a:r>
           </a:p>
         </p:txBody>
@@ -8050,45 +7484,6 @@
         </p:nvSpPr>
         <p:spPr>
           <a:xfrm>
-            <a:off x="1005840" y="274320"/>
-            <a:ext cx="5486400" cy="411480"/>
-          </a:xfrm>
-          <a:prstGeom prst="rect">
-            <a:avLst/>
-          </a:prstGeom>
-          <a:noFill/>
-        </p:spPr>
-        <p:txBody>
-          <a:bodyPr wrap="square" anchor="ctr" lIns="45720" rIns="45720" tIns="27432" bIns="27432">
-            <a:spAutoFit/>
-          </a:bodyPr>
-          <a:lstStyle/>
-          <a:p>
-            <a:pPr algn="l">
-              <a:lnSpc>
-                <a:spcPct val="105000"/>
-              </a:lnSpc>
-            </a:pPr>
-            <a:r>
-              <a:rPr sz="1200" b="0">
-                <a:solidFill>
-                  <a:srgbClr val="4B4B4B"/>
-                </a:solidFill>
-                <a:latin typeface="Helvetica Neue"/>
-              </a:rPr>
-              <a:t>Reto 03 · Que lo prometido sea lo entregado</a:t>
-            </a:r>
-          </a:p>
-        </p:txBody>
-      </p:sp>
-      <p:sp>
-        <p:nvSpPr>
-          <p:cNvPr id="5" name="TextBox 4"/>
-          <p:cNvSpPr txBox="1"/>
-          <p:nvPr/>
-        </p:nvSpPr>
-        <p:spPr>
-          <a:xfrm>
             <a:off x="8503920" y="274320"/>
             <a:ext cx="3291840" cy="411480"/>
           </a:xfrm>
@@ -8098,7 +7493,7 @@
           <a:noFill/>
         </p:spPr>
         <p:txBody>
-          <a:bodyPr wrap="square" anchor="ctr" lIns="45720" rIns="45720" tIns="27432" bIns="27432">
+          <a:bodyPr wrap="square" anchor="ctr">
             <a:spAutoFit/>
           </a:bodyPr>
           <a:lstStyle/>
@@ -8115,21 +7510,21 @@
                 </a:solidFill>
                 <a:latin typeface="Helvetica Neue"/>
               </a:rPr>
-              <a:t>6 / 7 · Equipo</a:t>
-            </a:r>
-          </a:p>
-        </p:txBody>
-      </p:sp>
-      <p:sp>
-        <p:nvSpPr>
-          <p:cNvPr id="6" name="TextBox 5"/>
+              <a:t>6 / 7 · Tracción</a:t>
+            </a:r>
+          </a:p>
+        </p:txBody>
+      </p:sp>
+      <p:sp>
+        <p:nvSpPr>
+          <p:cNvPr id="5" name="TextBox 4"/>
           <p:cNvSpPr txBox="1"/>
           <p:nvPr/>
         </p:nvSpPr>
         <p:spPr>
           <a:xfrm>
             <a:off x="822960" y="914400"/>
-            <a:ext cx="10515600" cy="822960"/>
+            <a:ext cx="7132320" cy="822960"/>
           </a:xfrm>
           <a:prstGeom prst="rect">
             <a:avLst/>
@@ -8137,7 +7532,7 @@
           <a:noFill/>
         </p:spPr>
         <p:txBody>
-          <a:bodyPr wrap="square" anchor="t" lIns="45720" rIns="45720" tIns="27432" bIns="27432">
+          <a:bodyPr wrap="square" anchor="t">
             <a:spAutoFit/>
           </a:bodyPr>
           <a:lstStyle/>
@@ -8148,37 +7543,310 @@
               </a:lnSpc>
             </a:pPr>
             <a:r>
-              <a:rPr sz="2800" b="1">
+              <a:rPr sz="3400" b="1">
                 <a:solidFill>
                   <a:srgbClr val="301D19"/>
                 </a:solidFill>
                 <a:latin typeface="Helvetica Neue"/>
               </a:rPr>
-              <a:t>Tres mitades del mismo problema</a:t>
-            </a:r>
-          </a:p>
-        </p:txBody>
-      </p:sp>
-      <p:sp>
-        <p:nvSpPr>
-          <p:cNvPr id="7" name="Rectangle 6"/>
+              <a:t>No es una maqueta. Corre ahora.</a:t>
+            </a:r>
+          </a:p>
+        </p:txBody>
+      </p:sp>
+      <p:sp>
+        <p:nvSpPr>
+          <p:cNvPr id="6" name="TextBox 5"/>
+          <p:cNvSpPr txBox="1"/>
+          <p:nvPr/>
+        </p:nvSpPr>
+        <p:spPr>
+          <a:xfrm>
+            <a:off x="822960" y="1920240"/>
+            <a:ext cx="2011680" cy="1005840"/>
+          </a:xfrm>
+          <a:prstGeom prst="rect">
+            <a:avLst/>
+          </a:prstGeom>
+          <a:noFill/>
+        </p:spPr>
+        <p:txBody>
+          <a:bodyPr wrap="square" anchor="ctr">
+            <a:spAutoFit/>
+          </a:bodyPr>
+          <a:lstStyle/>
+          <a:p>
+            <a:pPr algn="r">
+              <a:lnSpc>
+                <a:spcPct val="105000"/>
+              </a:lnSpc>
+            </a:pPr>
+            <a:r>
+              <a:rPr sz="4800" b="1">
+                <a:solidFill>
+                  <a:srgbClr val="C83D08"/>
+                </a:solidFill>
+                <a:latin typeface="Helvetica Neue"/>
+              </a:rPr>
+              <a:t>39</a:t>
+            </a:r>
+          </a:p>
+        </p:txBody>
+      </p:sp>
+      <p:sp>
+        <p:nvSpPr>
+          <p:cNvPr id="7" name="TextBox 6"/>
+          <p:cNvSpPr txBox="1"/>
+          <p:nvPr/>
+        </p:nvSpPr>
+        <p:spPr>
+          <a:xfrm>
+            <a:off x="3017520" y="1920240"/>
+            <a:ext cx="4754880" cy="1005840"/>
+          </a:xfrm>
+          <a:prstGeom prst="rect">
+            <a:avLst/>
+          </a:prstGeom>
+          <a:noFill/>
+        </p:spPr>
+        <p:txBody>
+          <a:bodyPr wrap="square" anchor="ctr">
+            <a:spAutoFit/>
+          </a:bodyPr>
+          <a:lstStyle/>
+          <a:p>
+            <a:pPr algn="l">
+              <a:lnSpc>
+                <a:spcPct val="105000"/>
+              </a:lnSpc>
+            </a:pPr>
+            <a:r>
+              <a:rPr sz="2000" b="0">
+                <a:solidFill>
+                  <a:srgbClr val="301D19"/>
+                </a:solidFill>
+                <a:latin typeface="Helvetica Neue"/>
+              </a:rPr>
+              <a:t>reglas, cada una con su fuente</a:t>
+            </a:r>
+          </a:p>
+        </p:txBody>
+      </p:sp>
+      <p:sp>
+        <p:nvSpPr>
+          <p:cNvPr id="8" name="TextBox 7"/>
+          <p:cNvSpPr txBox="1"/>
+          <p:nvPr/>
+        </p:nvSpPr>
+        <p:spPr>
+          <a:xfrm>
+            <a:off x="822960" y="3154680"/>
+            <a:ext cx="2011680" cy="1005840"/>
+          </a:xfrm>
+          <a:prstGeom prst="rect">
+            <a:avLst/>
+          </a:prstGeom>
+          <a:noFill/>
+        </p:spPr>
+        <p:txBody>
+          <a:bodyPr wrap="square" anchor="ctr">
+            <a:spAutoFit/>
+          </a:bodyPr>
+          <a:lstStyle/>
+          <a:p>
+            <a:pPr algn="r">
+              <a:lnSpc>
+                <a:spcPct val="105000"/>
+              </a:lnSpc>
+            </a:pPr>
+            <a:r>
+              <a:rPr sz="4800" b="1">
+                <a:solidFill>
+                  <a:srgbClr val="C83D08"/>
+                </a:solidFill>
+                <a:latin typeface="Helvetica Neue"/>
+              </a:rPr>
+              <a:t>49</a:t>
+            </a:r>
+          </a:p>
+        </p:txBody>
+      </p:sp>
+      <p:sp>
+        <p:nvSpPr>
+          <p:cNvPr id="9" name="TextBox 8"/>
+          <p:cNvSpPr txBox="1"/>
+          <p:nvPr/>
+        </p:nvSpPr>
+        <p:spPr>
+          <a:xfrm>
+            <a:off x="3017520" y="3154680"/>
+            <a:ext cx="4754880" cy="1005840"/>
+          </a:xfrm>
+          <a:prstGeom prst="rect">
+            <a:avLst/>
+          </a:prstGeom>
+          <a:noFill/>
+        </p:spPr>
+        <p:txBody>
+          <a:bodyPr wrap="square" anchor="ctr">
+            <a:spAutoFit/>
+          </a:bodyPr>
+          <a:lstStyle/>
+          <a:p>
+            <a:pPr algn="l">
+              <a:lnSpc>
+                <a:spcPct val="105000"/>
+              </a:lnSpc>
+            </a:pPr>
+            <a:r>
+              <a:rPr sz="2000" b="0">
+                <a:solidFill>
+                  <a:srgbClr val="301D19"/>
+                </a:solidFill>
+                <a:latin typeface="Helvetica Neue"/>
+              </a:rPr>
+              <a:t>casos de prueba, 24 adversarios</a:t>
+            </a:r>
+          </a:p>
+        </p:txBody>
+      </p:sp>
+      <p:sp>
+        <p:nvSpPr>
+          <p:cNvPr id="10" name="TextBox 9"/>
+          <p:cNvSpPr txBox="1"/>
+          <p:nvPr/>
+        </p:nvSpPr>
+        <p:spPr>
+          <a:xfrm>
+            <a:off x="822960" y="4389120"/>
+            <a:ext cx="2011680" cy="1005840"/>
+          </a:xfrm>
+          <a:prstGeom prst="rect">
+            <a:avLst/>
+          </a:prstGeom>
+          <a:noFill/>
+        </p:spPr>
+        <p:txBody>
+          <a:bodyPr wrap="square" anchor="ctr">
+            <a:spAutoFit/>
+          </a:bodyPr>
+          <a:lstStyle/>
+          <a:p>
+            <a:pPr algn="r">
+              <a:lnSpc>
+                <a:spcPct val="105000"/>
+              </a:lnSpc>
+            </a:pPr>
+            <a:r>
+              <a:rPr sz="4800" b="1">
+                <a:solidFill>
+                  <a:srgbClr val="C83D08"/>
+                </a:solidFill>
+                <a:latin typeface="Helvetica Neue"/>
+              </a:rPr>
+              <a:t>97</a:t>
+            </a:r>
+          </a:p>
+        </p:txBody>
+      </p:sp>
+      <p:sp>
+        <p:nvSpPr>
+          <p:cNvPr id="11" name="TextBox 10"/>
+          <p:cNvSpPr txBox="1"/>
+          <p:nvPr/>
+        </p:nvSpPr>
+        <p:spPr>
+          <a:xfrm>
+            <a:off x="3017520" y="4389120"/>
+            <a:ext cx="4754880" cy="1005840"/>
+          </a:xfrm>
+          <a:prstGeom prst="rect">
+            <a:avLst/>
+          </a:prstGeom>
+          <a:noFill/>
+        </p:spPr>
+        <p:txBody>
+          <a:bodyPr wrap="square" anchor="ctr">
+            <a:spAutoFit/>
+          </a:bodyPr>
+          <a:lstStyle/>
+          <a:p>
+            <a:pPr algn="l">
+              <a:lnSpc>
+                <a:spcPct val="105000"/>
+              </a:lnSpc>
+            </a:pPr>
+            <a:r>
+              <a:rPr sz="2000" b="0">
+                <a:solidFill>
+                  <a:srgbClr val="301D19"/>
+                </a:solidFill>
+                <a:latin typeface="Helvetica Neue"/>
+              </a:rPr>
+              <a:t>pruebas automáticas en verde</a:t>
+            </a:r>
+          </a:p>
+        </p:txBody>
+      </p:sp>
+      <p:sp>
+        <p:nvSpPr>
+          <p:cNvPr id="12" name="TextBox 11"/>
+          <p:cNvSpPr txBox="1"/>
+          <p:nvPr/>
+        </p:nvSpPr>
+        <p:spPr>
+          <a:xfrm>
+            <a:off x="822960" y="5760720"/>
+            <a:ext cx="7132320" cy="548640"/>
+          </a:xfrm>
+          <a:prstGeom prst="rect">
+            <a:avLst/>
+          </a:prstGeom>
+          <a:noFill/>
+        </p:spPr>
+        <p:txBody>
+          <a:bodyPr wrap="square" anchor="t">
+            <a:spAutoFit/>
+          </a:bodyPr>
+          <a:lstStyle/>
+          <a:p>
+            <a:pPr algn="l">
+              <a:lnSpc>
+                <a:spcPct val="105000"/>
+              </a:lnSpc>
+            </a:pPr>
+            <a:r>
+              <a:rPr sz="1600" b="1">
+                <a:solidFill>
+                  <a:srgbClr val="4B4B4B"/>
+                </a:solidFill>
+                <a:latin typeface="Helvetica Neue"/>
+              </a:rPr>
+              <a:t>Contrato de datos de 30 campos: 21 ya existen en WIN.</a:t>
+            </a:r>
+          </a:p>
+        </p:txBody>
+      </p:sp>
+      <p:sp>
+        <p:nvSpPr>
+          <p:cNvPr id="13" name="Rounded Rectangle 12"/>
           <p:cNvSpPr/>
           <p:nvPr/>
         </p:nvSpPr>
         <p:spPr>
           <a:xfrm>
-            <a:off x="822960" y="2011680"/>
-            <a:ext cx="3337560" cy="3291840"/>
-          </a:xfrm>
-          <a:prstGeom prst="rect">
+            <a:off x="8503920" y="1097280"/>
+            <a:ext cx="3200400" cy="4069080"/>
+          </a:xfrm>
+          <a:prstGeom prst="roundRect">
             <a:avLst/>
           </a:prstGeom>
           <a:solidFill>
-            <a:srgbClr val="FFFFFF"/>
+            <a:srgbClr val="FFF3ED"/>
           </a:solidFill>
-          <a:ln w="12700">
+          <a:ln w="19050">
             <a:solidFill>
-              <a:srgbClr val="DEDBD9"/>
+              <a:srgbClr val="FF5A0A"/>
             </a:solidFill>
           </a:ln>
           <a:effectLst/>
@@ -8205,60 +7873,40 @@
           </a:p>
         </p:txBody>
       </p:sp>
-      <p:sp>
-        <p:nvSpPr>
-          <p:cNvPr id="8" name="Rectangle 7"/>
-          <p:cNvSpPr/>
-          <p:nvPr/>
-        </p:nvSpPr>
-        <p:spPr>
-          <a:xfrm>
-            <a:off x="822960" y="2011680"/>
-            <a:ext cx="3337560" cy="73152"/>
-          </a:xfrm>
-          <a:prstGeom prst="rect">
-            <a:avLst/>
-          </a:prstGeom>
-          <a:solidFill>
-            <a:srgbClr val="FF5A0A"/>
-          </a:solidFill>
-          <a:ln>
-            <a:noFill/>
-          </a:ln>
-          <a:effectLst/>
-        </p:spPr>
-        <p:style>
-          <a:lnRef idx="1">
-            <a:schemeClr val="accent1"/>
-          </a:lnRef>
-          <a:fillRef idx="3">
-            <a:schemeClr val="accent1"/>
-          </a:fillRef>
-          <a:effectRef idx="2">
-            <a:schemeClr val="accent1"/>
-          </a:effectRef>
-          <a:fontRef idx="minor">
-            <a:schemeClr val="lt1"/>
-          </a:fontRef>
-        </p:style>
-        <p:txBody>
-          <a:bodyPr rtlCol="0" anchor="ctr"/>
-          <a:lstStyle/>
-          <a:p>
-            <a:pPr algn="ctr"/>
-          </a:p>
-        </p:txBody>
-      </p:sp>
-      <p:sp>
-        <p:nvSpPr>
-          <p:cNvPr id="9" name="TextBox 8"/>
+      <p:pic>
+        <p:nvPicPr>
+          <p:cNvPr id="14" name="Picture 13" descr="WIN-Reto03-QR-demo.png"/>
+          <p:cNvPicPr>
+            <a:picLocks noChangeAspect="1"/>
+          </p:cNvPicPr>
+          <p:nvPr/>
+        </p:nvPicPr>
+        <p:blipFill>
+          <a:blip r:embed="rId3"/>
+          <a:stretch>
+            <a:fillRect/>
+          </a:stretch>
+        </p:blipFill>
+        <p:spPr>
+          <a:xfrm>
+            <a:off x="8686800" y="1280160"/>
+            <a:ext cx="2834640" cy="2834640"/>
+          </a:xfrm>
+          <a:prstGeom prst="rect">
+            <a:avLst/>
+          </a:prstGeom>
+        </p:spPr>
+      </p:pic>
+      <p:sp>
+        <p:nvSpPr>
+          <p:cNvPr id="15" name="TextBox 14"/>
           <p:cNvSpPr txBox="1"/>
           <p:nvPr/>
         </p:nvSpPr>
         <p:spPr>
           <a:xfrm>
-            <a:off x="1005840" y="2240280"/>
-            <a:ext cx="3017520" cy="457200"/>
+            <a:off x="8503920" y="4160520"/>
+            <a:ext cx="3200400" cy="411480"/>
           </a:xfrm>
           <a:prstGeom prst="rect">
             <a:avLst/>
@@ -8266,38 +7914,38 @@
           <a:noFill/>
         </p:spPr>
         <p:txBody>
-          <a:bodyPr wrap="square" anchor="t" lIns="45720" rIns="45720" tIns="27432" bIns="27432">
+          <a:bodyPr wrap="square" anchor="t">
             <a:spAutoFit/>
           </a:bodyPr>
           <a:lstStyle/>
           <a:p>
-            <a:pPr algn="l">
+            <a:pPr algn="ctr">
               <a:lnSpc>
                 <a:spcPct val="105000"/>
               </a:lnSpc>
             </a:pPr>
             <a:r>
-              <a:rPr sz="1200" b="1">
+              <a:rPr sz="1800" b="1">
                 <a:solidFill>
                   <a:srgbClr val="C83D08"/>
                 </a:solidFill>
                 <a:latin typeface="Helvetica Neue"/>
               </a:rPr>
-              <a:t>MOTOR</a:t>
-            </a:r>
-          </a:p>
-        </p:txBody>
-      </p:sp>
-      <p:sp>
-        <p:nvSpPr>
-          <p:cNvPr id="10" name="TextBox 9"/>
+              <a:t>Pruébalo ahora</a:t>
+            </a:r>
+          </a:p>
+        </p:txBody>
+      </p:sp>
+      <p:sp>
+        <p:nvSpPr>
+          <p:cNvPr id="16" name="TextBox 15"/>
           <p:cNvSpPr txBox="1"/>
           <p:nvPr/>
         </p:nvSpPr>
         <p:spPr>
           <a:xfrm>
-            <a:off x="1005840" y="2651760"/>
-            <a:ext cx="3017520" cy="914400"/>
+            <a:off x="8503920" y="4572000"/>
+            <a:ext cx="3200400" cy="548640"/>
           </a:xfrm>
           <a:prstGeom prst="rect">
             <a:avLst/>
@@ -8305,516 +7953,24 @@
           <a:noFill/>
         </p:spPr>
         <p:txBody>
-          <a:bodyPr wrap="square" anchor="t" lIns="45720" rIns="45720" tIns="27432" bIns="27432">
+          <a:bodyPr wrap="square" anchor="t">
             <a:spAutoFit/>
           </a:bodyPr>
           <a:lstStyle/>
           <a:p>
-            <a:pPr algn="l">
+            <a:pPr algn="ctr">
               <a:lnSpc>
                 <a:spcPct val="105000"/>
               </a:lnSpc>
             </a:pPr>
             <a:r>
-              <a:rPr sz="2000" b="1">
-                <a:solidFill>
-                  <a:srgbClr val="301D19"/>
-                </a:solidFill>
-                <a:latin typeface="Helvetica Neue"/>
-              </a:rPr>
-              <a:t>Roger Zavaleta Marcelo</a:t>
-            </a:r>
-          </a:p>
-        </p:txBody>
-      </p:sp>
-      <p:sp>
-        <p:nvSpPr>
-          <p:cNvPr id="11" name="TextBox 10"/>
-          <p:cNvSpPr txBox="1"/>
-          <p:nvPr/>
-        </p:nvSpPr>
-        <p:spPr>
-          <a:xfrm>
-            <a:off x="1005840" y="3611880"/>
-            <a:ext cx="3017520" cy="1554480"/>
-          </a:xfrm>
-          <a:prstGeom prst="rect">
-            <a:avLst/>
-          </a:prstGeom>
-          <a:noFill/>
-        </p:spPr>
-        <p:txBody>
-          <a:bodyPr wrap="square" anchor="t" lIns="45720" rIns="45720" tIns="27432" bIns="27432">
-            <a:spAutoFit/>
-          </a:bodyPr>
-          <a:lstStyle/>
-          <a:p>
-            <a:pPr algn="l">
-              <a:lnSpc>
-                <a:spcPct val="105000"/>
-              </a:lnSpc>
-            </a:pPr>
-            <a:r>
-              <a:rPr sz="1300" b="0">
+              <a:rPr sz="1100" b="0">
                 <a:solidFill>
                   <a:srgbClr val="4B4B4B"/>
                 </a:solidFill>
                 <a:latin typeface="Helvetica Neue"/>
               </a:rPr>
-              <a:t>Las 39 reglas, el costo esperado en soles y el contrafáctico: la parte que decide y se explica.</a:t>
-            </a:r>
-          </a:p>
-        </p:txBody>
-      </p:sp>
-      <p:sp>
-        <p:nvSpPr>
-          <p:cNvPr id="12" name="Rectangle 11"/>
-          <p:cNvSpPr/>
-          <p:nvPr/>
-        </p:nvSpPr>
-        <p:spPr>
-          <a:xfrm>
-            <a:off x="4434840" y="2011680"/>
-            <a:ext cx="3337560" cy="3291840"/>
-          </a:xfrm>
-          <a:prstGeom prst="rect">
-            <a:avLst/>
-          </a:prstGeom>
-          <a:solidFill>
-            <a:srgbClr val="FFFFFF"/>
-          </a:solidFill>
-          <a:ln w="12700">
-            <a:solidFill>
-              <a:srgbClr val="DEDBD9"/>
-            </a:solidFill>
-          </a:ln>
-          <a:effectLst/>
-        </p:spPr>
-        <p:style>
-          <a:lnRef idx="1">
-            <a:schemeClr val="accent1"/>
-          </a:lnRef>
-          <a:fillRef idx="3">
-            <a:schemeClr val="accent1"/>
-          </a:fillRef>
-          <a:effectRef idx="2">
-            <a:schemeClr val="accent1"/>
-          </a:effectRef>
-          <a:fontRef idx="minor">
-            <a:schemeClr val="lt1"/>
-          </a:fontRef>
-        </p:style>
-        <p:txBody>
-          <a:bodyPr rtlCol="0" anchor="ctr"/>
-          <a:lstStyle/>
-          <a:p>
-            <a:pPr algn="ctr"/>
-          </a:p>
-        </p:txBody>
-      </p:sp>
-      <p:sp>
-        <p:nvSpPr>
-          <p:cNvPr id="13" name="Rectangle 12"/>
-          <p:cNvSpPr/>
-          <p:nvPr/>
-        </p:nvSpPr>
-        <p:spPr>
-          <a:xfrm>
-            <a:off x="4434840" y="2011680"/>
-            <a:ext cx="3337560" cy="73152"/>
-          </a:xfrm>
-          <a:prstGeom prst="rect">
-            <a:avLst/>
-          </a:prstGeom>
-          <a:solidFill>
-            <a:srgbClr val="FF5A0A"/>
-          </a:solidFill>
-          <a:ln>
-            <a:noFill/>
-          </a:ln>
-          <a:effectLst/>
-        </p:spPr>
-        <p:style>
-          <a:lnRef idx="1">
-            <a:schemeClr val="accent1"/>
-          </a:lnRef>
-          <a:fillRef idx="3">
-            <a:schemeClr val="accent1"/>
-          </a:fillRef>
-          <a:effectRef idx="2">
-            <a:schemeClr val="accent1"/>
-          </a:effectRef>
-          <a:fontRef idx="minor">
-            <a:schemeClr val="lt1"/>
-          </a:fontRef>
-        </p:style>
-        <p:txBody>
-          <a:bodyPr rtlCol="0" anchor="ctr"/>
-          <a:lstStyle/>
-          <a:p>
-            <a:pPr algn="ctr"/>
-          </a:p>
-        </p:txBody>
-      </p:sp>
-      <p:sp>
-        <p:nvSpPr>
-          <p:cNvPr id="14" name="TextBox 13"/>
-          <p:cNvSpPr txBox="1"/>
-          <p:nvPr/>
-        </p:nvSpPr>
-        <p:spPr>
-          <a:xfrm>
-            <a:off x="4617720" y="2240280"/>
-            <a:ext cx="3017520" cy="457200"/>
-          </a:xfrm>
-          <a:prstGeom prst="rect">
-            <a:avLst/>
-          </a:prstGeom>
-          <a:noFill/>
-        </p:spPr>
-        <p:txBody>
-          <a:bodyPr wrap="square" anchor="t" lIns="45720" rIns="45720" tIns="27432" bIns="27432">
-            <a:spAutoFit/>
-          </a:bodyPr>
-          <a:lstStyle/>
-          <a:p>
-            <a:pPr algn="l">
-              <a:lnSpc>
-                <a:spcPct val="105000"/>
-              </a:lnSpc>
-            </a:pPr>
-            <a:r>
-              <a:rPr sz="1200" b="1">
-                <a:solidFill>
-                  <a:srgbClr val="C83D08"/>
-                </a:solidFill>
-                <a:latin typeface="Helvetica Neue"/>
-              </a:rPr>
-              <a:t>SUPERFICIE</a:t>
-            </a:r>
-          </a:p>
-        </p:txBody>
-      </p:sp>
-      <p:sp>
-        <p:nvSpPr>
-          <p:cNvPr id="15" name="TextBox 14"/>
-          <p:cNvSpPr txBox="1"/>
-          <p:nvPr/>
-        </p:nvSpPr>
-        <p:spPr>
-          <a:xfrm>
-            <a:off x="4617720" y="2651760"/>
-            <a:ext cx="3017520" cy="914400"/>
-          </a:xfrm>
-          <a:prstGeom prst="rect">
-            <a:avLst/>
-          </a:prstGeom>
-          <a:noFill/>
-        </p:spPr>
-        <p:txBody>
-          <a:bodyPr wrap="square" anchor="t" lIns="45720" rIns="45720" tIns="27432" bIns="27432">
-            <a:spAutoFit/>
-          </a:bodyPr>
-          <a:lstStyle/>
-          <a:p>
-            <a:pPr algn="l">
-              <a:lnSpc>
-                <a:spcPct val="105000"/>
-              </a:lnSpc>
-            </a:pPr>
-            <a:r>
-              <a:rPr sz="2000" b="1">
-                <a:solidFill>
-                  <a:srgbClr val="301D19"/>
-                </a:solidFill>
-                <a:latin typeface="Helvetica Neue"/>
-              </a:rPr>
-              <a:t>Abraham Vidaurre Serpa</a:t>
-            </a:r>
-          </a:p>
-        </p:txBody>
-      </p:sp>
-      <p:sp>
-        <p:nvSpPr>
-          <p:cNvPr id="16" name="TextBox 15"/>
-          <p:cNvSpPr txBox="1"/>
-          <p:nvPr/>
-        </p:nvSpPr>
-        <p:spPr>
-          <a:xfrm>
-            <a:off x="4617720" y="3611880"/>
-            <a:ext cx="3017520" cy="1554480"/>
-          </a:xfrm>
-          <a:prstGeom prst="rect">
-            <a:avLst/>
-          </a:prstGeom>
-          <a:noFill/>
-        </p:spPr>
-        <p:txBody>
-          <a:bodyPr wrap="square" anchor="t" lIns="45720" rIns="45720" tIns="27432" bIns="27432">
-            <a:spAutoFit/>
-          </a:bodyPr>
-          <a:lstStyle/>
-          <a:p>
-            <a:pPr algn="l">
-              <a:lnSpc>
-                <a:spcPct val="105000"/>
-              </a:lnSpc>
-            </a:pPr>
-            <a:r>
-              <a:rPr sz="1300" b="0">
-                <a:solidFill>
-                  <a:srgbClr val="4B4B4B"/>
-                </a:solidFill>
-                <a:latin typeface="Helvetica Neue"/>
-              </a:rPr>
-              <a:t>La interfaz móvil primero que usa el jurado y el enlace que ve el cliente: la parte que se entiende.</a:t>
-            </a:r>
-          </a:p>
-        </p:txBody>
-      </p:sp>
-      <p:sp>
-        <p:nvSpPr>
-          <p:cNvPr id="17" name="Rectangle 16"/>
-          <p:cNvSpPr/>
-          <p:nvPr/>
-        </p:nvSpPr>
-        <p:spPr>
-          <a:xfrm>
-            <a:off x="8046720" y="2011680"/>
-            <a:ext cx="3337560" cy="3291840"/>
-          </a:xfrm>
-          <a:prstGeom prst="rect">
-            <a:avLst/>
-          </a:prstGeom>
-          <a:solidFill>
-            <a:srgbClr val="FFFFFF"/>
-          </a:solidFill>
-          <a:ln w="12700">
-            <a:solidFill>
-              <a:srgbClr val="DEDBD9"/>
-            </a:solidFill>
-          </a:ln>
-          <a:effectLst/>
-        </p:spPr>
-        <p:style>
-          <a:lnRef idx="1">
-            <a:schemeClr val="accent1"/>
-          </a:lnRef>
-          <a:fillRef idx="3">
-            <a:schemeClr val="accent1"/>
-          </a:fillRef>
-          <a:effectRef idx="2">
-            <a:schemeClr val="accent1"/>
-          </a:effectRef>
-          <a:fontRef idx="minor">
-            <a:schemeClr val="lt1"/>
-          </a:fontRef>
-        </p:style>
-        <p:txBody>
-          <a:bodyPr rtlCol="0" anchor="ctr"/>
-          <a:lstStyle/>
-          <a:p>
-            <a:pPr algn="ctr"/>
-          </a:p>
-        </p:txBody>
-      </p:sp>
-      <p:sp>
-        <p:nvSpPr>
-          <p:cNvPr id="18" name="Rectangle 17"/>
-          <p:cNvSpPr/>
-          <p:nvPr/>
-        </p:nvSpPr>
-        <p:spPr>
-          <a:xfrm>
-            <a:off x="8046720" y="2011680"/>
-            <a:ext cx="3337560" cy="73152"/>
-          </a:xfrm>
-          <a:prstGeom prst="rect">
-            <a:avLst/>
-          </a:prstGeom>
-          <a:solidFill>
-            <a:srgbClr val="FF5A0A"/>
-          </a:solidFill>
-          <a:ln>
-            <a:noFill/>
-          </a:ln>
-          <a:effectLst/>
-        </p:spPr>
-        <p:style>
-          <a:lnRef idx="1">
-            <a:schemeClr val="accent1"/>
-          </a:lnRef>
-          <a:fillRef idx="3">
-            <a:schemeClr val="accent1"/>
-          </a:fillRef>
-          <a:effectRef idx="2">
-            <a:schemeClr val="accent1"/>
-          </a:effectRef>
-          <a:fontRef idx="minor">
-            <a:schemeClr val="lt1"/>
-          </a:fontRef>
-        </p:style>
-        <p:txBody>
-          <a:bodyPr rtlCol="0" anchor="ctr"/>
-          <a:lstStyle/>
-          <a:p>
-            <a:pPr algn="ctr"/>
-          </a:p>
-        </p:txBody>
-      </p:sp>
-      <p:sp>
-        <p:nvSpPr>
-          <p:cNvPr id="19" name="TextBox 18"/>
-          <p:cNvSpPr txBox="1"/>
-          <p:nvPr/>
-        </p:nvSpPr>
-        <p:spPr>
-          <a:xfrm>
-            <a:off x="8229600" y="2240280"/>
-            <a:ext cx="3017520" cy="457200"/>
-          </a:xfrm>
-          <a:prstGeom prst="rect">
-            <a:avLst/>
-          </a:prstGeom>
-          <a:noFill/>
-        </p:spPr>
-        <p:txBody>
-          <a:bodyPr wrap="square" anchor="t" lIns="45720" rIns="45720" tIns="27432" bIns="27432">
-            <a:spAutoFit/>
-          </a:bodyPr>
-          <a:lstStyle/>
-          <a:p>
-            <a:pPr algn="l">
-              <a:lnSpc>
-                <a:spcPct val="105000"/>
-              </a:lnSpc>
-            </a:pPr>
-            <a:r>
-              <a:rPr sz="1200" b="1">
-                <a:solidFill>
-                  <a:srgbClr val="C83D08"/>
-                </a:solidFill>
-                <a:latin typeface="Helvetica Neue"/>
-              </a:rPr>
-              <a:t>CIRCUITO</a:t>
-            </a:r>
-          </a:p>
-        </p:txBody>
-      </p:sp>
-      <p:sp>
-        <p:nvSpPr>
-          <p:cNvPr id="20" name="TextBox 19"/>
-          <p:cNvSpPr txBox="1"/>
-          <p:nvPr/>
-        </p:nvSpPr>
-        <p:spPr>
-          <a:xfrm>
-            <a:off x="8229600" y="2651760"/>
-            <a:ext cx="3017520" cy="914400"/>
-          </a:xfrm>
-          <a:prstGeom prst="rect">
-            <a:avLst/>
-          </a:prstGeom>
-          <a:noFill/>
-        </p:spPr>
-        <p:txBody>
-          <a:bodyPr wrap="square" anchor="t" lIns="45720" rIns="45720" tIns="27432" bIns="27432">
-            <a:spAutoFit/>
-          </a:bodyPr>
-          <a:lstStyle/>
-          <a:p>
-            <a:pPr algn="l">
-              <a:lnSpc>
-                <a:spcPct val="105000"/>
-              </a:lnSpc>
-            </a:pPr>
-            <a:r>
-              <a:rPr sz="2000" b="1">
-                <a:solidFill>
-                  <a:srgbClr val="301D19"/>
-                </a:solidFill>
-                <a:latin typeface="Helvetica Neue"/>
-              </a:rPr>
-              <a:t>Jonatan Ching Ayacila</a:t>
-            </a:r>
-          </a:p>
-        </p:txBody>
-      </p:sp>
-      <p:sp>
-        <p:nvSpPr>
-          <p:cNvPr id="21" name="TextBox 20"/>
-          <p:cNvSpPr txBox="1"/>
-          <p:nvPr/>
-        </p:nvSpPr>
-        <p:spPr>
-          <a:xfrm>
-            <a:off x="8229600" y="3611880"/>
-            <a:ext cx="3017520" cy="1554480"/>
-          </a:xfrm>
-          <a:prstGeom prst="rect">
-            <a:avLst/>
-          </a:prstGeom>
-          <a:noFill/>
-        </p:spPr>
-        <p:txBody>
-          <a:bodyPr wrap="square" anchor="t" lIns="45720" rIns="45720" tIns="27432" bIns="27432">
-            <a:spAutoFit/>
-          </a:bodyPr>
-          <a:lstStyle/>
-          <a:p>
-            <a:pPr algn="l">
-              <a:lnSpc>
-                <a:spcPct val="105000"/>
-              </a:lnSpc>
-            </a:pPr>
-            <a:r>
-              <a:rPr sz="1300" b="0">
-                <a:solidFill>
-                  <a:srgbClr val="4B4B4B"/>
-                </a:solidFill>
-                <a:latin typeface="Helvetica Neue"/>
-              </a:rPr>
-              <a:t>La confirmación del cliente, la evidencia pública y el contrato de datos: la parte que cierra el arco con WIN.</a:t>
-            </a:r>
-          </a:p>
-        </p:txBody>
-      </p:sp>
-      <p:sp>
-        <p:nvSpPr>
-          <p:cNvPr id="22" name="TextBox 21"/>
-          <p:cNvSpPr txBox="1"/>
-          <p:nvPr/>
-        </p:nvSpPr>
-        <p:spPr>
-          <a:xfrm>
-            <a:off x="822960" y="5669280"/>
-            <a:ext cx="10515600" cy="731520"/>
-          </a:xfrm>
-          <a:prstGeom prst="rect">
-            <a:avLst/>
-          </a:prstGeom>
-          <a:noFill/>
-        </p:spPr>
-        <p:txBody>
-          <a:bodyPr wrap="square" anchor="t" lIns="45720" rIns="45720" tIns="27432" bIns="27432">
-            <a:spAutoFit/>
-          </a:bodyPr>
-          <a:lstStyle/>
-          <a:p>
-            <a:pPr algn="l">
-              <a:lnSpc>
-                <a:spcPct val="105000"/>
-              </a:lnSpc>
-            </a:pPr>
-            <a:r>
-              <a:rPr sz="1300" b="0">
-                <a:solidFill>
-                  <a:srgbClr val="4B4B4B"/>
-                </a:solidFill>
-                <a:latin typeface="Helvetica Neue"/>
-              </a:rPr>
-              <a:t>Hackatón WIN Chiclayo 2026 · Reto 03 · Calidad de venta</a:t>
+              <a:t>Sin instalar nada · toca «Visit Site»</a:t>
             </a:r>
           </a:p>
         </p:txBody>
@@ -8828,6 +7984,682 @@
 </file>
 
 <file path=ppt/slides/slide7.xml><?xml version="1.0" encoding="utf-8"?>
+<p:sld xmlns:a="http://schemas.openxmlformats.org/drawingml/2006/main" xmlns:p="http://schemas.openxmlformats.org/presentationml/2006/main" xmlns:r="http://schemas.openxmlformats.org/officeDocument/2006/relationships">
+  <p:cSld>
+    <p:bg>
+      <p:bgPr>
+        <a:solidFill>
+          <a:srgbClr val="FFFFFF"/>
+        </a:solidFill>
+        <a:effectLst/>
+      </p:bgPr>
+    </p:bg>
+    <p:spTree>
+      <p:nvGrpSpPr>
+        <p:cNvPr id="1" name=""/>
+        <p:cNvGrpSpPr/>
+        <p:nvPr/>
+      </p:nvGrpSpPr>
+      <p:grpSpPr/>
+      <p:sp>
+        <p:nvSpPr>
+          <p:cNvPr id="2" name="Rectangle 1"/>
+          <p:cNvSpPr/>
+          <p:nvPr/>
+        </p:nvSpPr>
+        <p:spPr>
+          <a:xfrm>
+            <a:off x="0" y="0"/>
+            <a:ext cx="12191695" cy="82296"/>
+          </a:xfrm>
+          <a:prstGeom prst="rect">
+            <a:avLst/>
+          </a:prstGeom>
+          <a:solidFill>
+            <a:srgbClr val="FF5A0A"/>
+          </a:solidFill>
+          <a:ln>
+            <a:noFill/>
+          </a:ln>
+          <a:effectLst/>
+        </p:spPr>
+        <p:style>
+          <a:lnRef idx="1">
+            <a:schemeClr val="accent1"/>
+          </a:lnRef>
+          <a:fillRef idx="3">
+            <a:schemeClr val="accent1"/>
+          </a:fillRef>
+          <a:effectRef idx="2">
+            <a:schemeClr val="accent1"/>
+          </a:effectRef>
+          <a:fontRef idx="minor">
+            <a:schemeClr val="lt1"/>
+          </a:fontRef>
+        </p:style>
+        <p:txBody>
+          <a:bodyPr rtlCol="0" anchor="ctr"/>
+          <a:lstStyle/>
+          <a:p>
+            <a:pPr algn="ctr"/>
+          </a:p>
+        </p:txBody>
+      </p:sp>
+      <p:pic>
+        <p:nvPicPr>
+          <p:cNvPr id="3" name="Picture 2" descr="win-logo.png"/>
+          <p:cNvPicPr>
+            <a:picLocks noChangeAspect="1"/>
+          </p:cNvPicPr>
+          <p:nvPr/>
+        </p:nvPicPr>
+        <p:blipFill>
+          <a:blip r:embed="rId2"/>
+          <a:stretch>
+            <a:fillRect/>
+          </a:stretch>
+        </p:blipFill>
+        <p:spPr>
+          <a:xfrm>
+            <a:off x="411480" y="292608"/>
+            <a:ext cx="919929" cy="384048"/>
+          </a:xfrm>
+          <a:prstGeom prst="rect">
+            <a:avLst/>
+          </a:prstGeom>
+        </p:spPr>
+      </p:pic>
+      <p:sp>
+        <p:nvSpPr>
+          <p:cNvPr id="4" name="TextBox 3"/>
+          <p:cNvSpPr txBox="1"/>
+          <p:nvPr/>
+        </p:nvSpPr>
+        <p:spPr>
+          <a:xfrm>
+            <a:off x="8503920" y="274320"/>
+            <a:ext cx="3291840" cy="411480"/>
+          </a:xfrm>
+          <a:prstGeom prst="rect">
+            <a:avLst/>
+          </a:prstGeom>
+          <a:noFill/>
+        </p:spPr>
+        <p:txBody>
+          <a:bodyPr wrap="square" anchor="ctr">
+            <a:spAutoFit/>
+          </a:bodyPr>
+          <a:lstStyle/>
+          <a:p>
+            <a:pPr algn="r">
+              <a:lnSpc>
+                <a:spcPct val="105000"/>
+              </a:lnSpc>
+            </a:pPr>
+            <a:r>
+              <a:rPr sz="1200" b="1">
+                <a:solidFill>
+                  <a:srgbClr val="C83D08"/>
+                </a:solidFill>
+                <a:latin typeface="Helvetica Neue"/>
+              </a:rPr>
+              <a:t>7 / 7 · Equipo</a:t>
+            </a:r>
+          </a:p>
+        </p:txBody>
+      </p:sp>
+      <p:sp>
+        <p:nvSpPr>
+          <p:cNvPr id="5" name="TextBox 4"/>
+          <p:cNvSpPr txBox="1"/>
+          <p:nvPr/>
+        </p:nvSpPr>
+        <p:spPr>
+          <a:xfrm>
+            <a:off x="822960" y="914400"/>
+            <a:ext cx="10515600" cy="822960"/>
+          </a:xfrm>
+          <a:prstGeom prst="rect">
+            <a:avLst/>
+          </a:prstGeom>
+          <a:noFill/>
+        </p:spPr>
+        <p:txBody>
+          <a:bodyPr wrap="square" anchor="t">
+            <a:spAutoFit/>
+          </a:bodyPr>
+          <a:lstStyle/>
+          <a:p>
+            <a:pPr algn="l">
+              <a:lnSpc>
+                <a:spcPct val="105000"/>
+              </a:lnSpc>
+            </a:pPr>
+            <a:r>
+              <a:rPr sz="3400" b="1">
+                <a:solidFill>
+                  <a:srgbClr val="301D19"/>
+                </a:solidFill>
+                <a:latin typeface="Helvetica Neue"/>
+              </a:rPr>
+              <a:t>Tres mitades del mismo problema</a:t>
+            </a:r>
+          </a:p>
+        </p:txBody>
+      </p:sp>
+      <p:sp>
+        <p:nvSpPr>
+          <p:cNvPr id="6" name="Rectangle 5"/>
+          <p:cNvSpPr/>
+          <p:nvPr/>
+        </p:nvSpPr>
+        <p:spPr>
+          <a:xfrm>
+            <a:off x="822960" y="2194560"/>
+            <a:ext cx="3337560" cy="2926080"/>
+          </a:xfrm>
+          <a:prstGeom prst="rect">
+            <a:avLst/>
+          </a:prstGeom>
+          <a:solidFill>
+            <a:srgbClr val="F6F6F6"/>
+          </a:solidFill>
+          <a:ln w="19050">
+            <a:solidFill>
+              <a:srgbClr val="DEDBD9"/>
+            </a:solidFill>
+          </a:ln>
+          <a:effectLst/>
+        </p:spPr>
+        <p:style>
+          <a:lnRef idx="1">
+            <a:schemeClr val="accent1"/>
+          </a:lnRef>
+          <a:fillRef idx="3">
+            <a:schemeClr val="accent1"/>
+          </a:fillRef>
+          <a:effectRef idx="2">
+            <a:schemeClr val="accent1"/>
+          </a:effectRef>
+          <a:fontRef idx="minor">
+            <a:schemeClr val="lt1"/>
+          </a:fontRef>
+        </p:style>
+        <p:txBody>
+          <a:bodyPr rtlCol="0" anchor="ctr"/>
+          <a:lstStyle/>
+          <a:p>
+            <a:pPr algn="ctr"/>
+          </a:p>
+        </p:txBody>
+      </p:sp>
+      <p:sp>
+        <p:nvSpPr>
+          <p:cNvPr id="7" name="Rectangle 6"/>
+          <p:cNvSpPr/>
+          <p:nvPr/>
+        </p:nvSpPr>
+        <p:spPr>
+          <a:xfrm>
+            <a:off x="822960" y="2194560"/>
+            <a:ext cx="3337560" cy="91440"/>
+          </a:xfrm>
+          <a:prstGeom prst="rect">
+            <a:avLst/>
+          </a:prstGeom>
+          <a:solidFill>
+            <a:srgbClr val="FF5A0A"/>
+          </a:solidFill>
+          <a:ln>
+            <a:noFill/>
+          </a:ln>
+          <a:effectLst/>
+        </p:spPr>
+        <p:style>
+          <a:lnRef idx="1">
+            <a:schemeClr val="accent1"/>
+          </a:lnRef>
+          <a:fillRef idx="3">
+            <a:schemeClr val="accent1"/>
+          </a:fillRef>
+          <a:effectRef idx="2">
+            <a:schemeClr val="accent1"/>
+          </a:effectRef>
+          <a:fontRef idx="minor">
+            <a:schemeClr val="lt1"/>
+          </a:fontRef>
+        </p:style>
+        <p:txBody>
+          <a:bodyPr rtlCol="0" anchor="ctr"/>
+          <a:lstStyle/>
+          <a:p>
+            <a:pPr algn="ctr"/>
+          </a:p>
+        </p:txBody>
+      </p:sp>
+      <p:sp>
+        <p:nvSpPr>
+          <p:cNvPr id="8" name="TextBox 7"/>
+          <p:cNvSpPr txBox="1"/>
+          <p:nvPr/>
+        </p:nvSpPr>
+        <p:spPr>
+          <a:xfrm>
+            <a:off x="1005840" y="2560320"/>
+            <a:ext cx="3017520" cy="1097280"/>
+          </a:xfrm>
+          <a:prstGeom prst="rect">
+            <a:avLst/>
+          </a:prstGeom>
+          <a:noFill/>
+        </p:spPr>
+        <p:txBody>
+          <a:bodyPr wrap="square" anchor="ctr">
+            <a:spAutoFit/>
+          </a:bodyPr>
+          <a:lstStyle/>
+          <a:p>
+            <a:pPr algn="ctr">
+              <a:lnSpc>
+                <a:spcPct val="105000"/>
+              </a:lnSpc>
+            </a:pPr>
+            <a:r>
+              <a:rPr sz="2400" b="1">
+                <a:solidFill>
+                  <a:srgbClr val="301D19"/>
+                </a:solidFill>
+                <a:latin typeface="Helvetica Neue"/>
+              </a:rPr>
+              <a:t>Roger Zavaleta</a:t>
+            </a:r>
+          </a:p>
+        </p:txBody>
+      </p:sp>
+      <p:sp>
+        <p:nvSpPr>
+          <p:cNvPr id="9" name="TextBox 8"/>
+          <p:cNvSpPr txBox="1"/>
+          <p:nvPr/>
+        </p:nvSpPr>
+        <p:spPr>
+          <a:xfrm>
+            <a:off x="1005840" y="3749039"/>
+            <a:ext cx="3017520" cy="1188720"/>
+          </a:xfrm>
+          <a:prstGeom prst="rect">
+            <a:avLst/>
+          </a:prstGeom>
+          <a:noFill/>
+        </p:spPr>
+        <p:txBody>
+          <a:bodyPr wrap="square" anchor="t">
+            <a:spAutoFit/>
+          </a:bodyPr>
+          <a:lstStyle/>
+          <a:p>
+            <a:pPr algn="ctr">
+              <a:lnSpc>
+                <a:spcPct val="105000"/>
+              </a:lnSpc>
+            </a:pPr>
+            <a:r>
+              <a:rPr sz="1600" b="0">
+                <a:solidFill>
+                  <a:srgbClr val="4B4B4B"/>
+                </a:solidFill>
+                <a:latin typeface="Helvetica Neue"/>
+              </a:rPr>
+              <a:t>Motor: las reglas y el costo</a:t>
+            </a:r>
+          </a:p>
+        </p:txBody>
+      </p:sp>
+      <p:sp>
+        <p:nvSpPr>
+          <p:cNvPr id="10" name="Rectangle 9"/>
+          <p:cNvSpPr/>
+          <p:nvPr/>
+        </p:nvSpPr>
+        <p:spPr>
+          <a:xfrm>
+            <a:off x="4434840" y="2194560"/>
+            <a:ext cx="3337560" cy="2926080"/>
+          </a:xfrm>
+          <a:prstGeom prst="rect">
+            <a:avLst/>
+          </a:prstGeom>
+          <a:solidFill>
+            <a:srgbClr val="F6F6F6"/>
+          </a:solidFill>
+          <a:ln w="19050">
+            <a:solidFill>
+              <a:srgbClr val="DEDBD9"/>
+            </a:solidFill>
+          </a:ln>
+          <a:effectLst/>
+        </p:spPr>
+        <p:style>
+          <a:lnRef idx="1">
+            <a:schemeClr val="accent1"/>
+          </a:lnRef>
+          <a:fillRef idx="3">
+            <a:schemeClr val="accent1"/>
+          </a:fillRef>
+          <a:effectRef idx="2">
+            <a:schemeClr val="accent1"/>
+          </a:effectRef>
+          <a:fontRef idx="minor">
+            <a:schemeClr val="lt1"/>
+          </a:fontRef>
+        </p:style>
+        <p:txBody>
+          <a:bodyPr rtlCol="0" anchor="ctr"/>
+          <a:lstStyle/>
+          <a:p>
+            <a:pPr algn="ctr"/>
+          </a:p>
+        </p:txBody>
+      </p:sp>
+      <p:sp>
+        <p:nvSpPr>
+          <p:cNvPr id="11" name="Rectangle 10"/>
+          <p:cNvSpPr/>
+          <p:nvPr/>
+        </p:nvSpPr>
+        <p:spPr>
+          <a:xfrm>
+            <a:off x="4434840" y="2194560"/>
+            <a:ext cx="3337560" cy="91440"/>
+          </a:xfrm>
+          <a:prstGeom prst="rect">
+            <a:avLst/>
+          </a:prstGeom>
+          <a:solidFill>
+            <a:srgbClr val="FF5A0A"/>
+          </a:solidFill>
+          <a:ln>
+            <a:noFill/>
+          </a:ln>
+          <a:effectLst/>
+        </p:spPr>
+        <p:style>
+          <a:lnRef idx="1">
+            <a:schemeClr val="accent1"/>
+          </a:lnRef>
+          <a:fillRef idx="3">
+            <a:schemeClr val="accent1"/>
+          </a:fillRef>
+          <a:effectRef idx="2">
+            <a:schemeClr val="accent1"/>
+          </a:effectRef>
+          <a:fontRef idx="minor">
+            <a:schemeClr val="lt1"/>
+          </a:fontRef>
+        </p:style>
+        <p:txBody>
+          <a:bodyPr rtlCol="0" anchor="ctr"/>
+          <a:lstStyle/>
+          <a:p>
+            <a:pPr algn="ctr"/>
+          </a:p>
+        </p:txBody>
+      </p:sp>
+      <p:sp>
+        <p:nvSpPr>
+          <p:cNvPr id="12" name="TextBox 11"/>
+          <p:cNvSpPr txBox="1"/>
+          <p:nvPr/>
+        </p:nvSpPr>
+        <p:spPr>
+          <a:xfrm>
+            <a:off x="4617720" y="2560320"/>
+            <a:ext cx="3017520" cy="1097280"/>
+          </a:xfrm>
+          <a:prstGeom prst="rect">
+            <a:avLst/>
+          </a:prstGeom>
+          <a:noFill/>
+        </p:spPr>
+        <p:txBody>
+          <a:bodyPr wrap="square" anchor="ctr">
+            <a:spAutoFit/>
+          </a:bodyPr>
+          <a:lstStyle/>
+          <a:p>
+            <a:pPr algn="ctr">
+              <a:lnSpc>
+                <a:spcPct val="105000"/>
+              </a:lnSpc>
+            </a:pPr>
+            <a:r>
+              <a:rPr sz="2400" b="1">
+                <a:solidFill>
+                  <a:srgbClr val="301D19"/>
+                </a:solidFill>
+                <a:latin typeface="Helvetica Neue"/>
+              </a:rPr>
+              <a:t>Abraham Vidaurre</a:t>
+            </a:r>
+          </a:p>
+        </p:txBody>
+      </p:sp>
+      <p:sp>
+        <p:nvSpPr>
+          <p:cNvPr id="13" name="TextBox 12"/>
+          <p:cNvSpPr txBox="1"/>
+          <p:nvPr/>
+        </p:nvSpPr>
+        <p:spPr>
+          <a:xfrm>
+            <a:off x="4617720" y="3749039"/>
+            <a:ext cx="3017520" cy="1188720"/>
+          </a:xfrm>
+          <a:prstGeom prst="rect">
+            <a:avLst/>
+          </a:prstGeom>
+          <a:noFill/>
+        </p:spPr>
+        <p:txBody>
+          <a:bodyPr wrap="square" anchor="t">
+            <a:spAutoFit/>
+          </a:bodyPr>
+          <a:lstStyle/>
+          <a:p>
+            <a:pPr algn="ctr">
+              <a:lnSpc>
+                <a:spcPct val="105000"/>
+              </a:lnSpc>
+            </a:pPr>
+            <a:r>
+              <a:rPr sz="1600" b="0">
+                <a:solidFill>
+                  <a:srgbClr val="4B4B4B"/>
+                </a:solidFill>
+                <a:latin typeface="Helvetica Neue"/>
+              </a:rPr>
+              <a:t>Superficie: la pantalla que explica</a:t>
+            </a:r>
+          </a:p>
+        </p:txBody>
+      </p:sp>
+      <p:sp>
+        <p:nvSpPr>
+          <p:cNvPr id="14" name="Rectangle 13"/>
+          <p:cNvSpPr/>
+          <p:nvPr/>
+        </p:nvSpPr>
+        <p:spPr>
+          <a:xfrm>
+            <a:off x="8046720" y="2194560"/>
+            <a:ext cx="3337560" cy="2926080"/>
+          </a:xfrm>
+          <a:prstGeom prst="rect">
+            <a:avLst/>
+          </a:prstGeom>
+          <a:solidFill>
+            <a:srgbClr val="F6F6F6"/>
+          </a:solidFill>
+          <a:ln w="19050">
+            <a:solidFill>
+              <a:srgbClr val="DEDBD9"/>
+            </a:solidFill>
+          </a:ln>
+          <a:effectLst/>
+        </p:spPr>
+        <p:style>
+          <a:lnRef idx="1">
+            <a:schemeClr val="accent1"/>
+          </a:lnRef>
+          <a:fillRef idx="3">
+            <a:schemeClr val="accent1"/>
+          </a:fillRef>
+          <a:effectRef idx="2">
+            <a:schemeClr val="accent1"/>
+          </a:effectRef>
+          <a:fontRef idx="minor">
+            <a:schemeClr val="lt1"/>
+          </a:fontRef>
+        </p:style>
+        <p:txBody>
+          <a:bodyPr rtlCol="0" anchor="ctr"/>
+          <a:lstStyle/>
+          <a:p>
+            <a:pPr algn="ctr"/>
+          </a:p>
+        </p:txBody>
+      </p:sp>
+      <p:sp>
+        <p:nvSpPr>
+          <p:cNvPr id="15" name="Rectangle 14"/>
+          <p:cNvSpPr/>
+          <p:nvPr/>
+        </p:nvSpPr>
+        <p:spPr>
+          <a:xfrm>
+            <a:off x="8046720" y="2194560"/>
+            <a:ext cx="3337560" cy="91440"/>
+          </a:xfrm>
+          <a:prstGeom prst="rect">
+            <a:avLst/>
+          </a:prstGeom>
+          <a:solidFill>
+            <a:srgbClr val="FF5A0A"/>
+          </a:solidFill>
+          <a:ln>
+            <a:noFill/>
+          </a:ln>
+          <a:effectLst/>
+        </p:spPr>
+        <p:style>
+          <a:lnRef idx="1">
+            <a:schemeClr val="accent1"/>
+          </a:lnRef>
+          <a:fillRef idx="3">
+            <a:schemeClr val="accent1"/>
+          </a:fillRef>
+          <a:effectRef idx="2">
+            <a:schemeClr val="accent1"/>
+          </a:effectRef>
+          <a:fontRef idx="minor">
+            <a:schemeClr val="lt1"/>
+          </a:fontRef>
+        </p:style>
+        <p:txBody>
+          <a:bodyPr rtlCol="0" anchor="ctr"/>
+          <a:lstStyle/>
+          <a:p>
+            <a:pPr algn="ctr"/>
+          </a:p>
+        </p:txBody>
+      </p:sp>
+      <p:sp>
+        <p:nvSpPr>
+          <p:cNvPr id="16" name="TextBox 15"/>
+          <p:cNvSpPr txBox="1"/>
+          <p:nvPr/>
+        </p:nvSpPr>
+        <p:spPr>
+          <a:xfrm>
+            <a:off x="8229600" y="2560320"/>
+            <a:ext cx="3017520" cy="1097280"/>
+          </a:xfrm>
+          <a:prstGeom prst="rect">
+            <a:avLst/>
+          </a:prstGeom>
+          <a:noFill/>
+        </p:spPr>
+        <p:txBody>
+          <a:bodyPr wrap="square" anchor="ctr">
+            <a:spAutoFit/>
+          </a:bodyPr>
+          <a:lstStyle/>
+          <a:p>
+            <a:pPr algn="ctr">
+              <a:lnSpc>
+                <a:spcPct val="105000"/>
+              </a:lnSpc>
+            </a:pPr>
+            <a:r>
+              <a:rPr sz="2400" b="1">
+                <a:solidFill>
+                  <a:srgbClr val="301D19"/>
+                </a:solidFill>
+                <a:latin typeface="Helvetica Neue"/>
+              </a:rPr>
+              <a:t>Jonatan Ching</a:t>
+            </a:r>
+          </a:p>
+        </p:txBody>
+      </p:sp>
+      <p:sp>
+        <p:nvSpPr>
+          <p:cNvPr id="17" name="TextBox 16"/>
+          <p:cNvSpPr txBox="1"/>
+          <p:nvPr/>
+        </p:nvSpPr>
+        <p:spPr>
+          <a:xfrm>
+            <a:off x="8229600" y="3749039"/>
+            <a:ext cx="3017520" cy="1188720"/>
+          </a:xfrm>
+          <a:prstGeom prst="rect">
+            <a:avLst/>
+          </a:prstGeom>
+          <a:noFill/>
+        </p:spPr>
+        <p:txBody>
+          <a:bodyPr wrap="square" anchor="t">
+            <a:spAutoFit/>
+          </a:bodyPr>
+          <a:lstStyle/>
+          <a:p>
+            <a:pPr algn="ctr">
+              <a:lnSpc>
+                <a:spcPct val="105000"/>
+              </a:lnSpc>
+            </a:pPr>
+            <a:r>
+              <a:rPr sz="1600" b="0">
+                <a:solidFill>
+                  <a:srgbClr val="4B4B4B"/>
+                </a:solidFill>
+                <a:latin typeface="Helvetica Neue"/>
+              </a:rPr>
+              <a:t>Circuito: el cliente y el contrato</a:t>
+            </a:r>
+          </a:p>
+        </p:txBody>
+      </p:sp>
+    </p:spTree>
+  </p:cSld>
+  <p:clrMapOvr>
+    <a:masterClrMapping/>
+  </p:clrMapOvr>
+</p:sld>
+</file>
+
+<file path=ppt/slides/slide8.xml><?xml version="1.0" encoding="utf-8"?>
 <p:sld xmlns:a="http://schemas.openxmlformats.org/drawingml/2006/main" xmlns:p="http://schemas.openxmlformats.org/presentationml/2006/main" xmlns:r="http://schemas.openxmlformats.org/officeDocument/2006/relationships">
   <p:cSld>
     <p:bg>
@@ -8921,45 +8753,6 @@
         </p:nvSpPr>
         <p:spPr>
           <a:xfrm>
-            <a:off x="1005840" y="274320"/>
-            <a:ext cx="5486400" cy="411480"/>
-          </a:xfrm>
-          <a:prstGeom prst="rect">
-            <a:avLst/>
-          </a:prstGeom>
-          <a:noFill/>
-        </p:spPr>
-        <p:txBody>
-          <a:bodyPr wrap="square" anchor="ctr" lIns="45720" rIns="45720" tIns="27432" bIns="27432">
-            <a:spAutoFit/>
-          </a:bodyPr>
-          <a:lstStyle/>
-          <a:p>
-            <a:pPr algn="l">
-              <a:lnSpc>
-                <a:spcPct val="105000"/>
-              </a:lnSpc>
-            </a:pPr>
-            <a:r>
-              <a:rPr sz="1200" b="0">
-                <a:solidFill>
-                  <a:srgbClr val="FFFFFF"/>
-                </a:solidFill>
-                <a:latin typeface="Helvetica Neue"/>
-              </a:rPr>
-              <a:t>Reto 03 · Que lo prometido sea lo entregado</a:t>
-            </a:r>
-          </a:p>
-        </p:txBody>
-      </p:sp>
-      <p:sp>
-        <p:nvSpPr>
-          <p:cNvPr id="5" name="TextBox 4"/>
-          <p:cNvSpPr txBox="1"/>
-          <p:nvPr/>
-        </p:nvSpPr>
-        <p:spPr>
-          <a:xfrm>
             <a:off x="8503920" y="274320"/>
             <a:ext cx="3291840" cy="411480"/>
           </a:xfrm>
@@ -8969,7 +8762,7 @@
           <a:noFill/>
         </p:spPr>
         <p:txBody>
-          <a:bodyPr wrap="square" anchor="ctr" lIns="45720" rIns="45720" tIns="27432" bIns="27432">
+          <a:bodyPr wrap="square" anchor="ctr">
             <a:spAutoFit/>
           </a:bodyPr>
           <a:lstStyle/>
@@ -8986,21 +8779,21 @@
                 </a:solidFill>
                 <a:latin typeface="Helvetica Neue"/>
               </a:rPr>
-              <a:t>7 / 7 · Cierre y pedido</a:t>
-            </a:r>
-          </a:p>
-        </p:txBody>
-      </p:sp>
-      <p:sp>
-        <p:nvSpPr>
-          <p:cNvPr id="6" name="TextBox 5"/>
+              <a:t>7 / 7 · Cierre</a:t>
+            </a:r>
+          </a:p>
+        </p:txBody>
+      </p:sp>
+      <p:sp>
+        <p:nvSpPr>
+          <p:cNvPr id="5" name="TextBox 4"/>
           <p:cNvSpPr txBox="1"/>
           <p:nvPr/>
         </p:nvSpPr>
         <p:spPr>
           <a:xfrm>
-            <a:off x="822960" y="914400"/>
-            <a:ext cx="7315200" cy="1645920"/>
+            <a:off x="822960" y="1097280"/>
+            <a:ext cx="7498079" cy="2194560"/>
           </a:xfrm>
           <a:prstGeom prst="rect">
             <a:avLst/>
@@ -9008,7 +8801,7 @@
           <a:noFill/>
         </p:spPr>
         <p:txBody>
-          <a:bodyPr wrap="square" anchor="t" lIns="45720" rIns="45720" tIns="27432" bIns="27432">
+          <a:bodyPr wrap="square" anchor="t">
             <a:spAutoFit/>
           </a:bodyPr>
           <a:lstStyle/>
@@ -9019,27 +8812,27 @@
               </a:lnSpc>
             </a:pPr>
             <a:r>
-              <a:rPr sz="3400" b="1">
+              <a:rPr sz="3800" b="1">
                 <a:solidFill>
                   <a:srgbClr val="FFFFFF"/>
                 </a:solidFill>
                 <a:latin typeface="Helvetica Neue"/>
               </a:rPr>
-              <a:t>Que lo prometido sea lo entregado. Antes de la instalación, no después del reclamo.</a:t>
-            </a:r>
-          </a:p>
-        </p:txBody>
-      </p:sp>
-      <p:sp>
-        <p:nvSpPr>
-          <p:cNvPr id="7" name="TextBox 6"/>
+              <a:t>Que lo prometido sea lo entregado. Antes de instalar, no después del reclamo.</a:t>
+            </a:r>
+          </a:p>
+        </p:txBody>
+      </p:sp>
+      <p:sp>
+        <p:nvSpPr>
+          <p:cNvPr id="6" name="TextBox 5"/>
           <p:cNvSpPr txBox="1"/>
           <p:nvPr/>
         </p:nvSpPr>
         <p:spPr>
           <a:xfrm>
-            <a:off x="822960" y="2743200"/>
-            <a:ext cx="7315200" cy="548640"/>
+            <a:off x="822960" y="3657600"/>
+            <a:ext cx="7498079" cy="640080"/>
           </a:xfrm>
           <a:prstGeom prst="rect">
             <a:avLst/>
@@ -9047,7 +8840,7 @@
           <a:noFill/>
         </p:spPr>
         <p:txBody>
-          <a:bodyPr wrap="square" anchor="t" lIns="45720" rIns="45720" tIns="27432" bIns="27432">
+          <a:bodyPr wrap="square" anchor="t">
             <a:spAutoFit/>
           </a:bodyPr>
           <a:lstStyle/>
@@ -9058,7 +8851,7 @@
               </a:lnSpc>
             </a:pPr>
             <a:r>
-              <a:rPr sz="2000" b="1">
+              <a:rPr sz="2200" b="1">
                 <a:solidFill>
                   <a:srgbClr val="FF5A0A"/>
                 </a:solidFill>
@@ -9071,14 +8864,14 @@
       </p:sp>
       <p:sp>
         <p:nvSpPr>
-          <p:cNvPr id="8" name="TextBox 7"/>
+          <p:cNvPr id="7" name="TextBox 6"/>
           <p:cNvSpPr txBox="1"/>
           <p:nvPr/>
         </p:nvSpPr>
         <p:spPr>
           <a:xfrm>
-            <a:off x="822960" y="3383280"/>
-            <a:ext cx="7315200" cy="2377440"/>
+            <a:off x="822960" y="4389120"/>
+            <a:ext cx="7498079" cy="1828800"/>
           </a:xfrm>
           <a:prstGeom prst="rect">
             <a:avLst/>
@@ -9086,70 +8879,70 @@
           <a:noFill/>
         </p:spPr>
         <p:txBody>
-          <a:bodyPr wrap="square" anchor="t" lIns="45720" rIns="45720" tIns="27432" bIns="27432">
+          <a:bodyPr wrap="square" anchor="t">
             <a:spAutoFit/>
           </a:bodyPr>
           <a:lstStyle/>
           <a:p>
             <a:pPr algn="l">
               <a:lnSpc>
-                <a:spcPct val="125000"/>
+                <a:spcPct val="130000"/>
               </a:lnSpc>
             </a:pPr>
             <a:r>
-              <a:rPr sz="1600" b="0">
+              <a:rPr sz="2000" b="0">
                 <a:solidFill>
                   <a:srgbClr val="F6F6F6"/>
                 </a:solidFill>
                 <a:latin typeface="Helvetica Neue"/>
               </a:rPr>
-              <a:t>1 · Acceso por API al registro de ventas de un canal: 40 ventas por día bastan.</a:t>
+              <a:t>1 · Ventas de un canal, por API.</a:t>
             </a:r>
           </a:p>
           <a:p>
             <a:pPr algn="l">
               <a:lnSpc>
-                <a:spcPct val="125000"/>
+                <a:spcPct val="130000"/>
               </a:lnSpc>
             </a:pPr>
             <a:r>
-              <a:rPr sz="1600" b="0">
+              <a:rPr sz="2000" b="0">
                 <a:solidFill>
                   <a:srgbClr val="F6F6F6"/>
                 </a:solidFill>
                 <a:latin typeface="Helvetica Neue"/>
               </a:rPr>
-              <a:t>2 · Tres cifras que hoy no tenemos: mediana venta → instalación, % de instalaciones fallidas, costo por minuto del analista.</a:t>
+              <a:t>2 · Tres cifras que hoy no tenemos.</a:t>
             </a:r>
           </a:p>
           <a:p>
             <a:pPr algn="l">
               <a:lnSpc>
-                <a:spcPct val="125000"/>
+                <a:spcPct val="130000"/>
               </a:lnSpc>
             </a:pPr>
             <a:r>
-              <a:rPr sz="1600" b="0">
+              <a:rPr sz="2000" b="0">
                 <a:solidFill>
                   <a:srgbClr val="F6F6F6"/>
                 </a:solidFill>
                 <a:latin typeface="Helvetica Neue"/>
               </a:rPr>
-              <a:t>3 · Capturar los 5 campos del contrato que hoy no existen: la promesa textual, la reedición y la confirmación del cliente.</a:t>
-            </a:r>
-          </a:p>
-        </p:txBody>
-      </p:sp>
-      <p:sp>
-        <p:nvSpPr>
-          <p:cNvPr id="9" name="Rounded Rectangle 8"/>
+              <a:t>3 · Los 5 campos que faltan del contrato.</a:t>
+            </a:r>
+          </a:p>
+        </p:txBody>
+      </p:sp>
+      <p:sp>
+        <p:nvSpPr>
+          <p:cNvPr id="8" name="Rounded Rectangle 7"/>
           <p:cNvSpPr/>
           <p:nvPr/>
         </p:nvSpPr>
         <p:spPr>
           <a:xfrm>
-            <a:off x="8595360" y="1005840"/>
-            <a:ext cx="3200400" cy="4846320"/>
+            <a:off x="8686800" y="1097280"/>
+            <a:ext cx="3108960" cy="3977639"/>
           </a:xfrm>
           <a:prstGeom prst="roundRect">
             <a:avLst/>
@@ -9186,7 +8979,7 @@
       </p:sp>
       <p:pic>
         <p:nvPicPr>
-          <p:cNvPr id="10" name="Picture 9" descr="WIN-Reto03-QR-demo.png"/>
+          <p:cNvPr id="9" name="Picture 8" descr="WIN-Reto03-QR-demo.png"/>
           <p:cNvPicPr>
             <a:picLocks noChangeAspect="1"/>
           </p:cNvPicPr>
@@ -9200,8 +8993,8 @@
         </p:blipFill>
         <p:spPr>
           <a:xfrm>
-            <a:off x="8778240" y="1188720"/>
-            <a:ext cx="2834640" cy="2834640"/>
+            <a:off x="8869680" y="1280160"/>
+            <a:ext cx="2743200" cy="2743200"/>
           </a:xfrm>
           <a:prstGeom prst="rect">
             <a:avLst/>
@@ -9210,14 +9003,14 @@
       </p:pic>
       <p:sp>
         <p:nvSpPr>
-          <p:cNvPr id="11" name="TextBox 10"/>
+          <p:cNvPr id="10" name="TextBox 9"/>
           <p:cNvSpPr txBox="1"/>
           <p:nvPr/>
         </p:nvSpPr>
         <p:spPr>
           <a:xfrm>
-            <a:off x="8641080" y="4114800"/>
-            <a:ext cx="3108960" cy="457200"/>
+            <a:off x="8686800" y="4069080"/>
+            <a:ext cx="3108960" cy="411480"/>
           </a:xfrm>
           <a:prstGeom prst="rect">
             <a:avLst/>
@@ -9225,7 +9018,7 @@
           <a:noFill/>
         </p:spPr>
         <p:txBody>
-          <a:bodyPr wrap="square" anchor="t" lIns="45720" rIns="45720" tIns="27432" bIns="27432">
+          <a:bodyPr wrap="square" anchor="t">
             <a:spAutoFit/>
           </a:bodyPr>
           <a:lstStyle/>
@@ -9249,14 +9042,14 @@
       </p:sp>
       <p:sp>
         <p:nvSpPr>
-          <p:cNvPr id="12" name="TextBox 11"/>
+          <p:cNvPr id="11" name="TextBox 10"/>
           <p:cNvSpPr txBox="1"/>
           <p:nvPr/>
         </p:nvSpPr>
         <p:spPr>
           <a:xfrm>
-            <a:off x="8641080" y="4526280"/>
-            <a:ext cx="3108960" cy="822960"/>
+            <a:off x="8686800" y="4480560"/>
+            <a:ext cx="3108960" cy="548640"/>
           </a:xfrm>
           <a:prstGeom prst="rect">
             <a:avLst/>
@@ -9264,7 +9057,7 @@
           <a:noFill/>
         </p:spPr>
         <p:txBody>
-          <a:bodyPr wrap="square" anchor="t" lIns="45720" rIns="45720" tIns="27432" bIns="27432">
+          <a:bodyPr wrap="square" anchor="t">
             <a:spAutoFit/>
           </a:bodyPr>
           <a:lstStyle/>
@@ -9277,89 +9070,11 @@
             <a:r>
               <a:rPr sz="1100" b="0">
                 <a:solidFill>
-                  <a:srgbClr val="301D19"/>
-                </a:solidFill>
-                <a:latin typeface="Helvetica Neue"/>
-              </a:rPr>
-              <a:t>idealistic-carmela-preneolithic.ngrok-free.dev</a:t>
-            </a:r>
-          </a:p>
-        </p:txBody>
-      </p:sp>
-      <p:sp>
-        <p:nvSpPr>
-          <p:cNvPr id="13" name="TextBox 12"/>
-          <p:cNvSpPr txBox="1"/>
-          <p:nvPr/>
-        </p:nvSpPr>
-        <p:spPr>
-          <a:xfrm>
-            <a:off x="8641080" y="5212080"/>
-            <a:ext cx="3108960" cy="548640"/>
-          </a:xfrm>
-          <a:prstGeom prst="rect">
-            <a:avLst/>
-          </a:prstGeom>
-          <a:noFill/>
-        </p:spPr>
-        <p:txBody>
-          <a:bodyPr wrap="square" anchor="t" lIns="45720" rIns="45720" tIns="27432" bIns="27432">
-            <a:spAutoFit/>
-          </a:bodyPr>
-          <a:lstStyle/>
-          <a:p>
-            <a:pPr algn="ctr">
-              <a:lnSpc>
-                <a:spcPct val="105000"/>
-              </a:lnSpc>
-            </a:pPr>
-            <a:r>
-              <a:rPr sz="1000" b="0">
-                <a:solidFill>
                   <a:srgbClr val="4B4B4B"/>
                 </a:solidFill>
                 <a:latin typeface="Helvetica Neue"/>
               </a:rPr>
-              <a:t>Si aparece la página de ngrok, toca «Visit Site».</a:t>
-            </a:r>
-          </a:p>
-        </p:txBody>
-      </p:sp>
-      <p:sp>
-        <p:nvSpPr>
-          <p:cNvPr id="14" name="TextBox 13"/>
-          <p:cNvSpPr txBox="1"/>
-          <p:nvPr/>
-        </p:nvSpPr>
-        <p:spPr>
-          <a:xfrm>
-            <a:off x="822960" y="5943600"/>
-            <a:ext cx="7315200" cy="548640"/>
-          </a:xfrm>
-          <a:prstGeom prst="rect">
-            <a:avLst/>
-          </a:prstGeom>
-          <a:noFill/>
-        </p:spPr>
-        <p:txBody>
-          <a:bodyPr wrap="square" anchor="t" lIns="45720" rIns="45720" tIns="27432" bIns="27432">
-            <a:spAutoFit/>
-          </a:bodyPr>
-          <a:lstStyle/>
-          <a:p>
-            <a:pPr algn="l">
-              <a:lnSpc>
-                <a:spcPct val="105000"/>
-              </a:lnSpc>
-            </a:pPr>
-            <a:r>
-              <a:rPr sz="1300" b="0">
-                <a:solidFill>
-                  <a:srgbClr val="DEDBD9"/>
-                </a:solidFill>
-                <a:latin typeface="Helvetica Neue"/>
-              </a:rPr>
-              <a:t>Protege las ventas buenas, al cliente y al vendedor honesto. No es vigilancia sobre el vendedor.</a:t>
+              <a:t>Sin instalar nada · toca «Visit Site»</a:t>
             </a:r>
           </a:p>
         </p:txBody>
@@ -9372,7 +9087,7 @@
 </p:sld>
 </file>
 
-<file path=ppt/slides/slide8.xml><?xml version="1.0" encoding="utf-8"?>
+<file path=ppt/slides/slide9.xml><?xml version="1.0" encoding="utf-8"?>
 <p:sld xmlns:a="http://schemas.openxmlformats.org/drawingml/2006/main" xmlns:p="http://schemas.openxmlformats.org/presentationml/2006/main" xmlns:r="http://schemas.openxmlformats.org/officeDocument/2006/relationships">
   <p:cSld>
     <p:bg>
@@ -9475,7 +9190,7 @@
           <a:noFill/>
         </p:spPr>
         <p:txBody>
-          <a:bodyPr wrap="square" anchor="t" lIns="45720" rIns="45720" tIns="27432" bIns="27432">
+          <a:bodyPr wrap="square" anchor="t">
             <a:spAutoFit/>
           </a:bodyPr>
           <a:lstStyle/>
@@ -9514,7 +9229,7 @@
           <a:noFill/>
         </p:spPr>
         <p:txBody>
-          <a:bodyPr wrap="square" anchor="t" lIns="45720" rIns="45720" tIns="27432" bIns="27432">
+          <a:bodyPr wrap="square" anchor="t">
             <a:spAutoFit/>
           </a:bodyPr>
           <a:lstStyle/>
@@ -9525,13 +9240,13 @@
               </a:lnSpc>
             </a:pPr>
             <a:r>
-              <a:rPr sz="1400" b="0">
+              <a:rPr sz="1600" b="0">
                 <a:solidFill>
                   <a:srgbClr val="4B4B4B"/>
                 </a:solidFill>
                 <a:latin typeface="Helvetica Neue"/>
               </a:rPr>
-              <a:t>Sin instalar nada. Si aparece la página de ngrok, toca «Visit Site». Luego: Lote → Cargar los 25 casos de demo, o pega tu propio lote.</a:t>
+              <a:t>Toca «Visit Site» · Lote → Cargar los 25 casos de demo, o pega tu propio lote.</a:t>
             </a:r>
           </a:p>
         </p:txBody>
